--- a/decks/Day 1/Section4-AI-in-the-SDLC.pptx
+++ b/decks/Day 1/Section4-AI-in-the-SDLC.pptx
@@ -20,10 +20,7 @@
     <p:sldId id="268" r:id="rId14"/>
     <p:sldId id="269" r:id="rId15"/>
   </p:sldIdLst>
-  <p:notesMasterIdLst>
-    <p:notesMasterId r:id="rId16"/>
-  </p:notesMasterIdLst>
-  <p:sldSz cx="9144000" cy="5143500"/>
+  <p:sldSz cx="9144000" cy="5143500" type="screen16x9"/>
   <p:notesSz cx="5143500" cy="9144000"/>
   <p:defaultTextStyle>
     <a:lvl1pPr marL="0" algn="l" defTabSz="914400" rtl="0" eaLnBrk="1" latinLnBrk="0" hangingPunct="1">
@@ -117,356 +114,12 @@
       </a:defRPr>
     </a:lvl9pPr>
   </p:defaultTextStyle>
+  <p:extLst>
+    <p:ext uri="{EFAFB233-063F-42B5-8137-9DF3F51BA10A}">
+      <p15:sldGuideLst xmlns:p15="http://schemas.microsoft.com/office/powerpoint/2012/main"/>
+    </p:ext>
+  </p:extLst>
 </p:presentation>
-</file>
-
-<file path=ppt/notesMasters/notesMaster1.xml><?xml version="1.0" encoding="utf-8"?>
-<p:notesMaster xmlns:a="http://schemas.openxmlformats.org/drawingml/2006/main" xmlns:r="http://schemas.openxmlformats.org/officeDocument/2006/relationships" xmlns:p="http://schemas.openxmlformats.org/presentationml/2006/main">
-  <p:cSld>
-    <p:bg>
-      <p:bgRef idx="1001">
-        <a:schemeClr val="bg1"/>
-      </p:bgRef>
-    </p:bg>
-    <p:spTree>
-      <p:nvGrpSpPr>
-        <p:cNvPr id="1" name=""/>
-        <p:cNvGrpSpPr/>
-        <p:nvPr/>
-      </p:nvGrpSpPr>
-      <p:grpSpPr>
-        <a:xfrm>
-          <a:off x="0" y="0"/>
-          <a:ext cx="0" cy="0"/>
-          <a:chOff x="0" y="0"/>
-          <a:chExt cx="0" cy="0"/>
-        </a:xfrm>
-      </p:grpSpPr>
-      <p:sp>
-        <p:nvSpPr>
-          <p:cNvPr id="2" name="Header Placeholder 1"/>
-          <p:cNvSpPr>
-            <a:spLocks noGrp="1"/>
-          </p:cNvSpPr>
-          <p:nvPr>
-            <p:ph type="hdr" sz="quarter"/>
-          </p:nvPr>
-        </p:nvSpPr>
-        <p:spPr>
-          <a:xfrm>
-            <a:off x="0" y="0"/>
-            <a:ext cx="2971800" cy="458788"/>
-          </a:xfrm>
-          <a:prstGeom prst="rect">
-            <a:avLst/>
-          </a:prstGeom>
-        </p:spPr>
-        <p:txBody>
-          <a:bodyPr vert="horz" lIns="91440" tIns="45720" rIns="91440" bIns="45720" rtlCol="0"/>
-          <a:lstStyle>
-            <a:lvl1pPr algn="l">
-              <a:defRPr sz="1200"/>
-            </a:lvl1pPr>
-          </a:lstStyle>
-          <a:p>
-            <a:endParaRPr lang="en-US"/>
-          </a:p>
-        </p:txBody>
-      </p:sp>
-      <p:sp>
-        <p:nvSpPr>
-          <p:cNvPr id="3" name="Date Placeholder 2"/>
-          <p:cNvSpPr>
-            <a:spLocks noGrp="1"/>
-          </p:cNvSpPr>
-          <p:nvPr>
-            <p:ph type="dt" idx="1"/>
-          </p:nvPr>
-        </p:nvSpPr>
-        <p:spPr>
-          <a:xfrm>
-            <a:off x="3884613" y="0"/>
-            <a:ext cx="2971800" cy="458788"/>
-          </a:xfrm>
-          <a:prstGeom prst="rect">
-            <a:avLst/>
-          </a:prstGeom>
-        </p:spPr>
-        <p:txBody>
-          <a:bodyPr vert="horz" lIns="91440" tIns="45720" rIns="91440" bIns="45720" rtlCol="0"/>
-          <a:lstStyle>
-            <a:lvl1pPr algn="r">
-              <a:defRPr sz="1200"/>
-            </a:lvl1pPr>
-          </a:lstStyle>
-          <a:p>
-            <a:fld id="{5282F153-3F37-0F45-9E97-73ACFA13230C}" type="datetimeFigureOut">
-              <a:rPr lang="en-US"/>
-              <a:t>7/23/19</a:t>
-            </a:fld>
-            <a:endParaRPr lang="en-US"/>
-          </a:p>
-        </p:txBody>
-      </p:sp>
-      <p:sp>
-        <p:nvSpPr>
-          <p:cNvPr id="4" name="Slide Image Placeholder 3"/>
-          <p:cNvSpPr>
-            <a:spLocks noGrp="1" noRot="1" noChangeAspect="1"/>
-          </p:cNvSpPr>
-          <p:nvPr>
-            <p:ph type="sldImg" idx="2"/>
-          </p:nvPr>
-        </p:nvSpPr>
-        <p:spPr>
-          <a:xfrm>
-            <a:off x="685800" y="1143000"/>
-            <a:ext cx="5486400" cy="3086100"/>
-          </a:xfrm>
-          <a:prstGeom prst="rect">
-            <a:avLst/>
-          </a:prstGeom>
-          <a:noFill/>
-          <a:ln w="12700">
-            <a:solidFill>
-              <a:prstClr val="black"/>
-            </a:solidFill>
-          </a:ln>
-        </p:spPr>
-        <p:txBody>
-          <a:bodyPr vert="horz" lIns="91440" tIns="45720" rIns="91440" bIns="45720" rtlCol="0" anchor="ctr"/>
-          <a:lstStyle/>
-          <a:p>
-            <a:endParaRPr lang="en-US"/>
-          </a:p>
-        </p:txBody>
-      </p:sp>
-      <p:sp>
-        <p:nvSpPr>
-          <p:cNvPr id="5" name="Notes Placeholder 4"/>
-          <p:cNvSpPr>
-            <a:spLocks noGrp="1"/>
-          </p:cNvSpPr>
-          <p:nvPr>
-            <p:ph type="body" sz="quarter" idx="3"/>
-          </p:nvPr>
-        </p:nvSpPr>
-        <p:spPr>
-          <a:xfrm>
-            <a:off x="685800" y="4400550"/>
-            <a:ext cx="5486400" cy="3600450"/>
-          </a:xfrm>
-          <a:prstGeom prst="rect">
-            <a:avLst/>
-          </a:prstGeom>
-        </p:spPr>
-        <p:txBody>
-          <a:bodyPr vert="horz" lIns="91440" tIns="45720" rIns="91440" bIns="45720" rtlCol="0"/>
-          <a:lstStyle/>
-          <a:p>
-            <a:pPr lvl="0"/>
-            <a:r>
-              <a:rPr lang="en-US"/>
-              <a:t>Click to edit Master text styles</a:t>
-            </a:r>
-          </a:p>
-          <a:p>
-            <a:pPr lvl="1"/>
-            <a:r>
-              <a:rPr lang="en-US"/>
-              <a:t>Second level</a:t>
-            </a:r>
-          </a:p>
-          <a:p>
-            <a:pPr lvl="2"/>
-            <a:r>
-              <a:rPr lang="en-US"/>
-              <a:t>Third level</a:t>
-            </a:r>
-          </a:p>
-          <a:p>
-            <a:pPr lvl="3"/>
-            <a:r>
-              <a:rPr lang="en-US"/>
-              <a:t>Fourth level</a:t>
-            </a:r>
-          </a:p>
-          <a:p>
-            <a:pPr lvl="4"/>
-            <a:r>
-              <a:rPr lang="en-US"/>
-              <a:t>Fifth level</a:t>
-            </a:r>
-          </a:p>
-        </p:txBody>
-      </p:sp>
-      <p:sp>
-        <p:nvSpPr>
-          <p:cNvPr id="6" name="Footer Placeholder 5"/>
-          <p:cNvSpPr>
-            <a:spLocks noGrp="1"/>
-          </p:cNvSpPr>
-          <p:nvPr>
-            <p:ph type="ftr" sz="quarter" idx="4"/>
-          </p:nvPr>
-        </p:nvSpPr>
-        <p:spPr>
-          <a:xfrm>
-            <a:off x="0" y="8685213"/>
-            <a:ext cx="2971800" cy="458787"/>
-          </a:xfrm>
-          <a:prstGeom prst="rect">
-            <a:avLst/>
-          </a:prstGeom>
-        </p:spPr>
-        <p:txBody>
-          <a:bodyPr vert="horz" lIns="91440" tIns="45720" rIns="91440" bIns="45720" rtlCol="0" anchor="b"/>
-          <a:lstStyle>
-            <a:lvl1pPr algn="l">
-              <a:defRPr sz="1200"/>
-            </a:lvl1pPr>
-          </a:lstStyle>
-          <a:p>
-            <a:endParaRPr lang="en-US"/>
-          </a:p>
-        </p:txBody>
-      </p:sp>
-      <p:sp>
-        <p:nvSpPr>
-          <p:cNvPr id="7" name="Slide Number Placeholder 6"/>
-          <p:cNvSpPr>
-            <a:spLocks noGrp="1"/>
-          </p:cNvSpPr>
-          <p:nvPr>
-            <p:ph type="sldNum" sz="quarter" idx="5"/>
-          </p:nvPr>
-        </p:nvSpPr>
-        <p:spPr>
-          <a:xfrm>
-            <a:off x="3884613" y="8685213"/>
-            <a:ext cx="2971800" cy="458787"/>
-          </a:xfrm>
-          <a:prstGeom prst="rect">
-            <a:avLst/>
-          </a:prstGeom>
-        </p:spPr>
-        <p:txBody>
-          <a:bodyPr vert="horz" lIns="91440" tIns="45720" rIns="91440" bIns="45720" rtlCol="0" anchor="b"/>
-          <a:lstStyle>
-            <a:lvl1pPr algn="r">
-              <a:defRPr sz="1200"/>
-            </a:lvl1pPr>
-          </a:lstStyle>
-          <a:p>
-            <a:fld id="{CE5E9CC1-C706-0F49-92D6-E571CC5EEA8F}" type="slidenum">
-              <a:rPr lang="en-US"/>
-              <a:t>‹#›</a:t>
-            </a:fld>
-            <a:endParaRPr lang="en-US"/>
-          </a:p>
-        </p:txBody>
-      </p:sp>
-    </p:spTree>
-    <p:extLst>
-      <p:ext uri="{BB962C8B-B14F-4D97-AF65-F5344CB8AC3E}">
-        <p14:creationId xmlns:p14="http://schemas.microsoft.com/office/powerpoint/2010/main" val="1024086991"/>
-      </p:ext>
-    </p:extLst>
-  </p:cSld>
-  <p:clrMap bg1="lt1" tx1="dk1" bg2="lt2" tx2="dk2" accent1="accent1" accent2="accent2" accent3="accent3" accent4="accent4" accent5="accent5" accent6="accent6" hlink="hlink" folHlink="folHlink"/>
-  <p:notesStyle>
-    <a:lvl1pPr marL="0" algn="l" defTabSz="914400" rtl="0" eaLnBrk="1" latinLnBrk="0" hangingPunct="1">
-      <a:defRPr sz="1200" kern="1200">
-        <a:solidFill>
-          <a:schemeClr val="tx1"/>
-        </a:solidFill>
-        <a:latin typeface="+mn-lt"/>
-        <a:ea typeface="+mn-ea"/>
-        <a:cs typeface="+mn-cs"/>
-      </a:defRPr>
-    </a:lvl1pPr>
-    <a:lvl2pPr marL="457200" algn="l" defTabSz="914400" rtl="0" eaLnBrk="1" latinLnBrk="0" hangingPunct="1">
-      <a:defRPr sz="1200" kern="1200">
-        <a:solidFill>
-          <a:schemeClr val="tx1"/>
-        </a:solidFill>
-        <a:latin typeface="+mn-lt"/>
-        <a:ea typeface="+mn-ea"/>
-        <a:cs typeface="+mn-cs"/>
-      </a:defRPr>
-    </a:lvl2pPr>
-    <a:lvl3pPr marL="914400" algn="l" defTabSz="914400" rtl="0" eaLnBrk="1" latinLnBrk="0" hangingPunct="1">
-      <a:defRPr sz="1200" kern="1200">
-        <a:solidFill>
-          <a:schemeClr val="tx1"/>
-        </a:solidFill>
-        <a:latin typeface="+mn-lt"/>
-        <a:ea typeface="+mn-ea"/>
-        <a:cs typeface="+mn-cs"/>
-      </a:defRPr>
-    </a:lvl3pPr>
-    <a:lvl4pPr marL="1371600" algn="l" defTabSz="914400" rtl="0" eaLnBrk="1" latinLnBrk="0" hangingPunct="1">
-      <a:defRPr sz="1200" kern="1200">
-        <a:solidFill>
-          <a:schemeClr val="tx1"/>
-        </a:solidFill>
-        <a:latin typeface="+mn-lt"/>
-        <a:ea typeface="+mn-ea"/>
-        <a:cs typeface="+mn-cs"/>
-      </a:defRPr>
-    </a:lvl4pPr>
-    <a:lvl5pPr marL="1828800" algn="l" defTabSz="914400" rtl="0" eaLnBrk="1" latinLnBrk="0" hangingPunct="1">
-      <a:defRPr sz="1200" kern="1200">
-        <a:solidFill>
-          <a:schemeClr val="tx1"/>
-        </a:solidFill>
-        <a:latin typeface="+mn-lt"/>
-        <a:ea typeface="+mn-ea"/>
-        <a:cs typeface="+mn-cs"/>
-      </a:defRPr>
-    </a:lvl5pPr>
-    <a:lvl6pPr marL="2286000" algn="l" defTabSz="914400" rtl="0" eaLnBrk="1" latinLnBrk="0" hangingPunct="1">
-      <a:defRPr sz="1200" kern="1200">
-        <a:solidFill>
-          <a:schemeClr val="tx1"/>
-        </a:solidFill>
-        <a:latin typeface="+mn-lt"/>
-        <a:ea typeface="+mn-ea"/>
-        <a:cs typeface="+mn-cs"/>
-      </a:defRPr>
-    </a:lvl6pPr>
-    <a:lvl7pPr marL="2743200" algn="l" defTabSz="914400" rtl="0" eaLnBrk="1" latinLnBrk="0" hangingPunct="1">
-      <a:defRPr sz="1200" kern="1200">
-        <a:solidFill>
-          <a:schemeClr val="tx1"/>
-        </a:solidFill>
-        <a:latin typeface="+mn-lt"/>
-        <a:ea typeface="+mn-ea"/>
-        <a:cs typeface="+mn-cs"/>
-      </a:defRPr>
-    </a:lvl7pPr>
-    <a:lvl8pPr marL="3200400" algn="l" defTabSz="914400" rtl="0" eaLnBrk="1" latinLnBrk="0" hangingPunct="1">
-      <a:defRPr sz="1200" kern="1200">
-        <a:solidFill>
-          <a:schemeClr val="tx1"/>
-        </a:solidFill>
-        <a:latin typeface="+mn-lt"/>
-        <a:ea typeface="+mn-ea"/>
-        <a:cs typeface="+mn-cs"/>
-      </a:defRPr>
-    </a:lvl8pPr>
-    <a:lvl9pPr marL="3657600" algn="l" defTabSz="914400" rtl="0" eaLnBrk="1" latinLnBrk="0" hangingPunct="1">
-      <a:defRPr sz="1200" kern="1200">
-        <a:solidFill>
-          <a:schemeClr val="tx1"/>
-        </a:solidFill>
-        <a:latin typeface="+mn-lt"/>
-        <a:ea typeface="+mn-ea"/>
-        <a:cs typeface="+mn-cs"/>
-      </a:defRPr>
-    </a:lvl9pPr>
-  </p:notesStyle>
-</p:notesMaster>
 </file>
 
 <file path=ppt/slideLayouts/slideLayout1.xml><?xml version="1.0" encoding="utf-8"?>
@@ -792,6 +445,7 @@
         <a:solidFill>
           <a:srgbClr val="F0EEE6"/>
         </a:solidFill>
+        <a:effectLst/>
       </p:bgPr>
     </p:bg>
     <p:spTree>
@@ -827,6 +481,13 @@
           </a:solidFill>
           <a:ln/>
         </p:spPr>
+        <p:txBody>
+          <a:bodyPr/>
+          <a:lstStyle/>
+          <a:p>
+            <a:endParaRPr lang="en-US"/>
+          </a:p>
+        </p:txBody>
       </p:sp>
       <p:sp>
         <p:nvSpPr>
@@ -847,17 +508,24 @@
           </a:solidFill>
           <a:ln/>
         </p:spPr>
+        <p:txBody>
+          <a:bodyPr/>
+          <a:lstStyle/>
+          <a:p>
+            <a:endParaRPr lang="en-US"/>
+          </a:p>
+        </p:txBody>
       </p:sp>
       <p:pic>
         <p:nvPicPr>
-          <p:cNvPr id="4" name="Image 0" descr="preencoded.png">    </p:cNvPr>
+          <p:cNvPr id="4" name="Image 0" descr="preencoded.png"/>
           <p:cNvPicPr>
             <a:picLocks noChangeAspect="1"/>
           </p:cNvPicPr>
           <p:nvPr/>
         </p:nvPicPr>
         <p:blipFill>
-          <a:blip r:embed="rId1"/>
+          <a:blip r:embed="rId2"/>
           <a:stretch>
             <a:fillRect/>
           </a:stretch>
@@ -893,11 +561,11 @@
           <a:bodyPr wrap="square" lIns="0" tIns="0" rIns="0" bIns="0" rtlCol="0" anchor="ctr"/>
           <a:lstStyle/>
           <a:p>
-            <a:pPr indent="0" marL="0">
-              <a:buNone/>
-            </a:pPr>
-            <a:r>
-              <a:rPr lang="en-US" sz="1400" b="1" spc="300" kern="0" dirty="0">
+            <a:pPr marL="0" indent="0">
+              <a:buNone/>
+            </a:pPr>
+            <a:r>
+              <a:rPr lang="en-US" sz="1400" b="1" kern="0" spc="300" dirty="0">
                 <a:solidFill>
                   <a:srgbClr val="D97757"/>
                 </a:solidFill>
@@ -932,7 +600,7 @@
           <a:bodyPr wrap="square" lIns="0" tIns="0" rIns="0" bIns="0" rtlCol="0" anchor="ctr"/>
           <a:lstStyle/>
           <a:p>
-            <a:pPr indent="0" marL="0">
+            <a:pPr marL="0" indent="0">
               <a:buNone/>
             </a:pPr>
             <a:r>
@@ -972,6 +640,13 @@
             <a:prstDash val="solid"/>
           </a:ln>
         </p:spPr>
+        <p:txBody>
+          <a:bodyPr/>
+          <a:lstStyle/>
+          <a:p>
+            <a:endParaRPr lang="en-US"/>
+          </a:p>
+        </p:txBody>
       </p:sp>
       <p:sp>
         <p:nvSpPr>
@@ -994,7 +669,7 @@
           <a:bodyPr wrap="square" lIns="0" tIns="0" rIns="0" bIns="0" rtlCol="0" anchor="ctr"/>
           <a:lstStyle/>
           <a:p>
-            <a:pPr indent="0" marL="0">
+            <a:pPr marL="0" indent="0">
               <a:buNone/>
             </a:pPr>
             <a:r>
@@ -1009,45 +684,6 @@
               <a:t>90 min  ·  30 lecture / demo  +  60 lab</a:t>
             </a:r>
             <a:endParaRPr lang="en-US" sz="1700" dirty="0"/>
-          </a:p>
-        </p:txBody>
-      </p:sp>
-      <p:sp>
-        <p:nvSpPr>
-          <p:cNvPr id="9" name="Text 6"/>
-          <p:cNvSpPr/>
-          <p:nvPr/>
-        </p:nvSpPr>
-        <p:spPr>
-          <a:xfrm>
-            <a:off x="640080" y="4462272"/>
-            <a:ext cx="8046720" cy="292608"/>
-          </a:xfrm>
-          <a:prstGeom prst="rect">
-            <a:avLst/>
-          </a:prstGeom>
-          <a:noFill/>
-          <a:ln/>
-        </p:spPr>
-        <p:txBody>
-          <a:bodyPr wrap="square" lIns="0" tIns="0" rIns="0" bIns="0" rtlCol="0" anchor="ctr"/>
-          <a:lstStyle/>
-          <a:p>
-            <a:pPr indent="0" marL="0">
-              <a:buNone/>
-            </a:pPr>
-            <a:r>
-              <a:rPr lang="en-US" sz="1000" i="1" dirty="0">
-                <a:solidFill>
-                  <a:srgbClr val="615C52"/>
-                </a:solidFill>
-                <a:latin typeface="Inter" pitchFamily="34" charset="0"/>
-                <a:ea typeface="Inter" pitchFamily="34" charset="-122"/>
-                <a:cs typeface="Inter" pitchFamily="34" charset="-120"/>
-              </a:rPr>
-              <a:t>dotnetclaude.com  ·  .NET AI with Claude Workshop</a:t>
-            </a:r>
-            <a:endParaRPr lang="en-US" sz="1000" dirty="0"/>
           </a:p>
         </p:txBody>
       </p:sp>
@@ -1067,6 +703,7 @@
         <a:solidFill>
           <a:srgbClr val="F0EEE6"/>
         </a:solidFill>
+        <a:effectLst/>
       </p:bgPr>
     </p:bg>
     <p:spTree>
@@ -1104,11 +741,11 @@
           <a:bodyPr wrap="square" lIns="0" tIns="0" rIns="0" bIns="0" rtlCol="0" anchor="ctr"/>
           <a:lstStyle/>
           <a:p>
-            <a:pPr indent="0" marL="0">
-              <a:buNone/>
-            </a:pPr>
-            <a:r>
-              <a:rPr lang="en-US" sz="1100" b="1" spc="200" kern="0" dirty="0">
+            <a:pPr marL="0" indent="0">
+              <a:buNone/>
+            </a:pPr>
+            <a:r>
+              <a:rPr lang="en-US" sz="1100" b="1" kern="0" spc="200" dirty="0">
                 <a:solidFill>
                   <a:srgbClr val="D97757"/>
                 </a:solidFill>
@@ -1143,7 +780,7 @@
           <a:bodyPr wrap="square" lIns="0" tIns="0" rIns="0" bIns="0" rtlCol="0" anchor="ctr"/>
           <a:lstStyle/>
           <a:p>
-            <a:pPr indent="0" marL="0">
+            <a:pPr marL="0" indent="0">
               <a:buNone/>
             </a:pPr>
             <a:r>
@@ -1163,14 +800,14 @@
       </p:sp>
       <p:pic>
         <p:nvPicPr>
-          <p:cNvPr id="4" name="Image 0" descr="preencoded.png">    </p:cNvPr>
+          <p:cNvPr id="4" name="Image 0" descr="preencoded.png"/>
           <p:cNvPicPr>
             <a:picLocks noChangeAspect="1"/>
           </p:cNvPicPr>
           <p:nvPr/>
         </p:nvPicPr>
         <p:blipFill>
-          <a:blip r:embed="rId1"/>
+          <a:blip r:embed="rId2"/>
           <a:stretch>
             <a:fillRect/>
           </a:stretch>
@@ -1211,13 +848,20 @@
             <a:prstDash val="solid"/>
           </a:ln>
           <a:effectLst>
-            <a:outerShdw sx="100000" sy="100000" kx="0" ky="0" algn="bl" rotWithShape="0" blurRad="88900" dist="38100" dir="5400000">
+            <a:outerShdw blurRad="88900" dist="38100" dir="5400000" algn="bl" rotWithShape="0">
               <a:srgbClr val="000000">
                 <a:alpha val="10000"/>
               </a:srgbClr>
             </a:outerShdw>
           </a:effectLst>
         </p:spPr>
+        <p:txBody>
+          <a:bodyPr/>
+          <a:lstStyle/>
+          <a:p>
+            <a:endParaRPr lang="en-US"/>
+          </a:p>
+        </p:txBody>
       </p:sp>
       <p:sp>
         <p:nvSpPr>
@@ -1238,17 +882,24 @@
           </a:solidFill>
           <a:ln/>
         </p:spPr>
+        <p:txBody>
+          <a:bodyPr/>
+          <a:lstStyle/>
+          <a:p>
+            <a:endParaRPr lang="en-US"/>
+          </a:p>
+        </p:txBody>
       </p:sp>
       <p:pic>
         <p:nvPicPr>
-          <p:cNvPr id="7" name="Image 1" descr="preencoded.png">    </p:cNvPr>
+          <p:cNvPr id="7" name="Image 1" descr="preencoded.png"/>
           <p:cNvPicPr>
             <a:picLocks noChangeAspect="1"/>
           </p:cNvPicPr>
           <p:nvPr/>
         </p:nvPicPr>
         <p:blipFill>
-          <a:blip r:embed="rId2"/>
+          <a:blip r:embed="rId3"/>
           <a:stretch>
             <a:fillRect/>
           </a:stretch>
@@ -1284,7 +935,7 @@
           <a:bodyPr wrap="square" lIns="0" tIns="0" rIns="0" bIns="0" rtlCol="0" anchor="ctr"/>
           <a:lstStyle/>
           <a:p>
-            <a:pPr indent="0" marL="0">
+            <a:pPr marL="0" indent="0">
               <a:buNone/>
             </a:pPr>
             <a:r>
@@ -1323,7 +974,7 @@
           <a:bodyPr wrap="square" lIns="0" tIns="0" rIns="0" bIns="0" rtlCol="0" anchor="ctr"/>
           <a:lstStyle/>
           <a:p>
-            <a:pPr indent="0" marL="0">
+            <a:pPr marL="0" indent="0">
               <a:buNone/>
             </a:pPr>
             <a:r>
@@ -1367,13 +1018,20 @@
             <a:prstDash val="solid"/>
           </a:ln>
           <a:effectLst>
-            <a:outerShdw sx="100000" sy="100000" kx="0" ky="0" algn="bl" rotWithShape="0" blurRad="88900" dist="38100" dir="5400000">
+            <a:outerShdw blurRad="88900" dist="38100" dir="5400000" algn="bl" rotWithShape="0">
               <a:srgbClr val="000000">
                 <a:alpha val="10000"/>
               </a:srgbClr>
             </a:outerShdw>
           </a:effectLst>
         </p:spPr>
+        <p:txBody>
+          <a:bodyPr/>
+          <a:lstStyle/>
+          <a:p>
+            <a:endParaRPr lang="en-US"/>
+          </a:p>
+        </p:txBody>
       </p:sp>
       <p:sp>
         <p:nvSpPr>
@@ -1394,17 +1052,24 @@
           </a:solidFill>
           <a:ln/>
         </p:spPr>
+        <p:txBody>
+          <a:bodyPr/>
+          <a:lstStyle/>
+          <a:p>
+            <a:endParaRPr lang="en-US"/>
+          </a:p>
+        </p:txBody>
       </p:sp>
       <p:pic>
         <p:nvPicPr>
-          <p:cNvPr id="12" name="Image 2" descr="preencoded.png">    </p:cNvPr>
+          <p:cNvPr id="12" name="Image 2" descr="preencoded.png"/>
           <p:cNvPicPr>
             <a:picLocks noChangeAspect="1"/>
           </p:cNvPicPr>
           <p:nvPr/>
         </p:nvPicPr>
         <p:blipFill>
-          <a:blip r:embed="rId3"/>
+          <a:blip r:embed="rId4"/>
           <a:stretch>
             <a:fillRect/>
           </a:stretch>
@@ -1440,7 +1105,7 @@
           <a:bodyPr wrap="square" lIns="0" tIns="0" rIns="0" bIns="0" rtlCol="0" anchor="ctr"/>
           <a:lstStyle/>
           <a:p>
-            <a:pPr indent="0" marL="0">
+            <a:pPr marL="0" indent="0">
               <a:buNone/>
             </a:pPr>
             <a:r>
@@ -1479,7 +1144,7 @@
           <a:bodyPr wrap="square" lIns="0" tIns="0" rIns="0" bIns="0" rtlCol="0" anchor="ctr"/>
           <a:lstStyle/>
           <a:p>
-            <a:pPr indent="0" marL="0">
+            <a:pPr marL="0" indent="0">
               <a:buNone/>
             </a:pPr>
             <a:r>
@@ -1523,13 +1188,20 @@
             <a:prstDash val="solid"/>
           </a:ln>
           <a:effectLst>
-            <a:outerShdw sx="100000" sy="100000" kx="0" ky="0" algn="bl" rotWithShape="0" blurRad="88900" dist="38100" dir="5400000">
+            <a:outerShdw blurRad="88900" dist="38100" dir="5400000" algn="bl" rotWithShape="0">
               <a:srgbClr val="000000">
                 <a:alpha val="10000"/>
               </a:srgbClr>
             </a:outerShdw>
           </a:effectLst>
         </p:spPr>
+        <p:txBody>
+          <a:bodyPr/>
+          <a:lstStyle/>
+          <a:p>
+            <a:endParaRPr lang="en-US"/>
+          </a:p>
+        </p:txBody>
       </p:sp>
       <p:sp>
         <p:nvSpPr>
@@ -1550,17 +1222,24 @@
           </a:solidFill>
           <a:ln/>
         </p:spPr>
+        <p:txBody>
+          <a:bodyPr/>
+          <a:lstStyle/>
+          <a:p>
+            <a:endParaRPr lang="en-US"/>
+          </a:p>
+        </p:txBody>
       </p:sp>
       <p:pic>
         <p:nvPicPr>
-          <p:cNvPr id="17" name="Image 3" descr="preencoded.png">    </p:cNvPr>
+          <p:cNvPr id="17" name="Image 3" descr="preencoded.png"/>
           <p:cNvPicPr>
             <a:picLocks noChangeAspect="1"/>
           </p:cNvPicPr>
           <p:nvPr/>
         </p:nvPicPr>
         <p:blipFill>
-          <a:blip r:embed="rId4"/>
+          <a:blip r:embed="rId5"/>
           <a:stretch>
             <a:fillRect/>
           </a:stretch>
@@ -1596,7 +1275,7 @@
           <a:bodyPr wrap="square" lIns="0" tIns="0" rIns="0" bIns="0" rtlCol="0" anchor="ctr"/>
           <a:lstStyle/>
           <a:p>
-            <a:pPr indent="0" marL="0">
+            <a:pPr marL="0" indent="0">
               <a:buNone/>
             </a:pPr>
             <a:r>
@@ -1635,7 +1314,7 @@
           <a:bodyPr wrap="square" lIns="0" tIns="0" rIns="0" bIns="0" rtlCol="0" anchor="ctr"/>
           <a:lstStyle/>
           <a:p>
-            <a:pPr indent="0" marL="0">
+            <a:pPr marL="0" indent="0">
               <a:buNone/>
             </a:pPr>
             <a:r>
@@ -1674,7 +1353,7 @@
           <a:bodyPr wrap="square" rtlCol="0" anchor="ctr"/>
           <a:lstStyle/>
           <a:p>
-            <a:pPr indent="0" marL="0">
+            <a:pPr marL="0" indent="0">
               <a:buNone/>
             </a:pPr>
             <a:r>
@@ -1713,7 +1392,7 @@
           <a:bodyPr wrap="square" rtlCol="0" anchor="ctr"/>
           <a:lstStyle/>
           <a:p>
-            <a:pPr algn="r" indent="0" marL="0">
+            <a:pPr marL="0" indent="0" algn="r">
               <a:buNone/>
             </a:pPr>
             <a:r>
@@ -1728,45 +1407,6 @@
               <a:t>Section 4  ·  10/14</a:t>
             </a:r>
             <a:endParaRPr lang="en-US" sz="900" dirty="0"/>
-          </a:p>
-        </p:txBody>
-      </p:sp>
-      <p:sp>
-        <p:nvSpPr>
-          <p:cNvPr id="22" name="Text 16"/>
-          <p:cNvSpPr/>
-          <p:nvPr/>
-        </p:nvSpPr>
-        <p:spPr>
-          <a:xfrm>
-            <a:off x="548640" y="4462272"/>
-            <a:ext cx="8046720" cy="274320"/>
-          </a:xfrm>
-          <a:prstGeom prst="rect">
-            <a:avLst/>
-          </a:prstGeom>
-          <a:noFill/>
-          <a:ln/>
-        </p:spPr>
-        <p:txBody>
-          <a:bodyPr wrap="square" lIns="0" tIns="0" rIns="0" bIns="0" rtlCol="0" anchor="ctr"/>
-          <a:lstStyle/>
-          <a:p>
-            <a:pPr indent="0" marL="0">
-              <a:buNone/>
-            </a:pPr>
-            <a:r>
-              <a:rPr lang="en-US" sz="1000" i="1" dirty="0">
-                <a:solidFill>
-                  <a:srgbClr val="615C52"/>
-                </a:solidFill>
-                <a:latin typeface="Inter" pitchFamily="34" charset="0"/>
-                <a:ea typeface="Inter" pitchFamily="34" charset="-122"/>
-                <a:cs typeface="Inter" pitchFamily="34" charset="-120"/>
-              </a:rPr>
-              <a:t>▸ Make Claude argue trade-offs and record the decision — not just pick one.</a:t>
-            </a:r>
-            <a:endParaRPr lang="en-US" sz="1000" dirty="0"/>
           </a:p>
         </p:txBody>
       </p:sp>
@@ -1786,6 +1426,7 @@
         <a:solidFill>
           <a:srgbClr val="F0EEE6"/>
         </a:solidFill>
+        <a:effectLst/>
       </p:bgPr>
     </p:bg>
     <p:spTree>
@@ -1804,210 +1445,7 @@
       </p:grpSpPr>
       <p:pic>
         <p:nvPicPr>
-          <p:cNvPr id="2" name="Image 0" descr="preencoded.png">    </p:cNvPr>
-          <p:cNvPicPr>
-            <a:picLocks noChangeAspect="1"/>
-          </p:cNvPicPr>
-          <p:nvPr/>
-        </p:nvPicPr>
-        <p:blipFill>
-          <a:blip r:embed="rId1"/>
-          <a:stretch>
-            <a:fillRect/>
-          </a:stretch>
-        </p:blipFill>
-        <p:spPr>
-          <a:xfrm>
-            <a:off x="8321040" y="411480"/>
-            <a:ext cx="347472" cy="292608"/>
-          </a:xfrm>
-          <a:prstGeom prst="rect">
-            <a:avLst/>
-          </a:prstGeom>
-        </p:spPr>
-      </p:pic>
-      <p:sp>
-        <p:nvSpPr>
-          <p:cNvPr id="3" name="Shape 0"/>
-          <p:cNvSpPr/>
-          <p:nvPr/>
-        </p:nvSpPr>
-        <p:spPr>
-          <a:xfrm>
-            <a:off x="548640" y="822960"/>
-            <a:ext cx="3200400" cy="548640"/>
-          </a:xfrm>
-          <a:prstGeom prst="roundRect">
-            <a:avLst>
-              <a:gd name="adj" fmla="val 50000"/>
-            </a:avLst>
-          </a:prstGeom>
-          <a:solidFill>
-            <a:srgbClr val="C0392B"/>
-          </a:solidFill>
-          <a:ln/>
-        </p:spPr>
-      </p:sp>
-      <p:sp>
-        <p:nvSpPr>
-          <p:cNvPr id="4" name="Shape 1"/>
-          <p:cNvSpPr/>
-          <p:nvPr/>
-        </p:nvSpPr>
-        <p:spPr>
-          <a:xfrm>
-            <a:off x="804672" y="1014984"/>
-            <a:ext cx="164592" cy="164592"/>
-          </a:xfrm>
-          <a:prstGeom prst="ellipse">
-            <a:avLst/>
-          </a:prstGeom>
-          <a:solidFill>
-            <a:srgbClr val="FFFFFF"/>
-          </a:solidFill>
-          <a:ln/>
-        </p:spPr>
-      </p:sp>
-      <p:sp>
-        <p:nvSpPr>
-          <p:cNvPr id="5" name="Text 2"/>
-          <p:cNvSpPr/>
-          <p:nvPr/>
-        </p:nvSpPr>
-        <p:spPr>
-          <a:xfrm>
-            <a:off x="1051560" y="822960"/>
-            <a:ext cx="2560320" cy="548640"/>
-          </a:xfrm>
-          <a:prstGeom prst="rect">
-            <a:avLst/>
-          </a:prstGeom>
-          <a:noFill/>
-          <a:ln/>
-        </p:spPr>
-        <p:txBody>
-          <a:bodyPr wrap="square" lIns="0" tIns="0" rIns="0" bIns="0" rtlCol="0" anchor="ctr"/>
-          <a:lstStyle/>
-          <a:p>
-            <a:pPr indent="0" marL="0">
-              <a:buNone/>
-            </a:pPr>
-            <a:r>
-              <a:rPr lang="en-US" sz="1700" b="1" spc="100" kern="0" dirty="0">
-                <a:solidFill>
-                  <a:srgbClr val="FFFFFF"/>
-                </a:solidFill>
-                <a:latin typeface="Inter" pitchFamily="34" charset="0"/>
-                <a:ea typeface="Inter" pitchFamily="34" charset="-122"/>
-                <a:cs typeface="Inter" pitchFamily="34" charset="-120"/>
-              </a:rPr>
-              <a:t>LIVE DEMO</a:t>
-            </a:r>
-            <a:endParaRPr lang="en-US" sz="1700" dirty="0"/>
-          </a:p>
-        </p:txBody>
-      </p:sp>
-      <p:sp>
-        <p:nvSpPr>
-          <p:cNvPr id="6" name="Text 3"/>
-          <p:cNvSpPr/>
-          <p:nvPr/>
-        </p:nvSpPr>
-        <p:spPr>
-          <a:xfrm>
-            <a:off x="548640" y="1600200"/>
-            <a:ext cx="8046720" cy="502920"/>
-          </a:xfrm>
-          <a:prstGeom prst="rect">
-            <a:avLst/>
-          </a:prstGeom>
-          <a:noFill/>
-          <a:ln/>
-        </p:spPr>
-        <p:txBody>
-          <a:bodyPr wrap="square" lIns="0" tIns="0" rIns="0" bIns="0" rtlCol="0" anchor="ctr"/>
-          <a:lstStyle/>
-          <a:p>
-            <a:pPr indent="0" marL="0">
-              <a:buNone/>
-            </a:pPr>
-            <a:r>
-              <a:rPr lang="en-US" sz="2900" b="1" dirty="0">
-                <a:solidFill>
-                  <a:srgbClr val="141413"/>
-                </a:solidFill>
-                <a:latin typeface="Georgia" pitchFamily="34" charset="0"/>
-                <a:ea typeface="Georgia" pitchFamily="34" charset="-122"/>
-                <a:cs typeface="Georgia" pitchFamily="34" charset="-120"/>
-              </a:rPr>
-              <a:t>Feature from spec + live debugging</a:t>
-            </a:r>
-            <a:endParaRPr lang="en-US" sz="2900" dirty="0"/>
-          </a:p>
-        </p:txBody>
-      </p:sp>
-      <p:sp>
-        <p:nvSpPr>
-          <p:cNvPr id="7" name="Text 4"/>
-          <p:cNvSpPr/>
-          <p:nvPr/>
-        </p:nvSpPr>
-        <p:spPr>
-          <a:xfrm>
-            <a:off x="548640" y="2121408"/>
-            <a:ext cx="8046720" cy="365760"/>
-          </a:xfrm>
-          <a:prstGeom prst="rect">
-            <a:avLst/>
-          </a:prstGeom>
-          <a:noFill/>
-          <a:ln/>
-        </p:spPr>
-        <p:txBody>
-          <a:bodyPr wrap="square" lIns="0" tIns="0" rIns="0" bIns="0" rtlCol="0" anchor="ctr"/>
-          <a:lstStyle/>
-          <a:p>
-            <a:pPr indent="0" marL="0">
-              <a:buNone/>
-            </a:pPr>
-            <a:r>
-              <a:rPr lang="en-US" sz="1600" b="1" dirty="0">
-                <a:solidFill>
-                  <a:srgbClr val="D97757"/>
-                </a:solidFill>
-                <a:latin typeface="Inter" pitchFamily="34" charset="0"/>
-                <a:ea typeface="Inter" pitchFamily="34" charset="-122"/>
-                <a:cs typeface="Inter" pitchFamily="34" charset="-120"/>
-              </a:rPr>
-              <a:t>Build it, break it, then diagnose from a stack trace</a:t>
-            </a:r>
-            <a:endParaRPr lang="en-US" sz="1600" dirty="0"/>
-          </a:p>
-        </p:txBody>
-      </p:sp>
-      <p:sp>
-        <p:nvSpPr>
-          <p:cNvPr id="8" name="Shape 5"/>
-          <p:cNvSpPr/>
-          <p:nvPr/>
-        </p:nvSpPr>
-        <p:spPr>
-          <a:xfrm>
-            <a:off x="566928" y="2715768"/>
-            <a:ext cx="274320" cy="274320"/>
-          </a:xfrm>
-          <a:prstGeom prst="ellipse">
-            <a:avLst/>
-          </a:prstGeom>
-          <a:solidFill>
-            <a:srgbClr val="C0392B"/>
-          </a:solidFill>
-          <a:ln/>
-        </p:spPr>
-      </p:sp>
-      <p:pic>
-        <p:nvPicPr>
-          <p:cNvPr id="9" name="Image 1" descr="preencoded.png">    </p:cNvPr>
+          <p:cNvPr id="2" name="Image 0" descr="preencoded.png"/>
           <p:cNvPicPr>
             <a:picLocks noChangeAspect="1"/>
           </p:cNvPicPr>
@@ -2021,8 +1459,8 @@
         </p:blipFill>
         <p:spPr>
           <a:xfrm>
-            <a:off x="638251" y="2787091"/>
-            <a:ext cx="131674" cy="131674"/>
+            <a:off x="8321040" y="411480"/>
+            <a:ext cx="347472" cy="292608"/>
           </a:xfrm>
           <a:prstGeom prst="rect">
             <a:avLst/>
@@ -2031,66 +1469,207 @@
       </p:pic>
       <p:sp>
         <p:nvSpPr>
-          <p:cNvPr id="10" name="Text 6"/>
-          <p:cNvSpPr/>
-          <p:nvPr/>
-        </p:nvSpPr>
-        <p:spPr>
-          <a:xfrm>
-            <a:off x="960120" y="2697480"/>
-            <a:ext cx="7406640" cy="310896"/>
-          </a:xfrm>
-          <a:prstGeom prst="rect">
-            <a:avLst/>
-          </a:prstGeom>
-          <a:noFill/>
-          <a:ln/>
-        </p:spPr>
-        <p:txBody>
-          <a:bodyPr wrap="square" lIns="0" tIns="0" rIns="0" bIns="0" rtlCol="0" anchor="ctr"/>
-          <a:lstStyle/>
-          <a:p>
-            <a:pPr indent="0" marL="0">
-              <a:buNone/>
-            </a:pPr>
-            <a:r>
-              <a:rPr lang="en-US" sz="1450" dirty="0">
-                <a:solidFill>
-                  <a:srgbClr val="141413"/>
-                </a:solidFill>
-                <a:latin typeface="Inter" pitchFamily="34" charset="0"/>
-                <a:ea typeface="Inter" pitchFamily="34" charset="-122"/>
-                <a:cs typeface="Inter" pitchFamily="34" charset="-120"/>
-              </a:rPr>
-              <a:t>Implement a full feature from a written spec</a:t>
-            </a:r>
-            <a:endParaRPr lang="en-US" sz="1450" dirty="0"/>
-          </a:p>
-        </p:txBody>
-      </p:sp>
-      <p:sp>
-        <p:nvSpPr>
-          <p:cNvPr id="11" name="Shape 7"/>
-          <p:cNvSpPr/>
-          <p:nvPr/>
-        </p:nvSpPr>
-        <p:spPr>
-          <a:xfrm>
-            <a:off x="566928" y="3099816"/>
-            <a:ext cx="274320" cy="274320"/>
-          </a:xfrm>
-          <a:prstGeom prst="ellipse">
-            <a:avLst/>
+          <p:cNvPr id="3" name="Shape 0"/>
+          <p:cNvSpPr/>
+          <p:nvPr/>
+        </p:nvSpPr>
+        <p:spPr>
+          <a:xfrm>
+            <a:off x="548640" y="822960"/>
+            <a:ext cx="3200400" cy="548640"/>
+          </a:xfrm>
+          <a:prstGeom prst="roundRect">
+            <a:avLst>
+              <a:gd name="adj" fmla="val 50000"/>
+            </a:avLst>
           </a:prstGeom>
           <a:solidFill>
             <a:srgbClr val="C0392B"/>
           </a:solidFill>
           <a:ln/>
         </p:spPr>
+        <p:txBody>
+          <a:bodyPr/>
+          <a:lstStyle/>
+          <a:p>
+            <a:endParaRPr lang="en-US"/>
+          </a:p>
+        </p:txBody>
+      </p:sp>
+      <p:sp>
+        <p:nvSpPr>
+          <p:cNvPr id="4" name="Shape 1"/>
+          <p:cNvSpPr/>
+          <p:nvPr/>
+        </p:nvSpPr>
+        <p:spPr>
+          <a:xfrm>
+            <a:off x="804672" y="1014984"/>
+            <a:ext cx="164592" cy="164592"/>
+          </a:xfrm>
+          <a:prstGeom prst="ellipse">
+            <a:avLst/>
+          </a:prstGeom>
+          <a:solidFill>
+            <a:srgbClr val="FFFFFF"/>
+          </a:solidFill>
+          <a:ln/>
+        </p:spPr>
+        <p:txBody>
+          <a:bodyPr/>
+          <a:lstStyle/>
+          <a:p>
+            <a:endParaRPr lang="en-US"/>
+          </a:p>
+        </p:txBody>
+      </p:sp>
+      <p:sp>
+        <p:nvSpPr>
+          <p:cNvPr id="5" name="Text 2"/>
+          <p:cNvSpPr/>
+          <p:nvPr/>
+        </p:nvSpPr>
+        <p:spPr>
+          <a:xfrm>
+            <a:off x="1051560" y="822960"/>
+            <a:ext cx="2560320" cy="548640"/>
+          </a:xfrm>
+          <a:prstGeom prst="rect">
+            <a:avLst/>
+          </a:prstGeom>
+          <a:noFill/>
+          <a:ln/>
+        </p:spPr>
+        <p:txBody>
+          <a:bodyPr wrap="square" lIns="0" tIns="0" rIns="0" bIns="0" rtlCol="0" anchor="ctr"/>
+          <a:lstStyle/>
+          <a:p>
+            <a:pPr marL="0" indent="0">
+              <a:buNone/>
+            </a:pPr>
+            <a:r>
+              <a:rPr lang="en-US" sz="1700" b="1" kern="0" spc="100" dirty="0">
+                <a:solidFill>
+                  <a:srgbClr val="FFFFFF"/>
+                </a:solidFill>
+                <a:latin typeface="Inter" pitchFamily="34" charset="0"/>
+                <a:ea typeface="Inter" pitchFamily="34" charset="-122"/>
+                <a:cs typeface="Inter" pitchFamily="34" charset="-120"/>
+              </a:rPr>
+              <a:t>LIVE DEMO</a:t>
+            </a:r>
+            <a:endParaRPr lang="en-US" sz="1700" dirty="0"/>
+          </a:p>
+        </p:txBody>
+      </p:sp>
+      <p:sp>
+        <p:nvSpPr>
+          <p:cNvPr id="6" name="Text 3"/>
+          <p:cNvSpPr/>
+          <p:nvPr/>
+        </p:nvSpPr>
+        <p:spPr>
+          <a:xfrm>
+            <a:off x="548640" y="1600200"/>
+            <a:ext cx="8046720" cy="502920"/>
+          </a:xfrm>
+          <a:prstGeom prst="rect">
+            <a:avLst/>
+          </a:prstGeom>
+          <a:noFill/>
+          <a:ln/>
+        </p:spPr>
+        <p:txBody>
+          <a:bodyPr wrap="square" lIns="0" tIns="0" rIns="0" bIns="0" rtlCol="0" anchor="ctr"/>
+          <a:lstStyle/>
+          <a:p>
+            <a:pPr marL="0" indent="0">
+              <a:buNone/>
+            </a:pPr>
+            <a:r>
+              <a:rPr lang="en-US" sz="2900" b="1" dirty="0">
+                <a:solidFill>
+                  <a:srgbClr val="141413"/>
+                </a:solidFill>
+                <a:latin typeface="Georgia" pitchFamily="34" charset="0"/>
+                <a:ea typeface="Georgia" pitchFamily="34" charset="-122"/>
+                <a:cs typeface="Georgia" pitchFamily="34" charset="-120"/>
+              </a:rPr>
+              <a:t>Feature from spec + live debugging</a:t>
+            </a:r>
+            <a:endParaRPr lang="en-US" sz="2900" dirty="0"/>
+          </a:p>
+        </p:txBody>
+      </p:sp>
+      <p:sp>
+        <p:nvSpPr>
+          <p:cNvPr id="7" name="Text 4"/>
+          <p:cNvSpPr/>
+          <p:nvPr/>
+        </p:nvSpPr>
+        <p:spPr>
+          <a:xfrm>
+            <a:off x="548640" y="2121408"/>
+            <a:ext cx="8046720" cy="365760"/>
+          </a:xfrm>
+          <a:prstGeom prst="rect">
+            <a:avLst/>
+          </a:prstGeom>
+          <a:noFill/>
+          <a:ln/>
+        </p:spPr>
+        <p:txBody>
+          <a:bodyPr wrap="square" lIns="0" tIns="0" rIns="0" bIns="0" rtlCol="0" anchor="ctr"/>
+          <a:lstStyle/>
+          <a:p>
+            <a:pPr marL="0" indent="0">
+              <a:buNone/>
+            </a:pPr>
+            <a:r>
+              <a:rPr lang="en-US" sz="1600" b="1" dirty="0">
+                <a:solidFill>
+                  <a:srgbClr val="D97757"/>
+                </a:solidFill>
+                <a:latin typeface="Inter" pitchFamily="34" charset="0"/>
+                <a:ea typeface="Inter" pitchFamily="34" charset="-122"/>
+                <a:cs typeface="Inter" pitchFamily="34" charset="-120"/>
+              </a:rPr>
+              <a:t>Build it, break it, then diagnose from a stack trace</a:t>
+            </a:r>
+            <a:endParaRPr lang="en-US" sz="1600" dirty="0"/>
+          </a:p>
+        </p:txBody>
+      </p:sp>
+      <p:sp>
+        <p:nvSpPr>
+          <p:cNvPr id="8" name="Shape 5"/>
+          <p:cNvSpPr/>
+          <p:nvPr/>
+        </p:nvSpPr>
+        <p:spPr>
+          <a:xfrm>
+            <a:off x="566928" y="2715768"/>
+            <a:ext cx="274320" cy="274320"/>
+          </a:xfrm>
+          <a:prstGeom prst="ellipse">
+            <a:avLst/>
+          </a:prstGeom>
+          <a:solidFill>
+            <a:srgbClr val="C0392B"/>
+          </a:solidFill>
+          <a:ln/>
+        </p:spPr>
+        <p:txBody>
+          <a:bodyPr/>
+          <a:lstStyle/>
+          <a:p>
+            <a:endParaRPr lang="en-US"/>
+          </a:p>
+        </p:txBody>
       </p:sp>
       <p:pic>
         <p:nvPicPr>
-          <p:cNvPr id="12" name="Image 2" descr="preencoded.png">    </p:cNvPr>
+          <p:cNvPr id="9" name="Image 1" descr="preencoded.png"/>
           <p:cNvPicPr>
             <a:picLocks noChangeAspect="1"/>
           </p:cNvPicPr>
@@ -2104,7 +1683,7 @@
         </p:blipFill>
         <p:spPr>
           <a:xfrm>
-            <a:off x="638251" y="3171139"/>
+            <a:off x="638251" y="2787091"/>
             <a:ext cx="131674" cy="131674"/>
           </a:xfrm>
           <a:prstGeom prst="rect">
@@ -2114,13 +1693,13 @@
       </p:pic>
       <p:sp>
         <p:nvSpPr>
-          <p:cNvPr id="13" name="Text 8"/>
-          <p:cNvSpPr/>
-          <p:nvPr/>
-        </p:nvSpPr>
-        <p:spPr>
-          <a:xfrm>
-            <a:off x="960120" y="3081528"/>
+          <p:cNvPr id="10" name="Text 6"/>
+          <p:cNvSpPr/>
+          <p:nvPr/>
+        </p:nvSpPr>
+        <p:spPr>
+          <a:xfrm>
+            <a:off x="960120" y="2697480"/>
             <a:ext cx="7406640" cy="310896"/>
           </a:xfrm>
           <a:prstGeom prst="rect">
@@ -2133,7 +1712,7 @@
           <a:bodyPr wrap="square" lIns="0" tIns="0" rIns="0" bIns="0" rtlCol="0" anchor="ctr"/>
           <a:lstStyle/>
           <a:p>
-            <a:pPr indent="0" marL="0">
+            <a:pPr marL="0" indent="0">
               <a:buNone/>
             </a:pPr>
             <a:r>
@@ -2145,7 +1724,7 @@
                 <a:ea typeface="Inter" pitchFamily="34" charset="-122"/>
                 <a:cs typeface="Inter" pitchFamily="34" charset="-120"/>
               </a:rPr>
-              <a:t>Introduce a bug, then read the stack trace</a:t>
+              <a:t>Implement a full feature from a written spec</a:t>
             </a:r>
             <a:endParaRPr lang="en-US" sz="1450" dirty="0"/>
           </a:p>
@@ -2153,13 +1732,13 @@
       </p:sp>
       <p:sp>
         <p:nvSpPr>
-          <p:cNvPr id="14" name="Shape 9"/>
-          <p:cNvSpPr/>
-          <p:nvPr/>
-        </p:nvSpPr>
-        <p:spPr>
-          <a:xfrm>
-            <a:off x="566928" y="3483864"/>
+          <p:cNvPr id="11" name="Shape 7"/>
+          <p:cNvSpPr/>
+          <p:nvPr/>
+        </p:nvSpPr>
+        <p:spPr>
+          <a:xfrm>
+            <a:off x="566928" y="3099816"/>
             <a:ext cx="274320" cy="274320"/>
           </a:xfrm>
           <a:prstGeom prst="ellipse">
@@ -2170,23 +1749,120 @@
           </a:solidFill>
           <a:ln/>
         </p:spPr>
+        <p:txBody>
+          <a:bodyPr/>
+          <a:lstStyle/>
+          <a:p>
+            <a:endParaRPr lang="en-US"/>
+          </a:p>
+        </p:txBody>
       </p:sp>
       <p:pic>
         <p:nvPicPr>
-          <p:cNvPr id="15" name="Image 3" descr="preencoded.png">    </p:cNvPr>
+          <p:cNvPr id="12" name="Image 2" descr="preencoded.png"/>
           <p:cNvPicPr>
             <a:picLocks noChangeAspect="1"/>
           </p:cNvPicPr>
           <p:nvPr/>
         </p:nvPicPr>
         <p:blipFill>
-          <a:blip r:embed="rId4"/>
+          <a:blip r:embed="rId3"/>
           <a:stretch>
             <a:fillRect/>
           </a:stretch>
         </p:blipFill>
         <p:spPr>
           <a:xfrm>
+            <a:off x="638251" y="3171139"/>
+            <a:ext cx="131674" cy="131674"/>
+          </a:xfrm>
+          <a:prstGeom prst="rect">
+            <a:avLst/>
+          </a:prstGeom>
+        </p:spPr>
+      </p:pic>
+      <p:sp>
+        <p:nvSpPr>
+          <p:cNvPr id="13" name="Text 8"/>
+          <p:cNvSpPr/>
+          <p:nvPr/>
+        </p:nvSpPr>
+        <p:spPr>
+          <a:xfrm>
+            <a:off x="960120" y="3081528"/>
+            <a:ext cx="7406640" cy="310896"/>
+          </a:xfrm>
+          <a:prstGeom prst="rect">
+            <a:avLst/>
+          </a:prstGeom>
+          <a:noFill/>
+          <a:ln/>
+        </p:spPr>
+        <p:txBody>
+          <a:bodyPr wrap="square" lIns="0" tIns="0" rIns="0" bIns="0" rtlCol="0" anchor="ctr"/>
+          <a:lstStyle/>
+          <a:p>
+            <a:pPr marL="0" indent="0">
+              <a:buNone/>
+            </a:pPr>
+            <a:r>
+              <a:rPr lang="en-US" sz="1450" dirty="0">
+                <a:solidFill>
+                  <a:srgbClr val="141413"/>
+                </a:solidFill>
+                <a:latin typeface="Inter" pitchFamily="34" charset="0"/>
+                <a:ea typeface="Inter" pitchFamily="34" charset="-122"/>
+                <a:cs typeface="Inter" pitchFamily="34" charset="-120"/>
+              </a:rPr>
+              <a:t>Introduce a bug, then read the stack trace</a:t>
+            </a:r>
+            <a:endParaRPr lang="en-US" sz="1450" dirty="0"/>
+          </a:p>
+        </p:txBody>
+      </p:sp>
+      <p:sp>
+        <p:nvSpPr>
+          <p:cNvPr id="14" name="Shape 9"/>
+          <p:cNvSpPr/>
+          <p:nvPr/>
+        </p:nvSpPr>
+        <p:spPr>
+          <a:xfrm>
+            <a:off x="566928" y="3483864"/>
+            <a:ext cx="274320" cy="274320"/>
+          </a:xfrm>
+          <a:prstGeom prst="ellipse">
+            <a:avLst/>
+          </a:prstGeom>
+          <a:solidFill>
+            <a:srgbClr val="C0392B"/>
+          </a:solidFill>
+          <a:ln/>
+        </p:spPr>
+        <p:txBody>
+          <a:bodyPr/>
+          <a:lstStyle/>
+          <a:p>
+            <a:endParaRPr lang="en-US"/>
+          </a:p>
+        </p:txBody>
+      </p:sp>
+      <p:pic>
+        <p:nvPicPr>
+          <p:cNvPr id="15" name="Image 3" descr="preencoded.png"/>
+          <p:cNvPicPr>
+            <a:picLocks noChangeAspect="1"/>
+          </p:cNvPicPr>
+          <p:nvPr/>
+        </p:nvPicPr>
+        <p:blipFill>
+          <a:blip r:embed="rId3"/>
+          <a:stretch>
+            <a:fillRect/>
+          </a:stretch>
+        </p:blipFill>
+        <p:spPr>
+          <a:xfrm>
             <a:off x="638251" y="3555187"/>
             <a:ext cx="131674" cy="131674"/>
           </a:xfrm>
@@ -2216,7 +1892,7 @@
           <a:bodyPr wrap="square" lIns="0" tIns="0" rIns="0" bIns="0" rtlCol="0" anchor="ctr"/>
           <a:lstStyle/>
           <a:p>
-            <a:pPr indent="0" marL="0">
+            <a:pPr marL="0" indent="0">
               <a:buNone/>
             </a:pPr>
             <a:r>
@@ -2255,6 +1931,13 @@
           </a:solidFill>
           <a:ln/>
         </p:spPr>
+        <p:txBody>
+          <a:bodyPr/>
+          <a:lstStyle/>
+          <a:p>
+            <a:endParaRPr lang="en-US"/>
+          </a:p>
+        </p:txBody>
       </p:sp>
       <p:sp>
         <p:nvSpPr>
@@ -2277,7 +1960,7 @@
           <a:bodyPr wrap="square" lIns="0" tIns="0" rIns="0" bIns="0" rtlCol="0" anchor="ctr"/>
           <a:lstStyle/>
           <a:p>
-            <a:pPr indent="0" marL="0">
+            <a:pPr marL="0" indent="0">
               <a:buNone/>
             </a:pPr>
             <a:r>
@@ -2291,9 +1974,6 @@
               </a:rPr>
               <a:t>Let it fail for real  </a:t>
             </a:r>
-            <a:pPr indent="0" marL="0">
-              <a:buNone/>
-            </a:pPr>
             <a:r>
               <a:rPr lang="en-US" sz="1250" dirty="0">
                 <a:solidFill>
@@ -2330,7 +2010,7 @@
           <a:bodyPr wrap="square" rtlCol="0" anchor="ctr"/>
           <a:lstStyle/>
           <a:p>
-            <a:pPr indent="0" marL="0">
+            <a:pPr marL="0" indent="0">
               <a:buNone/>
             </a:pPr>
             <a:r>
@@ -2369,7 +2049,7 @@
           <a:bodyPr wrap="square" rtlCol="0" anchor="ctr"/>
           <a:lstStyle/>
           <a:p>
-            <a:pPr algn="r" indent="0" marL="0">
+            <a:pPr marL="0" indent="0" algn="r">
               <a:buNone/>
             </a:pPr>
             <a:r>
@@ -2384,45 +2064,6 @@
               <a:t>Section 4  ·  11/14</a:t>
             </a:r>
             <a:endParaRPr lang="en-US" sz="900" dirty="0"/>
-          </a:p>
-        </p:txBody>
-      </p:sp>
-      <p:sp>
-        <p:nvSpPr>
-          <p:cNvPr id="21" name="Text 15"/>
-          <p:cNvSpPr/>
-          <p:nvPr/>
-        </p:nvSpPr>
-        <p:spPr>
-          <a:xfrm>
-            <a:off x="548640" y="4462272"/>
-            <a:ext cx="8046720" cy="274320"/>
-          </a:xfrm>
-          <a:prstGeom prst="rect">
-            <a:avLst/>
-          </a:prstGeom>
-          <a:noFill/>
-          <a:ln/>
-        </p:spPr>
-        <p:txBody>
-          <a:bodyPr wrap="square" lIns="0" tIns="0" rIns="0" bIns="0" rtlCol="0" anchor="ctr"/>
-          <a:lstStyle/>
-          <a:p>
-            <a:pPr indent="0" marL="0">
-              <a:buNone/>
-            </a:pPr>
-            <a:r>
-              <a:rPr lang="en-US" sz="1000" i="1" dirty="0">
-                <a:solidFill>
-                  <a:srgbClr val="615C52"/>
-                </a:solidFill>
-                <a:latin typeface="Inter" pitchFamily="34" charset="0"/>
-                <a:ea typeface="Inter" pitchFamily="34" charset="-122"/>
-                <a:cs typeface="Inter" pitchFamily="34" charset="-120"/>
-              </a:rPr>
-              <a:t>▸ Resist fixing too fast — narrate the reasoning from trace to root cause.</a:t>
-            </a:r>
-            <a:endParaRPr lang="en-US" sz="1000" dirty="0"/>
           </a:p>
         </p:txBody>
       </p:sp>
@@ -2442,6 +2083,7 @@
         <a:solidFill>
           <a:srgbClr val="F0EEE6"/>
         </a:solidFill>
+        <a:effectLst/>
       </p:bgPr>
     </p:bg>
     <p:spTree>
@@ -2460,60 +2102,7 @@
       </p:grpSpPr>
       <p:pic>
         <p:nvPicPr>
-          <p:cNvPr id="2" name="Image 0" descr="preencoded.png">    </p:cNvPr>
-          <p:cNvPicPr>
-            <a:picLocks noChangeAspect="1"/>
-          </p:cNvPicPr>
-          <p:nvPr/>
-        </p:nvPicPr>
-        <p:blipFill>
-          <a:blip r:embed="rId1"/>
-          <a:stretch>
-            <a:fillRect/>
-          </a:stretch>
-        </p:blipFill>
-        <p:spPr>
-          <a:xfrm>
-            <a:off x="8321040" y="411480"/>
-            <a:ext cx="347472" cy="292608"/>
-          </a:xfrm>
-          <a:prstGeom prst="rect">
-            <a:avLst/>
-          </a:prstGeom>
-        </p:spPr>
-      </p:pic>
-      <p:sp>
-        <p:nvSpPr>
-          <p:cNvPr id="3" name="Shape 0"/>
-          <p:cNvSpPr/>
-          <p:nvPr/>
-        </p:nvSpPr>
-        <p:spPr>
-          <a:xfrm>
-            <a:off x="548640" y="822960"/>
-            <a:ext cx="3154680" cy="3383280"/>
-          </a:xfrm>
-          <a:prstGeom prst="roundRect">
-            <a:avLst>
-              <a:gd name="adj" fmla="val 3478"/>
-            </a:avLst>
-          </a:prstGeom>
-          <a:solidFill>
-            <a:srgbClr val="D97757"/>
-          </a:solidFill>
-          <a:ln/>
-          <a:effectLst>
-            <a:outerShdw sx="100000" sy="100000" kx="0" ky="0" algn="bl" rotWithShape="0" blurRad="88900" dist="38100" dir="5400000">
-              <a:srgbClr val="000000">
-                <a:alpha val="10000"/>
-              </a:srgbClr>
-            </a:outerShdw>
-          </a:effectLst>
-        </p:spPr>
-      </p:sp>
-      <p:pic>
-        <p:nvPicPr>
-          <p:cNvPr id="4" name="Image 1" descr="preencoded.png">    </p:cNvPr>
+          <p:cNvPr id="2" name="Image 0" descr="preencoded.png"/>
           <p:cNvPicPr>
             <a:picLocks noChangeAspect="1"/>
           </p:cNvPicPr>
@@ -2527,6 +2116,66 @@
         </p:blipFill>
         <p:spPr>
           <a:xfrm>
+            <a:off x="8321040" y="411480"/>
+            <a:ext cx="347472" cy="292608"/>
+          </a:xfrm>
+          <a:prstGeom prst="rect">
+            <a:avLst/>
+          </a:prstGeom>
+        </p:spPr>
+      </p:pic>
+      <p:sp>
+        <p:nvSpPr>
+          <p:cNvPr id="3" name="Shape 0"/>
+          <p:cNvSpPr/>
+          <p:nvPr/>
+        </p:nvSpPr>
+        <p:spPr>
+          <a:xfrm>
+            <a:off x="548640" y="822960"/>
+            <a:ext cx="3154680" cy="3383280"/>
+          </a:xfrm>
+          <a:prstGeom prst="roundRect">
+            <a:avLst>
+              <a:gd name="adj" fmla="val 3478"/>
+            </a:avLst>
+          </a:prstGeom>
+          <a:solidFill>
+            <a:srgbClr val="D97757"/>
+          </a:solidFill>
+          <a:ln/>
+          <a:effectLst>
+            <a:outerShdw blurRad="88900" dist="38100" dir="5400000" algn="bl" rotWithShape="0">
+              <a:srgbClr val="000000">
+                <a:alpha val="10000"/>
+              </a:srgbClr>
+            </a:outerShdw>
+          </a:effectLst>
+        </p:spPr>
+        <p:txBody>
+          <a:bodyPr/>
+          <a:lstStyle/>
+          <a:p>
+            <a:endParaRPr lang="en-US"/>
+          </a:p>
+        </p:txBody>
+      </p:sp>
+      <p:pic>
+        <p:nvPicPr>
+          <p:cNvPr id="4" name="Image 1" descr="preencoded.png"/>
+          <p:cNvPicPr>
+            <a:picLocks noChangeAspect="1"/>
+          </p:cNvPicPr>
+          <p:nvPr/>
+        </p:nvPicPr>
+        <p:blipFill>
+          <a:blip r:embed="rId3"/>
+          <a:stretch>
+            <a:fillRect/>
+          </a:stretch>
+        </p:blipFill>
+        <p:spPr>
+          <a:xfrm>
             <a:off x="868680" y="1133856"/>
             <a:ext cx="548640" cy="548640"/>
           </a:xfrm>
@@ -2556,7 +2205,7 @@
           <a:bodyPr wrap="square" lIns="0" tIns="0" rIns="0" bIns="0" rtlCol="0" anchor="ctr"/>
           <a:lstStyle/>
           <a:p>
-            <a:pPr indent="0" marL="0">
+            <a:pPr marL="0" indent="0">
               <a:buNone/>
             </a:pPr>
             <a:r>
@@ -2595,7 +2244,7 @@
           <a:bodyPr wrap="square" lIns="0" tIns="0" rIns="0" bIns="0" rtlCol="0" anchor="ctr"/>
           <a:lstStyle/>
           <a:p>
-            <a:pPr indent="0" marL="0">
+            <a:pPr marL="0" indent="0">
               <a:buNone/>
             </a:pPr>
             <a:r>
@@ -2635,6 +2284,13 @@
             <a:prstDash val="solid"/>
           </a:ln>
         </p:spPr>
+        <p:txBody>
+          <a:bodyPr/>
+          <a:lstStyle/>
+          <a:p>
+            <a:endParaRPr lang="en-US"/>
+          </a:p>
+        </p:txBody>
       </p:sp>
       <p:sp>
         <p:nvSpPr>
@@ -2657,11 +2313,11 @@
           <a:bodyPr wrap="square" lIns="0" tIns="0" rIns="0" bIns="0" rtlCol="0" anchor="ctr"/>
           <a:lstStyle/>
           <a:p>
-            <a:pPr indent="0" marL="0">
-              <a:buNone/>
-            </a:pPr>
-            <a:r>
-              <a:rPr lang="en-US" sz="1100" b="1" spc="100" kern="0" dirty="0">
+            <a:pPr marL="0" indent="0">
+              <a:buNone/>
+            </a:pPr>
+            <a:r>
+              <a:rPr lang="en-US" sz="1100" b="1" kern="0" spc="100" dirty="0">
                 <a:solidFill>
                   <a:srgbClr val="FBE9E2"/>
                 </a:solidFill>
@@ -2696,7 +2352,7 @@
           <a:bodyPr wrap="square" lIns="0" tIns="0" rIns="0" bIns="0" rtlCol="0" anchor="ctr"/>
           <a:lstStyle/>
           <a:p>
-            <a:pPr indent="0" marL="0">
+            <a:pPr marL="0" indent="0">
               <a:buNone/>
             </a:pPr>
             <a:r>
@@ -2735,11 +2391,11 @@
           <a:bodyPr wrap="square" lIns="0" tIns="0" rIns="0" bIns="0" rtlCol="0" anchor="ctr"/>
           <a:lstStyle/>
           <a:p>
-            <a:pPr indent="0" marL="0">
-              <a:buNone/>
-            </a:pPr>
-            <a:r>
-              <a:rPr lang="en-US" sz="1100" b="1" spc="200" kern="0" dirty="0">
+            <a:pPr marL="0" indent="0">
+              <a:buNone/>
+            </a:pPr>
+            <a:r>
+              <a:rPr lang="en-US" sz="1100" b="1" kern="0" spc="200" dirty="0">
                 <a:solidFill>
                   <a:srgbClr val="D97757"/>
                 </a:solidFill>
@@ -2772,6 +2428,13 @@
           </a:solidFill>
           <a:ln/>
         </p:spPr>
+        <p:txBody>
+          <a:bodyPr/>
+          <a:lstStyle/>
+          <a:p>
+            <a:endParaRPr lang="en-US"/>
+          </a:p>
+        </p:txBody>
       </p:sp>
       <p:sp>
         <p:nvSpPr>
@@ -2794,7 +2457,7 @@
           <a:bodyPr wrap="square" lIns="0" tIns="0" rIns="0" bIns="0" rtlCol="0" anchor="ctr"/>
           <a:lstStyle/>
           <a:p>
-            <a:pPr algn="ctr" indent="0" marL="0">
+            <a:pPr marL="0" indent="0" algn="ctr">
               <a:buNone/>
             </a:pPr>
             <a:r>
@@ -2833,7 +2496,7 @@
           <a:bodyPr wrap="square" lIns="0" tIns="0" rIns="0" bIns="0" rtlCol="0" anchor="ctr"/>
           <a:lstStyle/>
           <a:p>
-            <a:pPr indent="0" marL="0">
+            <a:pPr marL="0" indent="0">
               <a:buNone/>
             </a:pPr>
             <a:r>
@@ -2870,6 +2533,13 @@
           </a:solidFill>
           <a:ln/>
         </p:spPr>
+        <p:txBody>
+          <a:bodyPr/>
+          <a:lstStyle/>
+          <a:p>
+            <a:endParaRPr lang="en-US"/>
+          </a:p>
+        </p:txBody>
       </p:sp>
       <p:sp>
         <p:nvSpPr>
@@ -2892,7 +2562,7 @@
           <a:bodyPr wrap="square" lIns="0" tIns="0" rIns="0" bIns="0" rtlCol="0" anchor="ctr"/>
           <a:lstStyle/>
           <a:p>
-            <a:pPr algn="ctr" indent="0" marL="0">
+            <a:pPr marL="0" indent="0" algn="ctr">
               <a:buNone/>
             </a:pPr>
             <a:r>
@@ -2931,7 +2601,7 @@
           <a:bodyPr wrap="square" lIns="0" tIns="0" rIns="0" bIns="0" rtlCol="0" anchor="ctr"/>
           <a:lstStyle/>
           <a:p>
-            <a:pPr indent="0" marL="0">
+            <a:pPr marL="0" indent="0">
               <a:buNone/>
             </a:pPr>
             <a:r>
@@ -2968,6 +2638,13 @@
           </a:solidFill>
           <a:ln/>
         </p:spPr>
+        <p:txBody>
+          <a:bodyPr/>
+          <a:lstStyle/>
+          <a:p>
+            <a:endParaRPr lang="en-US"/>
+          </a:p>
+        </p:txBody>
       </p:sp>
       <p:sp>
         <p:nvSpPr>
@@ -2990,7 +2667,7 @@
           <a:bodyPr wrap="square" lIns="0" tIns="0" rIns="0" bIns="0" rtlCol="0" anchor="ctr"/>
           <a:lstStyle/>
           <a:p>
-            <a:pPr algn="ctr" indent="0" marL="0">
+            <a:pPr marL="0" indent="0" algn="ctr">
               <a:buNone/>
             </a:pPr>
             <a:r>
@@ -3029,7 +2706,7 @@
           <a:bodyPr wrap="square" lIns="0" tIns="0" rIns="0" bIns="0" rtlCol="0" anchor="ctr"/>
           <a:lstStyle/>
           <a:p>
-            <a:pPr indent="0" marL="0">
+            <a:pPr marL="0" indent="0">
               <a:buNone/>
             </a:pPr>
             <a:r>
@@ -3073,6 +2750,13 @@
             <a:prstDash val="solid"/>
           </a:ln>
         </p:spPr>
+        <p:txBody>
+          <a:bodyPr/>
+          <a:lstStyle/>
+          <a:p>
+            <a:endParaRPr lang="en-US"/>
+          </a:p>
+        </p:txBody>
       </p:sp>
       <p:sp>
         <p:nvSpPr>
@@ -3095,11 +2779,11 @@
           <a:bodyPr wrap="square" lIns="0" tIns="0" rIns="0" bIns="0" rtlCol="0" anchor="ctr"/>
           <a:lstStyle/>
           <a:p>
-            <a:pPr indent="0" marL="0">
-              <a:buNone/>
-            </a:pPr>
-            <a:r>
-              <a:rPr lang="en-US" sz="1050" b="1" spc="100" kern="0" dirty="0">
+            <a:pPr marL="0" indent="0">
+              <a:buNone/>
+            </a:pPr>
+            <a:r>
+              <a:rPr lang="en-US" sz="1050" b="1" kern="0" spc="100" dirty="0">
                 <a:solidFill>
                   <a:srgbClr val="615C52"/>
                 </a:solidFill>
@@ -3115,70 +2799,7 @@
       </p:sp>
       <p:pic>
         <p:nvPicPr>
-          <p:cNvPr id="22" name="Image 2" descr="preencoded.png">    </p:cNvPr>
-          <p:cNvPicPr>
-            <a:picLocks noChangeAspect="1"/>
-          </p:cNvPicPr>
-          <p:nvPr/>
-        </p:nvPicPr>
-        <p:blipFill>
-          <a:blip r:embed="rId3"/>
-          <a:stretch>
-            <a:fillRect/>
-          </a:stretch>
-        </p:blipFill>
-        <p:spPr>
-          <a:xfrm>
-            <a:off x="4297680" y="2962656"/>
-            <a:ext cx="182880" cy="182880"/>
-          </a:xfrm>
-          <a:prstGeom prst="rect">
-            <a:avLst/>
-          </a:prstGeom>
-        </p:spPr>
-      </p:pic>
-      <p:sp>
-        <p:nvSpPr>
-          <p:cNvPr id="23" name="Text 18"/>
-          <p:cNvSpPr/>
-          <p:nvPr/>
-        </p:nvSpPr>
-        <p:spPr>
-          <a:xfrm>
-            <a:off x="4572000" y="2916936"/>
-            <a:ext cx="3931920" cy="256032"/>
-          </a:xfrm>
-          <a:prstGeom prst="rect">
-            <a:avLst/>
-          </a:prstGeom>
-          <a:noFill/>
-          <a:ln/>
-        </p:spPr>
-        <p:txBody>
-          <a:bodyPr wrap="square" lIns="0" tIns="0" rIns="0" bIns="0" rtlCol="0" anchor="ctr"/>
-          <a:lstStyle/>
-          <a:p>
-            <a:pPr indent="0" marL="0">
-              <a:buNone/>
-            </a:pPr>
-            <a:r>
-              <a:rPr lang="en-US" sz="1250" dirty="0">
-                <a:solidFill>
-                  <a:srgbClr val="141413"/>
-                </a:solidFill>
-                <a:latin typeface="Inter" pitchFamily="34" charset="0"/>
-                <a:ea typeface="Inter" pitchFamily="34" charset="-122"/>
-                <a:cs typeface="Inter" pitchFamily="34" charset="-120"/>
-              </a:rPr>
-              <a:t>6-section spec committed</a:t>
-            </a:r>
-            <a:endParaRPr lang="en-US" sz="1250" dirty="0"/>
-          </a:p>
-        </p:txBody>
-      </p:sp>
-      <p:pic>
-        <p:nvPicPr>
-          <p:cNvPr id="24" name="Image 3" descr="preencoded.png">    </p:cNvPr>
+          <p:cNvPr id="22" name="Image 2" descr="preencoded.png"/>
           <p:cNvPicPr>
             <a:picLocks noChangeAspect="1"/>
           </p:cNvPicPr>
@@ -3192,7 +2813,7 @@
         </p:blipFill>
         <p:spPr>
           <a:xfrm>
-            <a:off x="4297680" y="3227832"/>
+            <a:off x="4297680" y="2962656"/>
             <a:ext cx="182880" cy="182880"/>
           </a:xfrm>
           <a:prstGeom prst="rect">
@@ -3202,13 +2823,13 @@
       </p:pic>
       <p:sp>
         <p:nvSpPr>
-          <p:cNvPr id="25" name="Text 19"/>
-          <p:cNvSpPr/>
-          <p:nvPr/>
-        </p:nvSpPr>
-        <p:spPr>
-          <a:xfrm>
-            <a:off x="4572000" y="3182112"/>
+          <p:cNvPr id="23" name="Text 18"/>
+          <p:cNvSpPr/>
+          <p:nvPr/>
+        </p:nvSpPr>
+        <p:spPr>
+          <a:xfrm>
+            <a:off x="4572000" y="2916936"/>
             <a:ext cx="3931920" cy="256032"/>
           </a:xfrm>
           <a:prstGeom prst="rect">
@@ -3221,7 +2842,7 @@
           <a:bodyPr wrap="square" lIns="0" tIns="0" rIns="0" bIns="0" rtlCol="0" anchor="ctr"/>
           <a:lstStyle/>
           <a:p>
-            <a:pPr indent="0" marL="0">
+            <a:pPr marL="0" indent="0">
               <a:buNone/>
             </a:pPr>
             <a:r>
@@ -3233,7 +2854,7 @@
                 <a:ea typeface="Inter" pitchFamily="34" charset="-122"/>
                 <a:cs typeface="Inter" pitchFamily="34" charset="-120"/>
               </a:rPr>
-              <a:t>Feature implemented from spec</a:t>
+              <a:t>6-section spec committed</a:t>
             </a:r>
             <a:endParaRPr lang="en-US" sz="1250" dirty="0"/>
           </a:p>
@@ -3241,21 +2862,21 @@
       </p:sp>
       <p:pic>
         <p:nvPicPr>
-          <p:cNvPr id="26" name="Image 4" descr="preencoded.png">    </p:cNvPr>
+          <p:cNvPr id="24" name="Image 3" descr="preencoded.png"/>
           <p:cNvPicPr>
             <a:picLocks noChangeAspect="1"/>
           </p:cNvPicPr>
           <p:nvPr/>
         </p:nvPicPr>
         <p:blipFill>
-          <a:blip r:embed="rId5"/>
+          <a:blip r:embed="rId4"/>
           <a:stretch>
             <a:fillRect/>
           </a:stretch>
         </p:blipFill>
         <p:spPr>
           <a:xfrm>
-            <a:off x="4297680" y="3493008"/>
+            <a:off x="4297680" y="3227832"/>
             <a:ext cx="182880" cy="182880"/>
           </a:xfrm>
           <a:prstGeom prst="rect">
@@ -3265,13 +2886,13 @@
       </p:pic>
       <p:sp>
         <p:nvSpPr>
-          <p:cNvPr id="27" name="Text 20"/>
-          <p:cNvSpPr/>
-          <p:nvPr/>
-        </p:nvSpPr>
-        <p:spPr>
-          <a:xfrm>
-            <a:off x="4572000" y="3447288"/>
+          <p:cNvPr id="25" name="Text 19"/>
+          <p:cNvSpPr/>
+          <p:nvPr/>
+        </p:nvSpPr>
+        <p:spPr>
+          <a:xfrm>
+            <a:off x="4572000" y="3182112"/>
             <a:ext cx="3931920" cy="256032"/>
           </a:xfrm>
           <a:prstGeom prst="rect">
@@ -3284,7 +2905,7 @@
           <a:bodyPr wrap="square" lIns="0" tIns="0" rIns="0" bIns="0" rtlCol="0" anchor="ctr"/>
           <a:lstStyle/>
           <a:p>
-            <a:pPr indent="0" marL="0">
+            <a:pPr marL="0" indent="0">
               <a:buNone/>
             </a:pPr>
             <a:r>
@@ -3296,7 +2917,7 @@
                 <a:ea typeface="Inter" pitchFamily="34" charset="-122"/>
                 <a:cs typeface="Inter" pitchFamily="34" charset="-120"/>
               </a:rPr>
-              <a:t>xUnit tests pass</a:t>
+              <a:t>Feature implemented from spec</a:t>
             </a:r>
             <a:endParaRPr lang="en-US" sz="1250" dirty="0"/>
           </a:p>
@@ -3304,20 +2925,83 @@
       </p:sp>
       <p:pic>
         <p:nvPicPr>
-          <p:cNvPr id="28" name="Image 5" descr="preencoded.png">    </p:cNvPr>
+          <p:cNvPr id="26" name="Image 4" descr="preencoded.png"/>
           <p:cNvPicPr>
             <a:picLocks noChangeAspect="1"/>
           </p:cNvPicPr>
           <p:nvPr/>
         </p:nvPicPr>
         <p:blipFill>
-          <a:blip r:embed="rId6"/>
+          <a:blip r:embed="rId4"/>
           <a:stretch>
             <a:fillRect/>
           </a:stretch>
         </p:blipFill>
         <p:spPr>
           <a:xfrm>
+            <a:off x="4297680" y="3493008"/>
+            <a:ext cx="182880" cy="182880"/>
+          </a:xfrm>
+          <a:prstGeom prst="rect">
+            <a:avLst/>
+          </a:prstGeom>
+        </p:spPr>
+      </p:pic>
+      <p:sp>
+        <p:nvSpPr>
+          <p:cNvPr id="27" name="Text 20"/>
+          <p:cNvSpPr/>
+          <p:nvPr/>
+        </p:nvSpPr>
+        <p:spPr>
+          <a:xfrm>
+            <a:off x="4572000" y="3447288"/>
+            <a:ext cx="3931920" cy="256032"/>
+          </a:xfrm>
+          <a:prstGeom prst="rect">
+            <a:avLst/>
+          </a:prstGeom>
+          <a:noFill/>
+          <a:ln/>
+        </p:spPr>
+        <p:txBody>
+          <a:bodyPr wrap="square" lIns="0" tIns="0" rIns="0" bIns="0" rtlCol="0" anchor="ctr"/>
+          <a:lstStyle/>
+          <a:p>
+            <a:pPr marL="0" indent="0">
+              <a:buNone/>
+            </a:pPr>
+            <a:r>
+              <a:rPr lang="en-US" sz="1250" dirty="0">
+                <a:solidFill>
+                  <a:srgbClr val="141413"/>
+                </a:solidFill>
+                <a:latin typeface="Inter" pitchFamily="34" charset="0"/>
+                <a:ea typeface="Inter" pitchFamily="34" charset="-122"/>
+                <a:cs typeface="Inter" pitchFamily="34" charset="-120"/>
+              </a:rPr>
+              <a:t>xUnit tests pass</a:t>
+            </a:r>
+            <a:endParaRPr lang="en-US" sz="1250" dirty="0"/>
+          </a:p>
+        </p:txBody>
+      </p:sp>
+      <p:pic>
+        <p:nvPicPr>
+          <p:cNvPr id="28" name="Image 5" descr="preencoded.png"/>
+          <p:cNvPicPr>
+            <a:picLocks noChangeAspect="1"/>
+          </p:cNvPicPr>
+          <p:nvPr/>
+        </p:nvPicPr>
+        <p:blipFill>
+          <a:blip r:embed="rId4"/>
+          <a:stretch>
+            <a:fillRect/>
+          </a:stretch>
+        </p:blipFill>
+        <p:spPr>
+          <a:xfrm>
             <a:off x="4297680" y="3758184"/>
             <a:ext cx="182880" cy="182880"/>
           </a:xfrm>
@@ -3347,7 +3031,7 @@
           <a:bodyPr wrap="square" lIns="0" tIns="0" rIns="0" bIns="0" rtlCol="0" anchor="ctr"/>
           <a:lstStyle/>
           <a:p>
-            <a:pPr indent="0" marL="0">
+            <a:pPr marL="0" indent="0">
               <a:buNone/>
             </a:pPr>
             <a:r>
@@ -3386,7 +3070,7 @@
           <a:bodyPr wrap="square" rtlCol="0" anchor="ctr"/>
           <a:lstStyle/>
           <a:p>
-            <a:pPr indent="0" marL="0">
+            <a:pPr marL="0" indent="0">
               <a:buNone/>
             </a:pPr>
             <a:r>
@@ -3425,7 +3109,7 @@
           <a:bodyPr wrap="square" rtlCol="0" anchor="ctr"/>
           <a:lstStyle/>
           <a:p>
-            <a:pPr algn="r" indent="0" marL="0">
+            <a:pPr marL="0" indent="0" algn="r">
               <a:buNone/>
             </a:pPr>
             <a:r>
@@ -3440,45 +3124,6 @@
               <a:t>Section 4  ·  12/14</a:t>
             </a:r>
             <a:endParaRPr lang="en-US" sz="900" dirty="0"/>
-          </a:p>
-        </p:txBody>
-      </p:sp>
-      <p:sp>
-        <p:nvSpPr>
-          <p:cNvPr id="32" name="Text 24"/>
-          <p:cNvSpPr/>
-          <p:nvPr/>
-        </p:nvSpPr>
-        <p:spPr>
-          <a:xfrm>
-            <a:off x="548640" y="4462272"/>
-            <a:ext cx="8046720" cy="274320"/>
-          </a:xfrm>
-          <a:prstGeom prst="rect">
-            <a:avLst/>
-          </a:prstGeom>
-          <a:noFill/>
-          <a:ln/>
-        </p:spPr>
-        <p:txBody>
-          <a:bodyPr wrap="square" lIns="0" tIns="0" rIns="0" bIns="0" rtlCol="0" anchor="ctr"/>
-          <a:lstStyle/>
-          <a:p>
-            <a:pPr indent="0" marL="0">
-              <a:buNone/>
-            </a:pPr>
-            <a:r>
-              <a:rPr lang="en-US" sz="1000" i="1" dirty="0">
-                <a:solidFill>
-                  <a:srgbClr val="615C52"/>
-                </a:solidFill>
-                <a:latin typeface="Inter" pitchFamily="34" charset="0"/>
-                <a:ea typeface="Inter" pitchFamily="34" charset="-122"/>
-                <a:cs typeface="Inter" pitchFamily="34" charset="-120"/>
-              </a:rPr>
-              <a:t>▸ The capstone exercises the whole day — spec to debugged, working feature.</a:t>
-            </a:r>
-            <a:endParaRPr lang="en-US" sz="1000" dirty="0"/>
           </a:p>
         </p:txBody>
       </p:sp>
@@ -3498,6 +3143,7 @@
         <a:solidFill>
           <a:srgbClr val="F0EEE6"/>
         </a:solidFill>
+        <a:effectLst/>
       </p:bgPr>
     </p:bg>
     <p:spTree>
@@ -3535,11 +3181,11 @@
           <a:bodyPr wrap="square" lIns="0" tIns="0" rIns="0" bIns="0" rtlCol="0" anchor="ctr"/>
           <a:lstStyle/>
           <a:p>
-            <a:pPr indent="0" marL="0">
-              <a:buNone/>
-            </a:pPr>
-            <a:r>
-              <a:rPr lang="en-US" sz="1100" b="1" spc="200" kern="0" dirty="0">
+            <a:pPr marL="0" indent="0">
+              <a:buNone/>
+            </a:pPr>
+            <a:r>
+              <a:rPr lang="en-US" sz="1100" b="1" kern="0" spc="200" dirty="0">
                 <a:solidFill>
                   <a:srgbClr val="D97757"/>
                 </a:solidFill>
@@ -3574,7 +3220,7 @@
           <a:bodyPr wrap="square" lIns="0" tIns="0" rIns="0" bIns="0" rtlCol="0" anchor="ctr"/>
           <a:lstStyle/>
           <a:p>
-            <a:pPr indent="0" marL="0">
+            <a:pPr marL="0" indent="0">
               <a:buNone/>
             </a:pPr>
             <a:r>
@@ -3594,14 +3240,14 @@
       </p:sp>
       <p:pic>
         <p:nvPicPr>
-          <p:cNvPr id="4" name="Image 0" descr="preencoded.png">    </p:cNvPr>
+          <p:cNvPr id="4" name="Image 0" descr="preencoded.png"/>
           <p:cNvPicPr>
             <a:picLocks noChangeAspect="1"/>
           </p:cNvPicPr>
           <p:nvPr/>
         </p:nvPicPr>
         <p:blipFill>
-          <a:blip r:embed="rId1"/>
+          <a:blip r:embed="rId2"/>
           <a:stretch>
             <a:fillRect/>
           </a:stretch>
@@ -3642,6 +3288,13 @@
             <a:prstDash val="solid"/>
           </a:ln>
         </p:spPr>
+        <p:txBody>
+          <a:bodyPr/>
+          <a:lstStyle/>
+          <a:p>
+            <a:endParaRPr lang="en-US"/>
+          </a:p>
+        </p:txBody>
       </p:sp>
       <p:sp>
         <p:nvSpPr>
@@ -3662,17 +3315,24 @@
           </a:solidFill>
           <a:ln/>
         </p:spPr>
+        <p:txBody>
+          <a:bodyPr/>
+          <a:lstStyle/>
+          <a:p>
+            <a:endParaRPr lang="en-US"/>
+          </a:p>
+        </p:txBody>
       </p:sp>
       <p:pic>
         <p:nvPicPr>
-          <p:cNvPr id="7" name="Image 1" descr="preencoded.png">    </p:cNvPr>
+          <p:cNvPr id="7" name="Image 1" descr="preencoded.png"/>
           <p:cNvPicPr>
             <a:picLocks noChangeAspect="1"/>
           </p:cNvPicPr>
           <p:nvPr/>
         </p:nvPicPr>
         <p:blipFill>
-          <a:blip r:embed="rId2"/>
+          <a:blip r:embed="rId3"/>
           <a:stretch>
             <a:fillRect/>
           </a:stretch>
@@ -3708,7 +3368,7 @@
           <a:bodyPr wrap="square" lIns="0" tIns="0" rIns="0" bIns="0" rtlCol="0" anchor="ctr"/>
           <a:lstStyle/>
           <a:p>
-            <a:pPr indent="0" marL="0">
+            <a:pPr marL="0" indent="0">
               <a:buNone/>
             </a:pPr>
             <a:r>
@@ -3747,7 +3407,7 @@
           <a:bodyPr wrap="square" lIns="0" tIns="0" rIns="0" bIns="0" rtlCol="0" anchor="ctr"/>
           <a:lstStyle/>
           <a:p>
-            <a:pPr indent="0" marL="0">
+            <a:pPr marL="0" indent="0">
               <a:buNone/>
             </a:pPr>
             <a:r>
@@ -3791,6 +3451,13 @@
             <a:prstDash val="solid"/>
           </a:ln>
         </p:spPr>
+        <p:txBody>
+          <a:bodyPr/>
+          <a:lstStyle/>
+          <a:p>
+            <a:endParaRPr lang="en-US"/>
+          </a:p>
+        </p:txBody>
       </p:sp>
       <p:sp>
         <p:nvSpPr>
@@ -3811,17 +3478,24 @@
           </a:solidFill>
           <a:ln/>
         </p:spPr>
+        <p:txBody>
+          <a:bodyPr/>
+          <a:lstStyle/>
+          <a:p>
+            <a:endParaRPr lang="en-US"/>
+          </a:p>
+        </p:txBody>
       </p:sp>
       <p:pic>
         <p:nvPicPr>
-          <p:cNvPr id="12" name="Image 2" descr="preencoded.png">    </p:cNvPr>
+          <p:cNvPr id="12" name="Image 2" descr="preencoded.png"/>
           <p:cNvPicPr>
             <a:picLocks noChangeAspect="1"/>
           </p:cNvPicPr>
           <p:nvPr/>
         </p:nvPicPr>
         <p:blipFill>
-          <a:blip r:embed="rId3"/>
+          <a:blip r:embed="rId4"/>
           <a:stretch>
             <a:fillRect/>
           </a:stretch>
@@ -3857,7 +3531,7 @@
           <a:bodyPr wrap="square" lIns="0" tIns="0" rIns="0" bIns="0" rtlCol="0" anchor="ctr"/>
           <a:lstStyle/>
           <a:p>
-            <a:pPr indent="0" marL="0">
+            <a:pPr marL="0" indent="0">
               <a:buNone/>
             </a:pPr>
             <a:r>
@@ -3896,7 +3570,7 @@
           <a:bodyPr wrap="square" lIns="0" tIns="0" rIns="0" bIns="0" rtlCol="0" anchor="ctr"/>
           <a:lstStyle/>
           <a:p>
-            <a:pPr indent="0" marL="0">
+            <a:pPr marL="0" indent="0">
               <a:buNone/>
             </a:pPr>
             <a:r>
@@ -3940,6 +3614,13 @@
             <a:prstDash val="solid"/>
           </a:ln>
         </p:spPr>
+        <p:txBody>
+          <a:bodyPr/>
+          <a:lstStyle/>
+          <a:p>
+            <a:endParaRPr lang="en-US"/>
+          </a:p>
+        </p:txBody>
       </p:sp>
       <p:sp>
         <p:nvSpPr>
@@ -3960,17 +3641,24 @@
           </a:solidFill>
           <a:ln/>
         </p:spPr>
+        <p:txBody>
+          <a:bodyPr/>
+          <a:lstStyle/>
+          <a:p>
+            <a:endParaRPr lang="en-US"/>
+          </a:p>
+        </p:txBody>
       </p:sp>
       <p:pic>
         <p:nvPicPr>
-          <p:cNvPr id="17" name="Image 3" descr="preencoded.png">    </p:cNvPr>
+          <p:cNvPr id="17" name="Image 3" descr="preencoded.png"/>
           <p:cNvPicPr>
             <a:picLocks noChangeAspect="1"/>
           </p:cNvPicPr>
           <p:nvPr/>
         </p:nvPicPr>
         <p:blipFill>
-          <a:blip r:embed="rId4"/>
+          <a:blip r:embed="rId5"/>
           <a:stretch>
             <a:fillRect/>
           </a:stretch>
@@ -4006,7 +3694,7 @@
           <a:bodyPr wrap="square" lIns="0" tIns="0" rIns="0" bIns="0" rtlCol="0" anchor="ctr"/>
           <a:lstStyle/>
           <a:p>
-            <a:pPr indent="0" marL="0">
+            <a:pPr marL="0" indent="0">
               <a:buNone/>
             </a:pPr>
             <a:r>
@@ -4045,7 +3733,7 @@
           <a:bodyPr wrap="square" lIns="0" tIns="0" rIns="0" bIns="0" rtlCol="0" anchor="ctr"/>
           <a:lstStyle/>
           <a:p>
-            <a:pPr indent="0" marL="0">
+            <a:pPr marL="0" indent="0">
               <a:buNone/>
             </a:pPr>
             <a:r>
@@ -4089,6 +3777,13 @@
             <a:prstDash val="solid"/>
           </a:ln>
         </p:spPr>
+        <p:txBody>
+          <a:bodyPr/>
+          <a:lstStyle/>
+          <a:p>
+            <a:endParaRPr lang="en-US"/>
+          </a:p>
+        </p:txBody>
       </p:sp>
       <p:sp>
         <p:nvSpPr>
@@ -4109,17 +3804,24 @@
           </a:solidFill>
           <a:ln/>
         </p:spPr>
+        <p:txBody>
+          <a:bodyPr/>
+          <a:lstStyle/>
+          <a:p>
+            <a:endParaRPr lang="en-US"/>
+          </a:p>
+        </p:txBody>
       </p:sp>
       <p:pic>
         <p:nvPicPr>
-          <p:cNvPr id="22" name="Image 4" descr="preencoded.png">    </p:cNvPr>
+          <p:cNvPr id="22" name="Image 4" descr="preencoded.png"/>
           <p:cNvPicPr>
             <a:picLocks noChangeAspect="1"/>
           </p:cNvPicPr>
           <p:nvPr/>
         </p:nvPicPr>
         <p:blipFill>
-          <a:blip r:embed="rId5"/>
+          <a:blip r:embed="rId6"/>
           <a:stretch>
             <a:fillRect/>
           </a:stretch>
@@ -4155,7 +3857,7 @@
           <a:bodyPr wrap="square" lIns="0" tIns="0" rIns="0" bIns="0" rtlCol="0" anchor="ctr"/>
           <a:lstStyle/>
           <a:p>
-            <a:pPr indent="0" marL="0">
+            <a:pPr marL="0" indent="0">
               <a:buNone/>
             </a:pPr>
             <a:r>
@@ -4194,7 +3896,7 @@
           <a:bodyPr wrap="square" lIns="0" tIns="0" rIns="0" bIns="0" rtlCol="0" anchor="ctr"/>
           <a:lstStyle/>
           <a:p>
-            <a:pPr indent="0" marL="0">
+            <a:pPr marL="0" indent="0">
               <a:buNone/>
             </a:pPr>
             <a:r>
@@ -4238,6 +3940,13 @@
             <a:prstDash val="solid"/>
           </a:ln>
         </p:spPr>
+        <p:txBody>
+          <a:bodyPr/>
+          <a:lstStyle/>
+          <a:p>
+            <a:endParaRPr lang="en-US"/>
+          </a:p>
+        </p:txBody>
       </p:sp>
       <p:sp>
         <p:nvSpPr>
@@ -4258,17 +3967,24 @@
           </a:solidFill>
           <a:ln/>
         </p:spPr>
+        <p:txBody>
+          <a:bodyPr/>
+          <a:lstStyle/>
+          <a:p>
+            <a:endParaRPr lang="en-US"/>
+          </a:p>
+        </p:txBody>
       </p:sp>
       <p:pic>
         <p:nvPicPr>
-          <p:cNvPr id="27" name="Image 5" descr="preencoded.png">    </p:cNvPr>
+          <p:cNvPr id="27" name="Image 5" descr="preencoded.png"/>
           <p:cNvPicPr>
             <a:picLocks noChangeAspect="1"/>
           </p:cNvPicPr>
           <p:nvPr/>
         </p:nvPicPr>
         <p:blipFill>
-          <a:blip r:embed="rId6"/>
+          <a:blip r:embed="rId7"/>
           <a:stretch>
             <a:fillRect/>
           </a:stretch>
@@ -4304,7 +4020,7 @@
           <a:bodyPr wrap="square" lIns="0" tIns="0" rIns="0" bIns="0" rtlCol="0" anchor="ctr"/>
           <a:lstStyle/>
           <a:p>
-            <a:pPr indent="0" marL="0">
+            <a:pPr marL="0" indent="0">
               <a:buNone/>
             </a:pPr>
             <a:r>
@@ -4343,7 +4059,7 @@
           <a:bodyPr wrap="square" lIns="0" tIns="0" rIns="0" bIns="0" rtlCol="0" anchor="ctr"/>
           <a:lstStyle/>
           <a:p>
-            <a:pPr indent="0" marL="0">
+            <a:pPr marL="0" indent="0">
               <a:buNone/>
             </a:pPr>
             <a:r>
@@ -4387,6 +4103,13 @@
             <a:prstDash val="solid"/>
           </a:ln>
         </p:spPr>
+        <p:txBody>
+          <a:bodyPr/>
+          <a:lstStyle/>
+          <a:p>
+            <a:endParaRPr lang="en-US"/>
+          </a:p>
+        </p:txBody>
       </p:sp>
       <p:sp>
         <p:nvSpPr>
@@ -4407,17 +4130,24 @@
           </a:solidFill>
           <a:ln/>
         </p:spPr>
+        <p:txBody>
+          <a:bodyPr/>
+          <a:lstStyle/>
+          <a:p>
+            <a:endParaRPr lang="en-US"/>
+          </a:p>
+        </p:txBody>
       </p:sp>
       <p:pic>
         <p:nvPicPr>
-          <p:cNvPr id="32" name="Image 6" descr="preencoded.png">    </p:cNvPr>
+          <p:cNvPr id="32" name="Image 6" descr="preencoded.png"/>
           <p:cNvPicPr>
             <a:picLocks noChangeAspect="1"/>
           </p:cNvPicPr>
           <p:nvPr/>
         </p:nvPicPr>
         <p:blipFill>
-          <a:blip r:embed="rId7"/>
+          <a:blip r:embed="rId8"/>
           <a:stretch>
             <a:fillRect/>
           </a:stretch>
@@ -4453,7 +4183,7 @@
           <a:bodyPr wrap="square" lIns="0" tIns="0" rIns="0" bIns="0" rtlCol="0" anchor="ctr"/>
           <a:lstStyle/>
           <a:p>
-            <a:pPr indent="0" marL="0">
+            <a:pPr marL="0" indent="0">
               <a:buNone/>
             </a:pPr>
             <a:r>
@@ -4492,7 +4222,7 @@
           <a:bodyPr wrap="square" lIns="0" tIns="0" rIns="0" bIns="0" rtlCol="0" anchor="ctr"/>
           <a:lstStyle/>
           <a:p>
-            <a:pPr indent="0" marL="0">
+            <a:pPr marL="0" indent="0">
               <a:buNone/>
             </a:pPr>
             <a:r>
@@ -4531,7 +4261,7 @@
           <a:bodyPr wrap="square" rtlCol="0" anchor="ctr"/>
           <a:lstStyle/>
           <a:p>
-            <a:pPr indent="0" marL="0">
+            <a:pPr marL="0" indent="0">
               <a:buNone/>
             </a:pPr>
             <a:r>
@@ -4570,7 +4300,7 @@
           <a:bodyPr wrap="square" rtlCol="0" anchor="ctr"/>
           <a:lstStyle/>
           <a:p>
-            <a:pPr algn="r" indent="0" marL="0">
+            <a:pPr marL="0" indent="0" algn="r">
               <a:buNone/>
             </a:pPr>
             <a:r>
@@ -4585,45 +4315,6 @@
               <a:t>Section 4  ·  13/14</a:t>
             </a:r>
             <a:endParaRPr lang="en-US" sz="900" dirty="0"/>
-          </a:p>
-        </p:txBody>
-      </p:sp>
-      <p:sp>
-        <p:nvSpPr>
-          <p:cNvPr id="37" name="Text 28"/>
-          <p:cNvSpPr/>
-          <p:nvPr/>
-        </p:nvSpPr>
-        <p:spPr>
-          <a:xfrm>
-            <a:off x="548640" y="4462272"/>
-            <a:ext cx="8046720" cy="274320"/>
-          </a:xfrm>
-          <a:prstGeom prst="rect">
-            <a:avLst/>
-          </a:prstGeom>
-          <a:noFill/>
-          <a:ln/>
-        </p:spPr>
-        <p:txBody>
-          <a:bodyPr wrap="square" lIns="0" tIns="0" rIns="0" bIns="0" rtlCol="0" anchor="ctr"/>
-          <a:lstStyle/>
-          <a:p>
-            <a:pPr indent="0" marL="0">
-              <a:buNone/>
-            </a:pPr>
-            <a:r>
-              <a:rPr lang="en-US" sz="1000" i="1" dirty="0">
-                <a:solidFill>
-                  <a:srgbClr val="615C52"/>
-                </a:solidFill>
-                <a:latin typeface="Inter" pitchFamily="34" charset="0"/>
-                <a:ea typeface="Inter" pitchFamily="34" charset="-122"/>
-                <a:cs typeface="Inter" pitchFamily="34" charset="-120"/>
-              </a:rPr>
-              <a:t>▸ Six small moves before lunch tomorrow — that's how the habit takes hold.</a:t>
-            </a:r>
-            <a:endParaRPr lang="en-US" sz="1000" dirty="0"/>
           </a:p>
         </p:txBody>
       </p:sp>
@@ -4643,6 +4334,7 @@
         <a:solidFill>
           <a:srgbClr val="1F1E1D"/>
         </a:solidFill>
+        <a:effectLst/>
       </p:bgPr>
     </p:bg>
     <p:spTree>
@@ -4661,14 +4353,14 @@
       </p:grpSpPr>
       <p:pic>
         <p:nvPicPr>
-          <p:cNvPr id="2" name="Image 0" descr="preencoded.png">    </p:cNvPr>
+          <p:cNvPr id="2" name="Image 0" descr="preencoded.png"/>
           <p:cNvPicPr>
             <a:picLocks noChangeAspect="1"/>
           </p:cNvPicPr>
           <p:nvPr/>
         </p:nvPicPr>
         <p:blipFill>
-          <a:blip r:embed="rId1"/>
+          <a:blip r:embed="rId2"/>
           <a:stretch>
             <a:fillRect/>
           </a:stretch>
@@ -4704,11 +4396,11 @@
           <a:bodyPr wrap="square" lIns="0" tIns="0" rIns="0" bIns="0" rtlCol="0" anchor="ctr"/>
           <a:lstStyle/>
           <a:p>
-            <a:pPr indent="0" marL="0">
-              <a:buNone/>
-            </a:pPr>
-            <a:r>
-              <a:rPr lang="en-US" sz="1300" b="1" spc="300" kern="0" dirty="0">
+            <a:pPr marL="0" indent="0">
+              <a:buNone/>
+            </a:pPr>
+            <a:r>
+              <a:rPr lang="en-US" sz="1300" b="1" kern="0" spc="300" dirty="0">
                 <a:solidFill>
                   <a:srgbClr val="D97757"/>
                 </a:solidFill>
@@ -4743,7 +4435,7 @@
           <a:bodyPr wrap="square" lIns="0" tIns="0" rIns="0" bIns="0" rtlCol="0" anchor="ctr"/>
           <a:lstStyle/>
           <a:p>
-            <a:pPr indent="0" marL="0">
+            <a:pPr marL="0" indent="0">
               <a:lnSpc>
                 <a:spcPct val="100000"/>
               </a:lnSpc>
@@ -4763,7 +4455,7 @@
             <a:endParaRPr lang="en-US" sz="4000" dirty="0"/>
           </a:p>
           <a:p>
-            <a:pPr indent="0" marL="0">
+            <a:pPr marL="0" indent="0">
               <a:lnSpc>
                 <a:spcPct val="100000"/>
               </a:lnSpc>
@@ -4805,7 +4497,7 @@
           <a:bodyPr wrap="square" lIns="0" tIns="0" rIns="0" bIns="0" rtlCol="0" anchor="ctr"/>
           <a:lstStyle/>
           <a:p>
-            <a:pPr indent="0" marL="0">
+            <a:pPr marL="0" indent="0">
               <a:buNone/>
             </a:pPr>
             <a:r>
@@ -4849,17 +4541,24 @@
             <a:prstDash val="solid"/>
           </a:ln>
         </p:spPr>
+        <p:txBody>
+          <a:bodyPr/>
+          <a:lstStyle/>
+          <a:p>
+            <a:endParaRPr lang="en-US"/>
+          </a:p>
+        </p:txBody>
       </p:sp>
       <p:pic>
         <p:nvPicPr>
-          <p:cNvPr id="7" name="Image 1" descr="preencoded.png">    </p:cNvPr>
+          <p:cNvPr id="7" name="Image 1" descr="preencoded.png"/>
           <p:cNvPicPr>
             <a:picLocks noChangeAspect="1"/>
           </p:cNvPicPr>
           <p:nvPr/>
         </p:nvPicPr>
         <p:blipFill>
-          <a:blip r:embed="rId2"/>
+          <a:blip r:embed="rId3"/>
           <a:stretch>
             <a:fillRect/>
           </a:stretch>
@@ -4895,7 +4594,7 @@
           <a:bodyPr wrap="square" lIns="0" tIns="0" rIns="0" bIns="0" rtlCol="0" anchor="ctr"/>
           <a:lstStyle/>
           <a:p>
-            <a:pPr indent="0" marL="0">
+            <a:pPr marL="0" indent="0">
               <a:buNone/>
             </a:pPr>
             <a:r>
@@ -4934,7 +4633,7 @@
           <a:bodyPr wrap="square" rtlCol="0" anchor="ctr"/>
           <a:lstStyle/>
           <a:p>
-            <a:pPr indent="0" marL="0">
+            <a:pPr marL="0" indent="0">
               <a:buNone/>
             </a:pPr>
             <a:r>
@@ -4973,7 +4672,7 @@
           <a:bodyPr wrap="square" rtlCol="0" anchor="ctr"/>
           <a:lstStyle/>
           <a:p>
-            <a:pPr algn="r" indent="0" marL="0">
+            <a:pPr marL="0" indent="0" algn="r">
               <a:buNone/>
             </a:pPr>
             <a:r>
@@ -5007,6 +4706,7 @@
         <a:solidFill>
           <a:srgbClr val="F0EEE6"/>
         </a:solidFill>
+        <a:effectLst/>
       </p:bgPr>
     </p:bg>
     <p:spTree>
@@ -5044,11 +4744,11 @@
           <a:bodyPr wrap="square" lIns="0" tIns="0" rIns="0" bIns="0" rtlCol="0" anchor="ctr"/>
           <a:lstStyle/>
           <a:p>
-            <a:pPr indent="0" marL="0">
-              <a:buNone/>
-            </a:pPr>
-            <a:r>
-              <a:rPr lang="en-US" sz="1100" b="1" spc="200" kern="0" dirty="0">
+            <a:pPr marL="0" indent="0">
+              <a:buNone/>
+            </a:pPr>
+            <a:r>
+              <a:rPr lang="en-US" sz="1100" b="1" kern="0" spc="200" dirty="0">
                 <a:solidFill>
                   <a:srgbClr val="D97757"/>
                 </a:solidFill>
@@ -5083,7 +4783,7 @@
           <a:bodyPr wrap="square" lIns="0" tIns="0" rIns="0" bIns="0" rtlCol="0" anchor="ctr"/>
           <a:lstStyle/>
           <a:p>
-            <a:pPr indent="0" marL="0">
+            <a:pPr marL="0" indent="0">
               <a:buNone/>
             </a:pPr>
             <a:r>
@@ -5103,14 +4803,14 @@
       </p:sp>
       <p:pic>
         <p:nvPicPr>
-          <p:cNvPr id="4" name="Image 0" descr="preencoded.png">    </p:cNvPr>
+          <p:cNvPr id="4" name="Image 0" descr="preencoded.png"/>
           <p:cNvPicPr>
             <a:picLocks noChangeAspect="1"/>
           </p:cNvPicPr>
           <p:nvPr/>
         </p:nvPicPr>
         <p:blipFill>
-          <a:blip r:embed="rId1"/>
+          <a:blip r:embed="rId2"/>
           <a:stretch>
             <a:fillRect/>
           </a:stretch>
@@ -5151,13 +4851,20 @@
             <a:prstDash val="solid"/>
           </a:ln>
           <a:effectLst>
-            <a:outerShdw sx="100000" sy="100000" kx="0" ky="0" algn="bl" rotWithShape="0" blurRad="88900" dist="38100" dir="5400000">
+            <a:outerShdw blurRad="88900" dist="38100" dir="5400000" algn="bl" rotWithShape="0">
               <a:srgbClr val="000000">
                 <a:alpha val="10000"/>
               </a:srgbClr>
             </a:outerShdw>
           </a:effectLst>
         </p:spPr>
+        <p:txBody>
+          <a:bodyPr/>
+          <a:lstStyle/>
+          <a:p>
+            <a:endParaRPr lang="en-US"/>
+          </a:p>
+        </p:txBody>
       </p:sp>
       <p:sp>
         <p:nvSpPr>
@@ -5178,17 +4885,24 @@
           </a:solidFill>
           <a:ln/>
         </p:spPr>
+        <p:txBody>
+          <a:bodyPr/>
+          <a:lstStyle/>
+          <a:p>
+            <a:endParaRPr lang="en-US"/>
+          </a:p>
+        </p:txBody>
       </p:sp>
       <p:pic>
         <p:nvPicPr>
-          <p:cNvPr id="7" name="Image 1" descr="preencoded.png">    </p:cNvPr>
+          <p:cNvPr id="7" name="Image 1" descr="preencoded.png"/>
           <p:cNvPicPr>
             <a:picLocks noChangeAspect="1"/>
           </p:cNvPicPr>
           <p:nvPr/>
         </p:nvPicPr>
         <p:blipFill>
-          <a:blip r:embed="rId2"/>
+          <a:blip r:embed="rId3"/>
           <a:stretch>
             <a:fillRect/>
           </a:stretch>
@@ -5224,7 +4938,7 @@
           <a:bodyPr wrap="square" lIns="0" tIns="0" rIns="0" bIns="0" rtlCol="0" anchor="t"/>
           <a:lstStyle/>
           <a:p>
-            <a:pPr algn="ctr" indent="0" marL="0">
+            <a:pPr marL="0" indent="0" algn="ctr">
               <a:buNone/>
             </a:pPr>
             <a:r>
@@ -5263,7 +4977,7 @@
           <a:bodyPr wrap="square" lIns="0" tIns="0" rIns="0" bIns="0" rtlCol="0" anchor="ctr"/>
           <a:lstStyle/>
           <a:p>
-            <a:pPr algn="ctr" indent="0" marL="0">
+            <a:pPr marL="0" indent="0" algn="ctr">
               <a:buNone/>
             </a:pPr>
             <a:r>
@@ -5307,13 +5021,20 @@
             <a:prstDash val="solid"/>
           </a:ln>
           <a:effectLst>
-            <a:outerShdw sx="100000" sy="100000" kx="0" ky="0" algn="bl" rotWithShape="0" blurRad="88900" dist="38100" dir="5400000">
+            <a:outerShdw blurRad="88900" dist="38100" dir="5400000" algn="bl" rotWithShape="0">
               <a:srgbClr val="000000">
                 <a:alpha val="10000"/>
               </a:srgbClr>
             </a:outerShdw>
           </a:effectLst>
         </p:spPr>
+        <p:txBody>
+          <a:bodyPr/>
+          <a:lstStyle/>
+          <a:p>
+            <a:endParaRPr lang="en-US"/>
+          </a:p>
+        </p:txBody>
       </p:sp>
       <p:sp>
         <p:nvSpPr>
@@ -5334,17 +5055,24 @@
           </a:solidFill>
           <a:ln/>
         </p:spPr>
+        <p:txBody>
+          <a:bodyPr/>
+          <a:lstStyle/>
+          <a:p>
+            <a:endParaRPr lang="en-US"/>
+          </a:p>
+        </p:txBody>
       </p:sp>
       <p:pic>
         <p:nvPicPr>
-          <p:cNvPr id="12" name="Image 2" descr="preencoded.png">    </p:cNvPr>
+          <p:cNvPr id="12" name="Image 2" descr="preencoded.png"/>
           <p:cNvPicPr>
             <a:picLocks noChangeAspect="1"/>
           </p:cNvPicPr>
           <p:nvPr/>
         </p:nvPicPr>
         <p:blipFill>
-          <a:blip r:embed="rId3"/>
+          <a:blip r:embed="rId4"/>
           <a:stretch>
             <a:fillRect/>
           </a:stretch>
@@ -5380,7 +5108,7 @@
           <a:bodyPr wrap="square" lIns="0" tIns="0" rIns="0" bIns="0" rtlCol="0" anchor="t"/>
           <a:lstStyle/>
           <a:p>
-            <a:pPr algn="ctr" indent="0" marL="0">
+            <a:pPr marL="0" indent="0" algn="ctr">
               <a:buNone/>
             </a:pPr>
             <a:r>
@@ -5419,7 +5147,7 @@
           <a:bodyPr wrap="square" lIns="0" tIns="0" rIns="0" bIns="0" rtlCol="0" anchor="ctr"/>
           <a:lstStyle/>
           <a:p>
-            <a:pPr algn="ctr" indent="0" marL="0">
+            <a:pPr marL="0" indent="0" algn="ctr">
               <a:buNone/>
             </a:pPr>
             <a:r>
@@ -5463,13 +5191,20 @@
             <a:prstDash val="solid"/>
           </a:ln>
           <a:effectLst>
-            <a:outerShdw sx="100000" sy="100000" kx="0" ky="0" algn="bl" rotWithShape="0" blurRad="88900" dist="38100" dir="5400000">
+            <a:outerShdw blurRad="88900" dist="38100" dir="5400000" algn="bl" rotWithShape="0">
               <a:srgbClr val="000000">
                 <a:alpha val="10000"/>
               </a:srgbClr>
             </a:outerShdw>
           </a:effectLst>
         </p:spPr>
+        <p:txBody>
+          <a:bodyPr/>
+          <a:lstStyle/>
+          <a:p>
+            <a:endParaRPr lang="en-US"/>
+          </a:p>
+        </p:txBody>
       </p:sp>
       <p:sp>
         <p:nvSpPr>
@@ -5490,17 +5225,24 @@
           </a:solidFill>
           <a:ln/>
         </p:spPr>
+        <p:txBody>
+          <a:bodyPr/>
+          <a:lstStyle/>
+          <a:p>
+            <a:endParaRPr lang="en-US"/>
+          </a:p>
+        </p:txBody>
       </p:sp>
       <p:pic>
         <p:nvPicPr>
-          <p:cNvPr id="17" name="Image 3" descr="preencoded.png">    </p:cNvPr>
+          <p:cNvPr id="17" name="Image 3" descr="preencoded.png"/>
           <p:cNvPicPr>
             <a:picLocks noChangeAspect="1"/>
           </p:cNvPicPr>
           <p:nvPr/>
         </p:nvPicPr>
         <p:blipFill>
-          <a:blip r:embed="rId4"/>
+          <a:blip r:embed="rId5"/>
           <a:stretch>
             <a:fillRect/>
           </a:stretch>
@@ -5536,7 +5278,7 @@
           <a:bodyPr wrap="square" lIns="0" tIns="0" rIns="0" bIns="0" rtlCol="0" anchor="t"/>
           <a:lstStyle/>
           <a:p>
-            <a:pPr algn="ctr" indent="0" marL="0">
+            <a:pPr marL="0" indent="0" algn="ctr">
               <a:buNone/>
             </a:pPr>
             <a:r>
@@ -5575,7 +5317,7 @@
           <a:bodyPr wrap="square" lIns="0" tIns="0" rIns="0" bIns="0" rtlCol="0" anchor="ctr"/>
           <a:lstStyle/>
           <a:p>
-            <a:pPr algn="ctr" indent="0" marL="0">
+            <a:pPr marL="0" indent="0" algn="ctr">
               <a:buNone/>
             </a:pPr>
             <a:r>
@@ -5619,13 +5361,20 @@
             <a:prstDash val="solid"/>
           </a:ln>
           <a:effectLst>
-            <a:outerShdw sx="100000" sy="100000" kx="0" ky="0" algn="bl" rotWithShape="0" blurRad="88900" dist="38100" dir="5400000">
+            <a:outerShdw blurRad="88900" dist="38100" dir="5400000" algn="bl" rotWithShape="0">
               <a:srgbClr val="000000">
                 <a:alpha val="10000"/>
               </a:srgbClr>
             </a:outerShdw>
           </a:effectLst>
         </p:spPr>
+        <p:txBody>
+          <a:bodyPr/>
+          <a:lstStyle/>
+          <a:p>
+            <a:endParaRPr lang="en-US"/>
+          </a:p>
+        </p:txBody>
       </p:sp>
       <p:sp>
         <p:nvSpPr>
@@ -5646,17 +5395,24 @@
           </a:solidFill>
           <a:ln/>
         </p:spPr>
+        <p:txBody>
+          <a:bodyPr/>
+          <a:lstStyle/>
+          <a:p>
+            <a:endParaRPr lang="en-US"/>
+          </a:p>
+        </p:txBody>
       </p:sp>
       <p:pic>
         <p:nvPicPr>
-          <p:cNvPr id="22" name="Image 4" descr="preencoded.png">    </p:cNvPr>
+          <p:cNvPr id="22" name="Image 4" descr="preencoded.png"/>
           <p:cNvPicPr>
             <a:picLocks noChangeAspect="1"/>
           </p:cNvPicPr>
           <p:nvPr/>
         </p:nvPicPr>
         <p:blipFill>
-          <a:blip r:embed="rId5"/>
+          <a:blip r:embed="rId6"/>
           <a:stretch>
             <a:fillRect/>
           </a:stretch>
@@ -5692,7 +5448,7 @@
           <a:bodyPr wrap="square" lIns="0" tIns="0" rIns="0" bIns="0" rtlCol="0" anchor="t"/>
           <a:lstStyle/>
           <a:p>
-            <a:pPr algn="ctr" indent="0" marL="0">
+            <a:pPr marL="0" indent="0" algn="ctr">
               <a:buNone/>
             </a:pPr>
             <a:r>
@@ -5731,7 +5487,7 @@
           <a:bodyPr wrap="square" lIns="0" tIns="0" rIns="0" bIns="0" rtlCol="0" anchor="ctr"/>
           <a:lstStyle/>
           <a:p>
-            <a:pPr algn="ctr" indent="0" marL="0">
+            <a:pPr marL="0" indent="0" algn="ctr">
               <a:buNone/>
             </a:pPr>
             <a:r>
@@ -5775,13 +5531,20 @@
             <a:prstDash val="solid"/>
           </a:ln>
           <a:effectLst>
-            <a:outerShdw sx="100000" sy="100000" kx="0" ky="0" algn="bl" rotWithShape="0" blurRad="88900" dist="38100" dir="5400000">
+            <a:outerShdw blurRad="88900" dist="38100" dir="5400000" algn="bl" rotWithShape="0">
               <a:srgbClr val="000000">
                 <a:alpha val="10000"/>
               </a:srgbClr>
             </a:outerShdw>
           </a:effectLst>
         </p:spPr>
+        <p:txBody>
+          <a:bodyPr/>
+          <a:lstStyle/>
+          <a:p>
+            <a:endParaRPr lang="en-US"/>
+          </a:p>
+        </p:txBody>
       </p:sp>
       <p:sp>
         <p:nvSpPr>
@@ -5802,17 +5565,24 @@
           </a:solidFill>
           <a:ln/>
         </p:spPr>
+        <p:txBody>
+          <a:bodyPr/>
+          <a:lstStyle/>
+          <a:p>
+            <a:endParaRPr lang="en-US"/>
+          </a:p>
+        </p:txBody>
       </p:sp>
       <p:pic>
         <p:nvPicPr>
-          <p:cNvPr id="27" name="Image 5" descr="preencoded.png">    </p:cNvPr>
+          <p:cNvPr id="27" name="Image 5" descr="preencoded.png"/>
           <p:cNvPicPr>
             <a:picLocks noChangeAspect="1"/>
           </p:cNvPicPr>
           <p:nvPr/>
         </p:nvPicPr>
         <p:blipFill>
-          <a:blip r:embed="rId6"/>
+          <a:blip r:embed="rId7"/>
           <a:stretch>
             <a:fillRect/>
           </a:stretch>
@@ -5848,7 +5618,7 @@
           <a:bodyPr wrap="square" lIns="0" tIns="0" rIns="0" bIns="0" rtlCol="0" anchor="t"/>
           <a:lstStyle/>
           <a:p>
-            <a:pPr algn="ctr" indent="0" marL="0">
+            <a:pPr marL="0" indent="0" algn="ctr">
               <a:buNone/>
             </a:pPr>
             <a:r>
@@ -5887,7 +5657,7 @@
           <a:bodyPr wrap="square" lIns="0" tIns="0" rIns="0" bIns="0" rtlCol="0" anchor="ctr"/>
           <a:lstStyle/>
           <a:p>
-            <a:pPr algn="ctr" indent="0" marL="0">
+            <a:pPr marL="0" indent="0" algn="ctr">
               <a:buNone/>
             </a:pPr>
             <a:r>
@@ -5926,7 +5696,7 @@
           <a:bodyPr wrap="square" rtlCol="0" anchor="ctr"/>
           <a:lstStyle/>
           <a:p>
-            <a:pPr indent="0" marL="0">
+            <a:pPr marL="0" indent="0">
               <a:buNone/>
             </a:pPr>
             <a:r>
@@ -5965,7 +5735,7 @@
           <a:bodyPr wrap="square" rtlCol="0" anchor="ctr"/>
           <a:lstStyle/>
           <a:p>
-            <a:pPr algn="r" indent="0" marL="0">
+            <a:pPr marL="0" indent="0" algn="r">
               <a:buNone/>
             </a:pPr>
             <a:r>
@@ -5980,45 +5750,6 @@
               <a:t>Section 4  ·  2/14</a:t>
             </a:r>
             <a:endParaRPr lang="en-US" sz="900" dirty="0"/>
-          </a:p>
-        </p:txBody>
-      </p:sp>
-      <p:sp>
-        <p:nvSpPr>
-          <p:cNvPr id="32" name="Text 24"/>
-          <p:cNvSpPr/>
-          <p:nvPr/>
-        </p:nvSpPr>
-        <p:spPr>
-          <a:xfrm>
-            <a:off x="548640" y="4462272"/>
-            <a:ext cx="8046720" cy="274320"/>
-          </a:xfrm>
-          <a:prstGeom prst="rect">
-            <a:avLst/>
-          </a:prstGeom>
-          <a:noFill/>
-          <a:ln/>
-        </p:spPr>
-        <p:txBody>
-          <a:bodyPr wrap="square" lIns="0" tIns="0" rIns="0" bIns="0" rtlCol="0" anchor="ctr"/>
-          <a:lstStyle/>
-          <a:p>
-            <a:pPr indent="0" marL="0">
-              <a:buNone/>
-            </a:pPr>
-            <a:r>
-              <a:rPr lang="en-US" sz="1000" i="1" dirty="0">
-                <a:solidFill>
-                  <a:srgbClr val="615C52"/>
-                </a:solidFill>
-                <a:latin typeface="Inter" pitchFamily="34" charset="0"/>
-                <a:ea typeface="Inter" pitchFamily="34" charset="-122"/>
-                <a:cs typeface="Inter" pitchFamily="34" charset="-120"/>
-              </a:rPr>
-              <a:t>▸ These five frame the section — each gets its own demo or lab moment.</a:t>
-            </a:r>
-            <a:endParaRPr lang="en-US" sz="1000" dirty="0"/>
           </a:p>
         </p:txBody>
       </p:sp>
@@ -6038,6 +5769,7 @@
         <a:solidFill>
           <a:srgbClr val="F0EEE6"/>
         </a:solidFill>
+        <a:effectLst/>
       </p:bgPr>
     </p:bg>
     <p:spTree>
@@ -6075,11 +5807,11 @@
           <a:bodyPr wrap="square" lIns="0" tIns="0" rIns="0" bIns="0" rtlCol="0" anchor="ctr"/>
           <a:lstStyle/>
           <a:p>
-            <a:pPr indent="0" marL="0">
-              <a:buNone/>
-            </a:pPr>
-            <a:r>
-              <a:rPr lang="en-US" sz="1100" b="1" spc="200" kern="0" dirty="0">
+            <a:pPr marL="0" indent="0">
+              <a:buNone/>
+            </a:pPr>
+            <a:r>
+              <a:rPr lang="en-US" sz="1100" b="1" kern="0" spc="200" dirty="0">
                 <a:solidFill>
                   <a:srgbClr val="D97757"/>
                 </a:solidFill>
@@ -6114,7 +5846,7 @@
           <a:bodyPr wrap="square" lIns="0" tIns="0" rIns="0" bIns="0" rtlCol="0" anchor="ctr"/>
           <a:lstStyle/>
           <a:p>
-            <a:pPr indent="0" marL="0">
+            <a:pPr marL="0" indent="0">
               <a:buNone/>
             </a:pPr>
             <a:r>
@@ -6134,14 +5866,14 @@
       </p:sp>
       <p:pic>
         <p:nvPicPr>
-          <p:cNvPr id="4" name="Image 0" descr="preencoded.png">    </p:cNvPr>
+          <p:cNvPr id="4" name="Image 0" descr="preencoded.png"/>
           <p:cNvPicPr>
             <a:picLocks noChangeAspect="1"/>
           </p:cNvPicPr>
           <p:nvPr/>
         </p:nvPicPr>
         <p:blipFill>
-          <a:blip r:embed="rId1"/>
+          <a:blip r:embed="rId2"/>
           <a:stretch>
             <a:fillRect/>
           </a:stretch>
@@ -6177,6 +5909,13 @@
           </a:solidFill>
           <a:ln/>
         </p:spPr>
+        <p:txBody>
+          <a:bodyPr/>
+          <a:lstStyle/>
+          <a:p>
+            <a:endParaRPr lang="en-US"/>
+          </a:p>
+        </p:txBody>
       </p:sp>
       <p:sp>
         <p:nvSpPr>
@@ -6199,7 +5938,7 @@
           <a:bodyPr wrap="square" lIns="0" tIns="0" rIns="0" bIns="0" rtlCol="0" anchor="ctr"/>
           <a:lstStyle/>
           <a:p>
-            <a:pPr indent="0" marL="0">
+            <a:pPr marL="0" indent="0">
               <a:buNone/>
             </a:pPr>
             <a:r>
@@ -6238,7 +5977,7 @@
           <a:bodyPr wrap="square" lIns="0" tIns="0" rIns="0" bIns="0" rtlCol="0" anchor="ctr"/>
           <a:lstStyle/>
           <a:p>
-            <a:pPr indent="0" marL="0">
+            <a:pPr marL="0" indent="0">
               <a:buNone/>
             </a:pPr>
             <a:r>
@@ -6277,6 +6016,13 @@
           </a:solidFill>
           <a:ln/>
         </p:spPr>
+        <p:txBody>
+          <a:bodyPr/>
+          <a:lstStyle/>
+          <a:p>
+            <a:endParaRPr lang="en-US"/>
+          </a:p>
+        </p:txBody>
       </p:sp>
       <p:sp>
         <p:nvSpPr>
@@ -6299,7 +6045,7 @@
           <a:bodyPr wrap="square" lIns="0" tIns="0" rIns="0" bIns="0" rtlCol="0" anchor="ctr"/>
           <a:lstStyle/>
           <a:p>
-            <a:pPr indent="0" marL="0">
+            <a:pPr marL="0" indent="0">
               <a:buNone/>
             </a:pPr>
             <a:r>
@@ -6338,7 +6084,7 @@
           <a:bodyPr wrap="square" lIns="0" tIns="0" rIns="0" bIns="0" rtlCol="0" anchor="ctr"/>
           <a:lstStyle/>
           <a:p>
-            <a:pPr indent="0" marL="0">
+            <a:pPr marL="0" indent="0">
               <a:buNone/>
             </a:pPr>
             <a:r>
@@ -6377,6 +6123,13 @@
           </a:solidFill>
           <a:ln/>
         </p:spPr>
+        <p:txBody>
+          <a:bodyPr/>
+          <a:lstStyle/>
+          <a:p>
+            <a:endParaRPr lang="en-US"/>
+          </a:p>
+        </p:txBody>
       </p:sp>
       <p:sp>
         <p:nvSpPr>
@@ -6399,7 +6152,7 @@
           <a:bodyPr wrap="square" lIns="0" tIns="0" rIns="0" bIns="0" rtlCol="0" anchor="ctr"/>
           <a:lstStyle/>
           <a:p>
-            <a:pPr indent="0" marL="0">
+            <a:pPr marL="0" indent="0">
               <a:buNone/>
             </a:pPr>
             <a:r>
@@ -6438,7 +6191,7 @@
           <a:bodyPr wrap="square" lIns="0" tIns="0" rIns="0" bIns="0" rtlCol="0" anchor="ctr"/>
           <a:lstStyle/>
           <a:p>
-            <a:pPr indent="0" marL="0">
+            <a:pPr marL="0" indent="0">
               <a:buNone/>
             </a:pPr>
             <a:r>
@@ -6477,11 +6230,11 @@
           <a:bodyPr wrap="square" lIns="0" tIns="0" rIns="0" bIns="0" rtlCol="0" anchor="ctr"/>
           <a:lstStyle/>
           <a:p>
-            <a:pPr indent="0" marL="0">
-              <a:buNone/>
-            </a:pPr>
-            <a:r>
-              <a:rPr lang="en-US" sz="1100" b="1" spc="100" kern="0" dirty="0">
+            <a:pPr marL="0" indent="0">
+              <a:buNone/>
+            </a:pPr>
+            <a:r>
+              <a:rPr lang="en-US" sz="1100" b="1" kern="0" spc="100" dirty="0">
                 <a:solidFill>
                   <a:srgbClr val="D97757"/>
                 </a:solidFill>
@@ -6521,6 +6274,13 @@
             <a:prstDash val="solid"/>
           </a:ln>
         </p:spPr>
+        <p:txBody>
+          <a:bodyPr/>
+          <a:lstStyle/>
+          <a:p>
+            <a:endParaRPr lang="en-US"/>
+          </a:p>
+        </p:txBody>
       </p:sp>
       <p:sp>
         <p:nvSpPr>
@@ -6543,7 +6303,7 @@
           <a:bodyPr wrap="square" lIns="0" tIns="0" rIns="0" bIns="0" rtlCol="0" anchor="ctr"/>
           <a:lstStyle/>
           <a:p>
-            <a:pPr indent="0" marL="0">
+            <a:pPr marL="0" indent="0">
               <a:buNone/>
             </a:pPr>
             <a:r>
@@ -6587,6 +6347,13 @@
             <a:prstDash val="solid"/>
           </a:ln>
         </p:spPr>
+        <p:txBody>
+          <a:bodyPr/>
+          <a:lstStyle/>
+          <a:p>
+            <a:endParaRPr lang="en-US"/>
+          </a:p>
+        </p:txBody>
       </p:sp>
       <p:sp>
         <p:nvSpPr>
@@ -6609,7 +6376,7 @@
           <a:bodyPr wrap="square" lIns="0" tIns="0" rIns="0" bIns="0" rtlCol="0" anchor="ctr"/>
           <a:lstStyle/>
           <a:p>
-            <a:pPr indent="0" marL="0">
+            <a:pPr marL="0" indent="0">
               <a:buNone/>
             </a:pPr>
             <a:r>
@@ -6653,6 +6420,13 @@
             <a:prstDash val="solid"/>
           </a:ln>
         </p:spPr>
+        <p:txBody>
+          <a:bodyPr/>
+          <a:lstStyle/>
+          <a:p>
+            <a:endParaRPr lang="en-US"/>
+          </a:p>
+        </p:txBody>
       </p:sp>
       <p:sp>
         <p:nvSpPr>
@@ -6675,7 +6449,7 @@
           <a:bodyPr wrap="square" lIns="0" tIns="0" rIns="0" bIns="0" rtlCol="0" anchor="ctr"/>
           <a:lstStyle/>
           <a:p>
-            <a:pPr indent="0" marL="0">
+            <a:pPr marL="0" indent="0">
               <a:buNone/>
             </a:pPr>
             <a:r>
@@ -6719,6 +6493,13 @@
             <a:prstDash val="solid"/>
           </a:ln>
         </p:spPr>
+        <p:txBody>
+          <a:bodyPr/>
+          <a:lstStyle/>
+          <a:p>
+            <a:endParaRPr lang="en-US"/>
+          </a:p>
+        </p:txBody>
       </p:sp>
       <p:sp>
         <p:nvSpPr>
@@ -6741,7 +6522,7 @@
           <a:bodyPr wrap="square" lIns="0" tIns="0" rIns="0" bIns="0" rtlCol="0" anchor="ctr"/>
           <a:lstStyle/>
           <a:p>
-            <a:pPr indent="0" marL="0">
+            <a:pPr marL="0" indent="0">
               <a:buNone/>
             </a:pPr>
             <a:r>
@@ -6785,6 +6566,13 @@
             <a:prstDash val="solid"/>
           </a:ln>
         </p:spPr>
+        <p:txBody>
+          <a:bodyPr/>
+          <a:lstStyle/>
+          <a:p>
+            <a:endParaRPr lang="en-US"/>
+          </a:p>
+        </p:txBody>
       </p:sp>
       <p:sp>
         <p:nvSpPr>
@@ -6807,7 +6595,7 @@
           <a:bodyPr wrap="square" lIns="0" tIns="0" rIns="0" bIns="0" rtlCol="0" anchor="ctr"/>
           <a:lstStyle/>
           <a:p>
-            <a:pPr indent="0" marL="0">
+            <a:pPr marL="0" indent="0">
               <a:buNone/>
             </a:pPr>
             <a:r>
@@ -6851,6 +6639,13 @@
             <a:prstDash val="solid"/>
           </a:ln>
         </p:spPr>
+        <p:txBody>
+          <a:bodyPr/>
+          <a:lstStyle/>
+          <a:p>
+            <a:endParaRPr lang="en-US"/>
+          </a:p>
+        </p:txBody>
       </p:sp>
       <p:sp>
         <p:nvSpPr>
@@ -6873,7 +6668,7 @@
           <a:bodyPr wrap="square" lIns="0" tIns="0" rIns="0" bIns="0" rtlCol="0" anchor="ctr"/>
           <a:lstStyle/>
           <a:p>
-            <a:pPr indent="0" marL="0">
+            <a:pPr marL="0" indent="0">
               <a:buNone/>
             </a:pPr>
             <a:r>
@@ -6912,7 +6707,7 @@
           <a:bodyPr wrap="square" rtlCol="0" anchor="ctr"/>
           <a:lstStyle/>
           <a:p>
-            <a:pPr indent="0" marL="0">
+            <a:pPr marL="0" indent="0">
               <a:buNone/>
             </a:pPr>
             <a:r>
@@ -6951,7 +6746,7 @@
           <a:bodyPr wrap="square" rtlCol="0" anchor="ctr"/>
           <a:lstStyle/>
           <a:p>
-            <a:pPr algn="r" indent="0" marL="0">
+            <a:pPr marL="0" indent="0" algn="r">
               <a:buNone/>
             </a:pPr>
             <a:r>
@@ -6966,45 +6761,6 @@
               <a:t>Section 4  ·  3/14</a:t>
             </a:r>
             <a:endParaRPr lang="en-US" sz="900" dirty="0"/>
-          </a:p>
-        </p:txBody>
-      </p:sp>
-      <p:sp>
-        <p:nvSpPr>
-          <p:cNvPr id="29" name="Text 26"/>
-          <p:cNvSpPr/>
-          <p:nvPr/>
-        </p:nvSpPr>
-        <p:spPr>
-          <a:xfrm>
-            <a:off x="548640" y="4462272"/>
-            <a:ext cx="8046720" cy="274320"/>
-          </a:xfrm>
-          <a:prstGeom prst="rect">
-            <a:avLst/>
-          </a:prstGeom>
-          <a:noFill/>
-          <a:ln/>
-        </p:spPr>
-        <p:txBody>
-          <a:bodyPr wrap="square" lIns="0" tIns="0" rIns="0" bIns="0" rtlCol="0" anchor="ctr"/>
-          <a:lstStyle/>
-          <a:p>
-            <a:pPr indent="0" marL="0">
-              <a:buNone/>
-            </a:pPr>
-            <a:r>
-              <a:rPr lang="en-US" sz="1000" i="1" dirty="0">
-                <a:solidFill>
-                  <a:srgbClr val="615C52"/>
-                </a:solidFill>
-                <a:latin typeface="Inter" pitchFamily="34" charset="0"/>
-                <a:ea typeface="Inter" pitchFamily="34" charset="-122"/>
-                <a:cs typeface="Inter" pitchFamily="34" charset="-120"/>
-              </a:rPr>
-              <a:t>▸ A short spec front-loads the thinking and makes the review almost mechanical.</a:t>
-            </a:r>
-            <a:endParaRPr lang="en-US" sz="1000" dirty="0"/>
           </a:p>
         </p:txBody>
       </p:sp>
@@ -7024,6 +6780,7 @@
         <a:solidFill>
           <a:srgbClr val="F0EEE6"/>
         </a:solidFill>
+        <a:effectLst/>
       </p:bgPr>
     </p:bg>
     <p:spTree>
@@ -7061,11 +6818,11 @@
           <a:bodyPr wrap="square" lIns="0" tIns="0" rIns="0" bIns="0" rtlCol="0" anchor="ctr"/>
           <a:lstStyle/>
           <a:p>
-            <a:pPr indent="0" marL="0">
-              <a:buNone/>
-            </a:pPr>
-            <a:r>
-              <a:rPr lang="en-US" sz="1100" b="1" spc="200" kern="0" dirty="0">
+            <a:pPr marL="0" indent="0">
+              <a:buNone/>
+            </a:pPr>
+            <a:r>
+              <a:rPr lang="en-US" sz="1100" b="1" kern="0" spc="200" dirty="0">
                 <a:solidFill>
                   <a:srgbClr val="D97757"/>
                 </a:solidFill>
@@ -7100,7 +6857,7 @@
           <a:bodyPr wrap="square" lIns="0" tIns="0" rIns="0" bIns="0" rtlCol="0" anchor="ctr"/>
           <a:lstStyle/>
           <a:p>
-            <a:pPr indent="0" marL="0">
+            <a:pPr marL="0" indent="0">
               <a:buNone/>
             </a:pPr>
             <a:r>
@@ -7120,14 +6877,14 @@
       </p:sp>
       <p:pic>
         <p:nvPicPr>
-          <p:cNvPr id="4" name="Image 0" descr="preencoded.png">    </p:cNvPr>
+          <p:cNvPr id="4" name="Image 0" descr="preencoded.png"/>
           <p:cNvPicPr>
             <a:picLocks noChangeAspect="1"/>
           </p:cNvPicPr>
           <p:nvPr/>
         </p:nvPicPr>
         <p:blipFill>
-          <a:blip r:embed="rId1"/>
+          <a:blip r:embed="rId2"/>
           <a:stretch>
             <a:fillRect/>
           </a:stretch>
@@ -7168,13 +6925,20 @@
             <a:prstDash val="solid"/>
           </a:ln>
           <a:effectLst>
-            <a:outerShdw sx="100000" sy="100000" kx="0" ky="0" algn="bl" rotWithShape="0" blurRad="88900" dist="38100" dir="5400000">
+            <a:outerShdw blurRad="88900" dist="38100" dir="5400000" algn="bl" rotWithShape="0">
               <a:srgbClr val="000000">
                 <a:alpha val="10000"/>
               </a:srgbClr>
             </a:outerShdw>
           </a:effectLst>
         </p:spPr>
+        <p:txBody>
+          <a:bodyPr/>
+          <a:lstStyle/>
+          <a:p>
+            <a:endParaRPr lang="en-US"/>
+          </a:p>
+        </p:txBody>
       </p:sp>
       <p:sp>
         <p:nvSpPr>
@@ -7195,17 +6959,24 @@
           </a:solidFill>
           <a:ln/>
         </p:spPr>
+        <p:txBody>
+          <a:bodyPr/>
+          <a:lstStyle/>
+          <a:p>
+            <a:endParaRPr lang="en-US"/>
+          </a:p>
+        </p:txBody>
       </p:sp>
       <p:pic>
         <p:nvPicPr>
-          <p:cNvPr id="7" name="Image 1" descr="preencoded.png">    </p:cNvPr>
+          <p:cNvPr id="7" name="Image 1" descr="preencoded.png"/>
           <p:cNvPicPr>
             <a:picLocks noChangeAspect="1"/>
           </p:cNvPicPr>
           <p:nvPr/>
         </p:nvPicPr>
         <p:blipFill>
-          <a:blip r:embed="rId2"/>
+          <a:blip r:embed="rId3"/>
           <a:stretch>
             <a:fillRect/>
           </a:stretch>
@@ -7241,7 +7012,7 @@
           <a:bodyPr wrap="square" lIns="0" tIns="0" rIns="0" bIns="0" rtlCol="0" anchor="ctr"/>
           <a:lstStyle/>
           <a:p>
-            <a:pPr indent="0" marL="0">
+            <a:pPr marL="0" indent="0">
               <a:buNone/>
             </a:pPr>
             <a:r>
@@ -7280,7 +7051,7 @@
           <a:bodyPr wrap="square" lIns="0" tIns="0" rIns="0" bIns="0" rtlCol="0" anchor="ctr"/>
           <a:lstStyle/>
           <a:p>
-            <a:pPr indent="0" marL="0">
+            <a:pPr marL="0" indent="0">
               <a:buNone/>
             </a:pPr>
             <a:r>
@@ -7319,7 +7090,7 @@
           <a:bodyPr wrap="square" lIns="0" tIns="0" rIns="0" bIns="0" rtlCol="0" anchor="ctr"/>
           <a:lstStyle/>
           <a:p>
-            <a:pPr indent="0" marL="0">
+            <a:pPr marL="0" indent="0">
               <a:buNone/>
             </a:pPr>
             <a:r>
@@ -7363,13 +7134,20 @@
             <a:prstDash val="solid"/>
           </a:ln>
           <a:effectLst>
-            <a:outerShdw sx="100000" sy="100000" kx="0" ky="0" algn="bl" rotWithShape="0" blurRad="88900" dist="38100" dir="5400000">
+            <a:outerShdw blurRad="88900" dist="38100" dir="5400000" algn="bl" rotWithShape="0">
               <a:srgbClr val="000000">
                 <a:alpha val="10000"/>
               </a:srgbClr>
             </a:outerShdw>
           </a:effectLst>
         </p:spPr>
+        <p:txBody>
+          <a:bodyPr/>
+          <a:lstStyle/>
+          <a:p>
+            <a:endParaRPr lang="en-US"/>
+          </a:p>
+        </p:txBody>
       </p:sp>
       <p:sp>
         <p:nvSpPr>
@@ -7390,17 +7168,24 @@
           </a:solidFill>
           <a:ln/>
         </p:spPr>
+        <p:txBody>
+          <a:bodyPr/>
+          <a:lstStyle/>
+          <a:p>
+            <a:endParaRPr lang="en-US"/>
+          </a:p>
+        </p:txBody>
       </p:sp>
       <p:pic>
         <p:nvPicPr>
-          <p:cNvPr id="13" name="Image 2" descr="preencoded.png">    </p:cNvPr>
+          <p:cNvPr id="13" name="Image 2" descr="preencoded.png"/>
           <p:cNvPicPr>
             <a:picLocks noChangeAspect="1"/>
           </p:cNvPicPr>
           <p:nvPr/>
         </p:nvPicPr>
         <p:blipFill>
-          <a:blip r:embed="rId3"/>
+          <a:blip r:embed="rId4"/>
           <a:stretch>
             <a:fillRect/>
           </a:stretch>
@@ -7436,7 +7221,7 @@
           <a:bodyPr wrap="square" lIns="0" tIns="0" rIns="0" bIns="0" rtlCol="0" anchor="ctr"/>
           <a:lstStyle/>
           <a:p>
-            <a:pPr indent="0" marL="0">
+            <a:pPr marL="0" indent="0">
               <a:buNone/>
             </a:pPr>
             <a:r>
@@ -7475,7 +7260,7 @@
           <a:bodyPr wrap="square" lIns="0" tIns="0" rIns="0" bIns="0" rtlCol="0" anchor="ctr"/>
           <a:lstStyle/>
           <a:p>
-            <a:pPr indent="0" marL="0">
+            <a:pPr marL="0" indent="0">
               <a:buNone/>
             </a:pPr>
             <a:r>
@@ -7514,7 +7299,7 @@
           <a:bodyPr wrap="square" lIns="0" tIns="0" rIns="0" bIns="0" rtlCol="0" anchor="ctr"/>
           <a:lstStyle/>
           <a:p>
-            <a:pPr indent="0" marL="0">
+            <a:pPr marL="0" indent="0">
               <a:buNone/>
             </a:pPr>
             <a:r>
@@ -7558,13 +7343,20 @@
             <a:prstDash val="solid"/>
           </a:ln>
           <a:effectLst>
-            <a:outerShdw sx="100000" sy="100000" kx="0" ky="0" algn="bl" rotWithShape="0" blurRad="88900" dist="38100" dir="5400000">
+            <a:outerShdw blurRad="88900" dist="38100" dir="5400000" algn="bl" rotWithShape="0">
               <a:srgbClr val="000000">
                 <a:alpha val="10000"/>
               </a:srgbClr>
             </a:outerShdw>
           </a:effectLst>
         </p:spPr>
+        <p:txBody>
+          <a:bodyPr/>
+          <a:lstStyle/>
+          <a:p>
+            <a:endParaRPr lang="en-US"/>
+          </a:p>
+        </p:txBody>
       </p:sp>
       <p:sp>
         <p:nvSpPr>
@@ -7585,17 +7377,24 @@
           </a:solidFill>
           <a:ln/>
         </p:spPr>
+        <p:txBody>
+          <a:bodyPr/>
+          <a:lstStyle/>
+          <a:p>
+            <a:endParaRPr lang="en-US"/>
+          </a:p>
+        </p:txBody>
       </p:sp>
       <p:pic>
         <p:nvPicPr>
-          <p:cNvPr id="19" name="Image 3" descr="preencoded.png">    </p:cNvPr>
+          <p:cNvPr id="19" name="Image 3" descr="preencoded.png"/>
           <p:cNvPicPr>
             <a:picLocks noChangeAspect="1"/>
           </p:cNvPicPr>
           <p:nvPr/>
         </p:nvPicPr>
         <p:blipFill>
-          <a:blip r:embed="rId4"/>
+          <a:blip r:embed="rId5"/>
           <a:stretch>
             <a:fillRect/>
           </a:stretch>
@@ -7631,7 +7430,7 @@
           <a:bodyPr wrap="square" lIns="0" tIns="0" rIns="0" bIns="0" rtlCol="0" anchor="ctr"/>
           <a:lstStyle/>
           <a:p>
-            <a:pPr indent="0" marL="0">
+            <a:pPr marL="0" indent="0">
               <a:buNone/>
             </a:pPr>
             <a:r>
@@ -7670,7 +7469,7 @@
           <a:bodyPr wrap="square" lIns="0" tIns="0" rIns="0" bIns="0" rtlCol="0" anchor="ctr"/>
           <a:lstStyle/>
           <a:p>
-            <a:pPr indent="0" marL="0">
+            <a:pPr marL="0" indent="0">
               <a:buNone/>
             </a:pPr>
             <a:r>
@@ -7709,7 +7508,7 @@
           <a:bodyPr wrap="square" lIns="0" tIns="0" rIns="0" bIns="0" rtlCol="0" anchor="ctr"/>
           <a:lstStyle/>
           <a:p>
-            <a:pPr indent="0" marL="0">
+            <a:pPr marL="0" indent="0">
               <a:buNone/>
             </a:pPr>
             <a:r>
@@ -7748,7 +7547,7 @@
           <a:bodyPr wrap="square" lIns="0" tIns="0" rIns="0" bIns="0" rtlCol="0" anchor="ctr"/>
           <a:lstStyle/>
           <a:p>
-            <a:pPr algn="ctr" indent="0" marL="0">
+            <a:pPr marL="0" indent="0" algn="ctr">
               <a:buNone/>
             </a:pPr>
             <a:r>
@@ -7787,7 +7586,7 @@
           <a:bodyPr wrap="square" rtlCol="0" anchor="ctr"/>
           <a:lstStyle/>
           <a:p>
-            <a:pPr indent="0" marL="0">
+            <a:pPr marL="0" indent="0">
               <a:buNone/>
             </a:pPr>
             <a:r>
@@ -7826,7 +7625,7 @@
           <a:bodyPr wrap="square" rtlCol="0" anchor="ctr"/>
           <a:lstStyle/>
           <a:p>
-            <a:pPr algn="r" indent="0" marL="0">
+            <a:pPr marL="0" indent="0" algn="r">
               <a:buNone/>
             </a:pPr>
             <a:r>
@@ -7841,45 +7640,6 @@
               <a:t>Section 4  ·  4/14</a:t>
             </a:r>
             <a:endParaRPr lang="en-US" sz="900" dirty="0"/>
-          </a:p>
-        </p:txBody>
-      </p:sp>
-      <p:sp>
-        <p:nvSpPr>
-          <p:cNvPr id="26" name="Text 20"/>
-          <p:cNvSpPr/>
-          <p:nvPr/>
-        </p:nvSpPr>
-        <p:spPr>
-          <a:xfrm>
-            <a:off x="548640" y="4462272"/>
-            <a:ext cx="8046720" cy="274320"/>
-          </a:xfrm>
-          <a:prstGeom prst="rect">
-            <a:avLst/>
-          </a:prstGeom>
-          <a:noFill/>
-          <a:ln/>
-        </p:spPr>
-        <p:txBody>
-          <a:bodyPr wrap="square" lIns="0" tIns="0" rIns="0" bIns="0" rtlCol="0" anchor="ctr"/>
-          <a:lstStyle/>
-          <a:p>
-            <a:pPr indent="0" marL="0">
-              <a:buNone/>
-            </a:pPr>
-            <a:r>
-              <a:rPr lang="en-US" sz="1000" i="1" dirty="0">
-                <a:solidFill>
-                  <a:srgbClr val="615C52"/>
-                </a:solidFill>
-                <a:latin typeface="Inter" pitchFamily="34" charset="0"/>
-                <a:ea typeface="Inter" pitchFamily="34" charset="-122"/>
-                <a:cs typeface="Inter" pitchFamily="34" charset="-120"/>
-              </a:rPr>
-              <a:t>▸ Quality lives in skills and hooks — prohibitions in CLAUDE.md don't hold.</a:t>
-            </a:r>
-            <a:endParaRPr lang="en-US" sz="1000" dirty="0"/>
           </a:p>
         </p:txBody>
       </p:sp>
@@ -7899,6 +7659,7 @@
         <a:solidFill>
           <a:srgbClr val="F0EEE6"/>
         </a:solidFill>
+        <a:effectLst/>
       </p:bgPr>
     </p:bg>
     <p:spTree>
@@ -7936,11 +7697,11 @@
           <a:bodyPr wrap="square" lIns="0" tIns="0" rIns="0" bIns="0" rtlCol="0" anchor="ctr"/>
           <a:lstStyle/>
           <a:p>
-            <a:pPr indent="0" marL="0">
-              <a:buNone/>
-            </a:pPr>
-            <a:r>
-              <a:rPr lang="en-US" sz="1100" b="1" spc="200" kern="0" dirty="0">
+            <a:pPr marL="0" indent="0">
+              <a:buNone/>
+            </a:pPr>
+            <a:r>
+              <a:rPr lang="en-US" sz="1100" b="1" kern="0" spc="200" dirty="0">
                 <a:solidFill>
                   <a:srgbClr val="D97757"/>
                 </a:solidFill>
@@ -7975,7 +7736,7 @@
           <a:bodyPr wrap="square" lIns="0" tIns="0" rIns="0" bIns="0" rtlCol="0" anchor="ctr"/>
           <a:lstStyle/>
           <a:p>
-            <a:pPr indent="0" marL="0">
+            <a:pPr marL="0" indent="0">
               <a:buNone/>
             </a:pPr>
             <a:r>
@@ -7995,14 +7756,14 @@
       </p:sp>
       <p:pic>
         <p:nvPicPr>
-          <p:cNvPr id="4" name="Image 0" descr="preencoded.png">    </p:cNvPr>
+          <p:cNvPr id="4" name="Image 0" descr="preencoded.png"/>
           <p:cNvPicPr>
             <a:picLocks noChangeAspect="1"/>
           </p:cNvPicPr>
           <p:nvPr/>
         </p:nvPicPr>
         <p:blipFill>
-          <a:blip r:embed="rId1"/>
+          <a:blip r:embed="rId2"/>
           <a:stretch>
             <a:fillRect/>
           </a:stretch>
@@ -8043,13 +7804,20 @@
             <a:prstDash val="solid"/>
           </a:ln>
           <a:effectLst>
-            <a:outerShdw sx="100000" sy="100000" kx="0" ky="0" algn="bl" rotWithShape="0" blurRad="88900" dist="38100" dir="5400000">
+            <a:outerShdw blurRad="88900" dist="38100" dir="5400000" algn="bl" rotWithShape="0">
               <a:srgbClr val="000000">
                 <a:alpha val="10000"/>
               </a:srgbClr>
             </a:outerShdw>
           </a:effectLst>
         </p:spPr>
+        <p:txBody>
+          <a:bodyPr/>
+          <a:lstStyle/>
+          <a:p>
+            <a:endParaRPr lang="en-US"/>
+          </a:p>
+        </p:txBody>
       </p:sp>
       <p:sp>
         <p:nvSpPr>
@@ -8072,7 +7840,7 @@
           <a:bodyPr wrap="square" lIns="0" tIns="0" rIns="0" bIns="0" rtlCol="0" anchor="ctr"/>
           <a:lstStyle/>
           <a:p>
-            <a:pPr algn="ctr" indent="0" marL="0">
+            <a:pPr marL="0" indent="0" algn="ctr">
               <a:buNone/>
             </a:pPr>
             <a:r>
@@ -8111,7 +7879,7 @@
           <a:bodyPr wrap="square" lIns="0" tIns="0" rIns="0" bIns="0" rtlCol="0" anchor="t"/>
           <a:lstStyle/>
           <a:p>
-            <a:pPr algn="ctr" indent="0" marL="0">
+            <a:pPr marL="0" indent="0" algn="ctr">
               <a:buNone/>
             </a:pPr>
             <a:r>
@@ -8150,7 +7918,7 @@
           <a:bodyPr wrap="square" lIns="0" tIns="0" rIns="0" bIns="0" rtlCol="0" anchor="ctr"/>
           <a:lstStyle/>
           <a:p>
-            <a:pPr algn="ctr" indent="0" marL="0">
+            <a:pPr marL="0" indent="0" algn="ctr">
               <a:buNone/>
             </a:pPr>
             <a:r>
@@ -8194,13 +7962,20 @@
             <a:prstDash val="solid"/>
           </a:ln>
           <a:effectLst>
-            <a:outerShdw sx="100000" sy="100000" kx="0" ky="0" algn="bl" rotWithShape="0" blurRad="88900" dist="38100" dir="5400000">
+            <a:outerShdw blurRad="88900" dist="38100" dir="5400000" algn="bl" rotWithShape="0">
               <a:srgbClr val="000000">
                 <a:alpha val="10000"/>
               </a:srgbClr>
             </a:outerShdw>
           </a:effectLst>
         </p:spPr>
+        <p:txBody>
+          <a:bodyPr/>
+          <a:lstStyle/>
+          <a:p>
+            <a:endParaRPr lang="en-US"/>
+          </a:p>
+        </p:txBody>
       </p:sp>
       <p:sp>
         <p:nvSpPr>
@@ -8223,7 +7998,7 @@
           <a:bodyPr wrap="square" lIns="0" tIns="0" rIns="0" bIns="0" rtlCol="0" anchor="ctr"/>
           <a:lstStyle/>
           <a:p>
-            <a:pPr algn="ctr" indent="0" marL="0">
+            <a:pPr marL="0" indent="0" algn="ctr">
               <a:buNone/>
             </a:pPr>
             <a:r>
@@ -8262,7 +8037,7 @@
           <a:bodyPr wrap="square" lIns="0" tIns="0" rIns="0" bIns="0" rtlCol="0" anchor="t"/>
           <a:lstStyle/>
           <a:p>
-            <a:pPr algn="ctr" indent="0" marL="0">
+            <a:pPr marL="0" indent="0" algn="ctr">
               <a:buNone/>
             </a:pPr>
             <a:r>
@@ -8301,7 +8076,7 @@
           <a:bodyPr wrap="square" lIns="0" tIns="0" rIns="0" bIns="0" rtlCol="0" anchor="ctr"/>
           <a:lstStyle/>
           <a:p>
-            <a:pPr algn="ctr" indent="0" marL="0">
+            <a:pPr marL="0" indent="0" algn="ctr">
               <a:buNone/>
             </a:pPr>
             <a:r>
@@ -8345,13 +8120,20 @@
             <a:prstDash val="solid"/>
           </a:ln>
           <a:effectLst>
-            <a:outerShdw sx="100000" sy="100000" kx="0" ky="0" algn="bl" rotWithShape="0" blurRad="88900" dist="38100" dir="5400000">
+            <a:outerShdw blurRad="88900" dist="38100" dir="5400000" algn="bl" rotWithShape="0">
               <a:srgbClr val="000000">
                 <a:alpha val="10000"/>
               </a:srgbClr>
             </a:outerShdw>
           </a:effectLst>
         </p:spPr>
+        <p:txBody>
+          <a:bodyPr/>
+          <a:lstStyle/>
+          <a:p>
+            <a:endParaRPr lang="en-US"/>
+          </a:p>
+        </p:txBody>
       </p:sp>
       <p:sp>
         <p:nvSpPr>
@@ -8374,7 +8156,7 @@
           <a:bodyPr wrap="square" lIns="0" tIns="0" rIns="0" bIns="0" rtlCol="0" anchor="ctr"/>
           <a:lstStyle/>
           <a:p>
-            <a:pPr algn="ctr" indent="0" marL="0">
+            <a:pPr marL="0" indent="0" algn="ctr">
               <a:buNone/>
             </a:pPr>
             <a:r>
@@ -8413,7 +8195,7 @@
           <a:bodyPr wrap="square" lIns="0" tIns="0" rIns="0" bIns="0" rtlCol="0" anchor="t"/>
           <a:lstStyle/>
           <a:p>
-            <a:pPr algn="ctr" indent="0" marL="0">
+            <a:pPr marL="0" indent="0" algn="ctr">
               <a:buNone/>
             </a:pPr>
             <a:r>
@@ -8452,7 +8234,7 @@
           <a:bodyPr wrap="square" lIns="0" tIns="0" rIns="0" bIns="0" rtlCol="0" anchor="ctr"/>
           <a:lstStyle/>
           <a:p>
-            <a:pPr algn="ctr" indent="0" marL="0">
+            <a:pPr marL="0" indent="0" algn="ctr">
               <a:buNone/>
             </a:pPr>
             <a:r>
@@ -8496,13 +8278,20 @@
             <a:prstDash val="solid"/>
           </a:ln>
           <a:effectLst>
-            <a:outerShdw sx="100000" sy="100000" kx="0" ky="0" algn="bl" rotWithShape="0" blurRad="88900" dist="38100" dir="5400000">
+            <a:outerShdw blurRad="88900" dist="38100" dir="5400000" algn="bl" rotWithShape="0">
               <a:srgbClr val="000000">
                 <a:alpha val="10000"/>
               </a:srgbClr>
             </a:outerShdw>
           </a:effectLst>
         </p:spPr>
+        <p:txBody>
+          <a:bodyPr/>
+          <a:lstStyle/>
+          <a:p>
+            <a:endParaRPr lang="en-US"/>
+          </a:p>
+        </p:txBody>
       </p:sp>
       <p:sp>
         <p:nvSpPr>
@@ -8525,7 +8314,7 @@
           <a:bodyPr wrap="square" lIns="0" tIns="0" rIns="0" bIns="0" rtlCol="0" anchor="ctr"/>
           <a:lstStyle/>
           <a:p>
-            <a:pPr algn="ctr" indent="0" marL="0">
+            <a:pPr marL="0" indent="0" algn="ctr">
               <a:buNone/>
             </a:pPr>
             <a:r>
@@ -8564,7 +8353,7 @@
           <a:bodyPr wrap="square" lIns="0" tIns="0" rIns="0" bIns="0" rtlCol="0" anchor="t"/>
           <a:lstStyle/>
           <a:p>
-            <a:pPr algn="ctr" indent="0" marL="0">
+            <a:pPr marL="0" indent="0" algn="ctr">
               <a:buNone/>
             </a:pPr>
             <a:r>
@@ -8603,7 +8392,7 @@
           <a:bodyPr wrap="square" lIns="0" tIns="0" rIns="0" bIns="0" rtlCol="0" anchor="ctr"/>
           <a:lstStyle/>
           <a:p>
-            <a:pPr algn="ctr" indent="0" marL="0">
+            <a:pPr marL="0" indent="0" algn="ctr">
               <a:buNone/>
             </a:pPr>
             <a:r>
@@ -8647,13 +8436,20 @@
             <a:prstDash val="solid"/>
           </a:ln>
           <a:effectLst>
-            <a:outerShdw sx="100000" sy="100000" kx="0" ky="0" algn="bl" rotWithShape="0" blurRad="88900" dist="38100" dir="5400000">
+            <a:outerShdw blurRad="88900" dist="38100" dir="5400000" algn="bl" rotWithShape="0">
               <a:srgbClr val="000000">
                 <a:alpha val="10000"/>
               </a:srgbClr>
             </a:outerShdw>
           </a:effectLst>
         </p:spPr>
+        <p:txBody>
+          <a:bodyPr/>
+          <a:lstStyle/>
+          <a:p>
+            <a:endParaRPr lang="en-US"/>
+          </a:p>
+        </p:txBody>
       </p:sp>
       <p:sp>
         <p:nvSpPr>
@@ -8676,7 +8472,7 @@
           <a:bodyPr wrap="square" lIns="0" tIns="0" rIns="0" bIns="0" rtlCol="0" anchor="ctr"/>
           <a:lstStyle/>
           <a:p>
-            <a:pPr algn="ctr" indent="0" marL="0">
+            <a:pPr marL="0" indent="0" algn="ctr">
               <a:buNone/>
             </a:pPr>
             <a:r>
@@ -8715,7 +8511,7 @@
           <a:bodyPr wrap="square" lIns="0" tIns="0" rIns="0" bIns="0" rtlCol="0" anchor="t"/>
           <a:lstStyle/>
           <a:p>
-            <a:pPr algn="ctr" indent="0" marL="0">
+            <a:pPr marL="0" indent="0" algn="ctr">
               <a:buNone/>
             </a:pPr>
             <a:r>
@@ -8754,6 +8550,13 @@
           </a:solidFill>
           <a:ln/>
         </p:spPr>
+        <p:txBody>
+          <a:bodyPr/>
+          <a:lstStyle/>
+          <a:p>
+            <a:endParaRPr lang="en-US"/>
+          </a:p>
+        </p:txBody>
       </p:sp>
       <p:sp>
         <p:nvSpPr>
@@ -8774,17 +8577,24 @@
           </a:solidFill>
           <a:ln/>
         </p:spPr>
+        <p:txBody>
+          <a:bodyPr/>
+          <a:lstStyle/>
+          <a:p>
+            <a:endParaRPr lang="en-US"/>
+          </a:p>
+        </p:txBody>
       </p:sp>
       <p:pic>
         <p:nvPicPr>
-          <p:cNvPr id="26" name="Image 1" descr="preencoded.png">    </p:cNvPr>
+          <p:cNvPr id="26" name="Image 1" descr="preencoded.png"/>
           <p:cNvPicPr>
             <a:picLocks noChangeAspect="1"/>
           </p:cNvPicPr>
           <p:nvPr/>
         </p:nvPicPr>
         <p:blipFill>
-          <a:blip r:embed="rId2"/>
+          <a:blip r:embed="rId3"/>
           <a:stretch>
             <a:fillRect/>
           </a:stretch>
@@ -8820,7 +8630,7 @@
           <a:bodyPr wrap="square" lIns="0" tIns="0" rIns="0" bIns="0" rtlCol="0" anchor="ctr"/>
           <a:lstStyle/>
           <a:p>
-            <a:pPr indent="0" marL="0">
+            <a:pPr marL="0" indent="0">
               <a:buNone/>
             </a:pPr>
             <a:r>
@@ -8834,9 +8644,6 @@
               </a:rPr>
               <a:t>Pause every N changes for approval.</a:t>
             </a:r>
-            <a:pPr indent="0" marL="0">
-              <a:buNone/>
-            </a:pPr>
             <a:r>
               <a:rPr lang="en-US" sz="1500" dirty="0">
                 <a:solidFill>
@@ -8873,7 +8680,7 @@
           <a:bodyPr wrap="square" rtlCol="0" anchor="ctr"/>
           <a:lstStyle/>
           <a:p>
-            <a:pPr indent="0" marL="0">
+            <a:pPr marL="0" indent="0">
               <a:buNone/>
             </a:pPr>
             <a:r>
@@ -8912,7 +8719,7 @@
           <a:bodyPr wrap="square" rtlCol="0" anchor="ctr"/>
           <a:lstStyle/>
           <a:p>
-            <a:pPr algn="r" indent="0" marL="0">
+            <a:pPr marL="0" indent="0" algn="r">
               <a:buNone/>
             </a:pPr>
             <a:r>
@@ -8927,45 +8734,6 @@
               <a:t>Section 4  ·  5/14</a:t>
             </a:r>
             <a:endParaRPr lang="en-US" sz="900" dirty="0"/>
-          </a:p>
-        </p:txBody>
-      </p:sp>
-      <p:sp>
-        <p:nvSpPr>
-          <p:cNvPr id="30" name="Text 26"/>
-          <p:cNvSpPr/>
-          <p:nvPr/>
-        </p:nvSpPr>
-        <p:spPr>
-          <a:xfrm>
-            <a:off x="548640" y="4462272"/>
-            <a:ext cx="8046720" cy="274320"/>
-          </a:xfrm>
-          <a:prstGeom prst="rect">
-            <a:avLst/>
-          </a:prstGeom>
-          <a:noFill/>
-          <a:ln/>
-        </p:spPr>
-        <p:txBody>
-          <a:bodyPr wrap="square" lIns="0" tIns="0" rIns="0" bIns="0" rtlCol="0" anchor="ctr"/>
-          <a:lstStyle/>
-          <a:p>
-            <a:pPr indent="0" marL="0">
-              <a:buNone/>
-            </a:pPr>
-            <a:r>
-              <a:rPr lang="en-US" sz="1000" i="1" dirty="0">
-                <a:solidFill>
-                  <a:srgbClr val="615C52"/>
-                </a:solidFill>
-                <a:latin typeface="Inter" pitchFamily="34" charset="0"/>
-                <a:ea typeface="Inter" pitchFamily="34" charset="-122"/>
-                <a:cs typeface="Inter" pitchFamily="34" charset="-120"/>
-              </a:rPr>
-              <a:t>▸ Batching with approval gates is what makes large refactors safe to run.</a:t>
-            </a:r>
-            <a:endParaRPr lang="en-US" sz="1000" dirty="0"/>
           </a:p>
         </p:txBody>
       </p:sp>
@@ -8985,6 +8753,7 @@
         <a:solidFill>
           <a:srgbClr val="F0EEE6"/>
         </a:solidFill>
+        <a:effectLst/>
       </p:bgPr>
     </p:bg>
     <p:spTree>
@@ -9022,11 +8791,11 @@
           <a:bodyPr wrap="square" lIns="0" tIns="0" rIns="0" bIns="0" rtlCol="0" anchor="ctr"/>
           <a:lstStyle/>
           <a:p>
-            <a:pPr indent="0" marL="0">
-              <a:buNone/>
-            </a:pPr>
-            <a:r>
-              <a:rPr lang="en-US" sz="1100" b="1" spc="200" kern="0" dirty="0">
+            <a:pPr marL="0" indent="0">
+              <a:buNone/>
+            </a:pPr>
+            <a:r>
+              <a:rPr lang="en-US" sz="1100" b="1" kern="0" spc="200" dirty="0">
                 <a:solidFill>
                   <a:srgbClr val="D97757"/>
                 </a:solidFill>
@@ -9061,7 +8830,7 @@
           <a:bodyPr wrap="square" lIns="0" tIns="0" rIns="0" bIns="0" rtlCol="0" anchor="ctr"/>
           <a:lstStyle/>
           <a:p>
-            <a:pPr indent="0" marL="0">
+            <a:pPr marL="0" indent="0">
               <a:buNone/>
             </a:pPr>
             <a:r>
@@ -9081,14 +8850,14 @@
       </p:sp>
       <p:pic>
         <p:nvPicPr>
-          <p:cNvPr id="4" name="Image 0" descr="preencoded.png">    </p:cNvPr>
+          <p:cNvPr id="4" name="Image 0" descr="preencoded.png"/>
           <p:cNvPicPr>
             <a:picLocks noChangeAspect="1"/>
           </p:cNvPicPr>
           <p:nvPr/>
         </p:nvPicPr>
         <p:blipFill>
-          <a:blip r:embed="rId1"/>
+          <a:blip r:embed="rId2"/>
           <a:stretch>
             <a:fillRect/>
           </a:stretch>
@@ -9129,13 +8898,20 @@
             <a:prstDash val="solid"/>
           </a:ln>
           <a:effectLst>
-            <a:outerShdw sx="100000" sy="100000" kx="0" ky="0" algn="bl" rotWithShape="0" blurRad="88900" dist="38100" dir="5400000">
+            <a:outerShdw blurRad="88900" dist="38100" dir="5400000" algn="bl" rotWithShape="0">
               <a:srgbClr val="000000">
                 <a:alpha val="10000"/>
               </a:srgbClr>
             </a:outerShdw>
           </a:effectLst>
         </p:spPr>
+        <p:txBody>
+          <a:bodyPr/>
+          <a:lstStyle/>
+          <a:p>
+            <a:endParaRPr lang="en-US"/>
+          </a:p>
+        </p:txBody>
       </p:sp>
       <p:sp>
         <p:nvSpPr>
@@ -9156,17 +8932,24 @@
           </a:solidFill>
           <a:ln/>
         </p:spPr>
+        <p:txBody>
+          <a:bodyPr/>
+          <a:lstStyle/>
+          <a:p>
+            <a:endParaRPr lang="en-US"/>
+          </a:p>
+        </p:txBody>
       </p:sp>
       <p:pic>
         <p:nvPicPr>
-          <p:cNvPr id="7" name="Image 1" descr="preencoded.png">    </p:cNvPr>
+          <p:cNvPr id="7" name="Image 1" descr="preencoded.png"/>
           <p:cNvPicPr>
             <a:picLocks noChangeAspect="1"/>
           </p:cNvPicPr>
           <p:nvPr/>
         </p:nvPicPr>
         <p:blipFill>
-          <a:blip r:embed="rId2"/>
+          <a:blip r:embed="rId3"/>
           <a:stretch>
             <a:fillRect/>
           </a:stretch>
@@ -9202,7 +8985,7 @@
           <a:bodyPr wrap="square" lIns="0" tIns="0" rIns="0" bIns="0" rtlCol="0" anchor="ctr"/>
           <a:lstStyle/>
           <a:p>
-            <a:pPr indent="0" marL="0">
+            <a:pPr marL="0" indent="0">
               <a:buNone/>
             </a:pPr>
             <a:r>
@@ -9241,7 +9024,7 @@
           <a:bodyPr wrap="square" lIns="0" tIns="0" rIns="0" bIns="0" rtlCol="0" anchor="ctr"/>
           <a:lstStyle/>
           <a:p>
-            <a:pPr indent="0" marL="0">
+            <a:pPr marL="0" indent="0">
               <a:buNone/>
             </a:pPr>
             <a:r>
@@ -9285,13 +9068,20 @@
             <a:prstDash val="solid"/>
           </a:ln>
           <a:effectLst>
-            <a:outerShdw sx="100000" sy="100000" kx="0" ky="0" algn="bl" rotWithShape="0" blurRad="88900" dist="38100" dir="5400000">
+            <a:outerShdw blurRad="88900" dist="38100" dir="5400000" algn="bl" rotWithShape="0">
               <a:srgbClr val="000000">
                 <a:alpha val="10000"/>
               </a:srgbClr>
             </a:outerShdw>
           </a:effectLst>
         </p:spPr>
+        <p:txBody>
+          <a:bodyPr/>
+          <a:lstStyle/>
+          <a:p>
+            <a:endParaRPr lang="en-US"/>
+          </a:p>
+        </p:txBody>
       </p:sp>
       <p:sp>
         <p:nvSpPr>
@@ -9312,17 +9102,24 @@
           </a:solidFill>
           <a:ln/>
         </p:spPr>
+        <p:txBody>
+          <a:bodyPr/>
+          <a:lstStyle/>
+          <a:p>
+            <a:endParaRPr lang="en-US"/>
+          </a:p>
+        </p:txBody>
       </p:sp>
       <p:pic>
         <p:nvPicPr>
-          <p:cNvPr id="12" name="Image 2" descr="preencoded.png">    </p:cNvPr>
+          <p:cNvPr id="12" name="Image 2" descr="preencoded.png"/>
           <p:cNvPicPr>
             <a:picLocks noChangeAspect="1"/>
           </p:cNvPicPr>
           <p:nvPr/>
         </p:nvPicPr>
         <p:blipFill>
-          <a:blip r:embed="rId3"/>
+          <a:blip r:embed="rId4"/>
           <a:stretch>
             <a:fillRect/>
           </a:stretch>
@@ -9358,7 +9155,7 @@
           <a:bodyPr wrap="square" lIns="0" tIns="0" rIns="0" bIns="0" rtlCol="0" anchor="ctr"/>
           <a:lstStyle/>
           <a:p>
-            <a:pPr indent="0" marL="0">
+            <a:pPr marL="0" indent="0">
               <a:buNone/>
             </a:pPr>
             <a:r>
@@ -9397,7 +9194,7 @@
           <a:bodyPr wrap="square" lIns="0" tIns="0" rIns="0" bIns="0" rtlCol="0" anchor="ctr"/>
           <a:lstStyle/>
           <a:p>
-            <a:pPr indent="0" marL="0">
+            <a:pPr marL="0" indent="0">
               <a:buNone/>
             </a:pPr>
             <a:r>
@@ -9441,13 +9238,20 @@
             <a:prstDash val="solid"/>
           </a:ln>
           <a:effectLst>
-            <a:outerShdw sx="100000" sy="100000" kx="0" ky="0" algn="bl" rotWithShape="0" blurRad="88900" dist="38100" dir="5400000">
+            <a:outerShdw blurRad="88900" dist="38100" dir="5400000" algn="bl" rotWithShape="0">
               <a:srgbClr val="000000">
                 <a:alpha val="10000"/>
               </a:srgbClr>
             </a:outerShdw>
           </a:effectLst>
         </p:spPr>
+        <p:txBody>
+          <a:bodyPr/>
+          <a:lstStyle/>
+          <a:p>
+            <a:endParaRPr lang="en-US"/>
+          </a:p>
+        </p:txBody>
       </p:sp>
       <p:sp>
         <p:nvSpPr>
@@ -9468,17 +9272,24 @@
           </a:solidFill>
           <a:ln/>
         </p:spPr>
+        <p:txBody>
+          <a:bodyPr/>
+          <a:lstStyle/>
+          <a:p>
+            <a:endParaRPr lang="en-US"/>
+          </a:p>
+        </p:txBody>
       </p:sp>
       <p:pic>
         <p:nvPicPr>
-          <p:cNvPr id="17" name="Image 3" descr="preencoded.png">    </p:cNvPr>
+          <p:cNvPr id="17" name="Image 3" descr="preencoded.png"/>
           <p:cNvPicPr>
             <a:picLocks noChangeAspect="1"/>
           </p:cNvPicPr>
           <p:nvPr/>
         </p:nvPicPr>
         <p:blipFill>
-          <a:blip r:embed="rId4"/>
+          <a:blip r:embed="rId5"/>
           <a:stretch>
             <a:fillRect/>
           </a:stretch>
@@ -9514,7 +9325,7 @@
           <a:bodyPr wrap="square" lIns="0" tIns="0" rIns="0" bIns="0" rtlCol="0" anchor="ctr"/>
           <a:lstStyle/>
           <a:p>
-            <a:pPr indent="0" marL="0">
+            <a:pPr marL="0" indent="0">
               <a:buNone/>
             </a:pPr>
             <a:r>
@@ -9553,7 +9364,7 @@
           <a:bodyPr wrap="square" lIns="0" tIns="0" rIns="0" bIns="0" rtlCol="0" anchor="ctr"/>
           <a:lstStyle/>
           <a:p>
-            <a:pPr indent="0" marL="0">
+            <a:pPr marL="0" indent="0">
               <a:buNone/>
             </a:pPr>
             <a:r>
@@ -9592,7 +9403,7 @@
           <a:bodyPr wrap="square" rtlCol="0" anchor="ctr"/>
           <a:lstStyle/>
           <a:p>
-            <a:pPr indent="0" marL="0">
+            <a:pPr marL="0" indent="0">
               <a:buNone/>
             </a:pPr>
             <a:r>
@@ -9631,7 +9442,7 @@
           <a:bodyPr wrap="square" rtlCol="0" anchor="ctr"/>
           <a:lstStyle/>
           <a:p>
-            <a:pPr algn="r" indent="0" marL="0">
+            <a:pPr marL="0" indent="0" algn="r">
               <a:buNone/>
             </a:pPr>
             <a:r>
@@ -9646,45 +9457,6 @@
               <a:t>Section 4  ·  6/14</a:t>
             </a:r>
             <a:endParaRPr lang="en-US" sz="900" dirty="0"/>
-          </a:p>
-        </p:txBody>
-      </p:sp>
-      <p:sp>
-        <p:nvSpPr>
-          <p:cNvPr id="22" name="Text 16"/>
-          <p:cNvSpPr/>
-          <p:nvPr/>
-        </p:nvSpPr>
-        <p:spPr>
-          <a:xfrm>
-            <a:off x="548640" y="4462272"/>
-            <a:ext cx="8046720" cy="274320"/>
-          </a:xfrm>
-          <a:prstGeom prst="rect">
-            <a:avLst/>
-          </a:prstGeom>
-          <a:noFill/>
-          <a:ln/>
-        </p:spPr>
-        <p:txBody>
-          <a:bodyPr wrap="square" lIns="0" tIns="0" rIns="0" bIns="0" rtlCol="0" anchor="ctr"/>
-          <a:lstStyle/>
-          <a:p>
-            <a:pPr indent="0" marL="0">
-              <a:buNone/>
-            </a:pPr>
-            <a:r>
-              <a:rPr lang="en-US" sz="1000" i="1" dirty="0">
-                <a:solidFill>
-                  <a:srgbClr val="615C52"/>
-                </a:solidFill>
-                <a:latin typeface="Inter" pitchFamily="34" charset="0"/>
-                <a:ea typeface="Inter" pitchFamily="34" charset="-122"/>
-                <a:cs typeface="Inter" pitchFamily="34" charset="-120"/>
-              </a:rPr>
-              <a:t>▸ Tests come from the spec, not from guesswork — and Haiku does the typing.</a:t>
-            </a:r>
-            <a:endParaRPr lang="en-US" sz="1000" dirty="0"/>
           </a:p>
         </p:txBody>
       </p:sp>
@@ -9704,6 +9476,7 @@
         <a:solidFill>
           <a:srgbClr val="F0EEE6"/>
         </a:solidFill>
+        <a:effectLst/>
       </p:bgPr>
     </p:bg>
     <p:spTree>
@@ -9741,11 +9514,11 @@
           <a:bodyPr wrap="square" lIns="0" tIns="0" rIns="0" bIns="0" rtlCol="0" anchor="ctr"/>
           <a:lstStyle/>
           <a:p>
-            <a:pPr indent="0" marL="0">
-              <a:buNone/>
-            </a:pPr>
-            <a:r>
-              <a:rPr lang="en-US" sz="1100" b="1" spc="200" kern="0" dirty="0">
+            <a:pPr marL="0" indent="0">
+              <a:buNone/>
+            </a:pPr>
+            <a:r>
+              <a:rPr lang="en-US" sz="1100" b="1" kern="0" spc="200" dirty="0">
                 <a:solidFill>
                   <a:srgbClr val="D97757"/>
                 </a:solidFill>
@@ -9780,7 +9553,7 @@
           <a:bodyPr wrap="square" lIns="0" tIns="0" rIns="0" bIns="0" rtlCol="0" anchor="ctr"/>
           <a:lstStyle/>
           <a:p>
-            <a:pPr indent="0" marL="0">
+            <a:pPr marL="0" indent="0">
               <a:buNone/>
             </a:pPr>
             <a:r>
@@ -9800,14 +9573,14 @@
       </p:sp>
       <p:pic>
         <p:nvPicPr>
-          <p:cNvPr id="4" name="Image 0" descr="preencoded.png">    </p:cNvPr>
+          <p:cNvPr id="4" name="Image 0" descr="preencoded.png"/>
           <p:cNvPicPr>
             <a:picLocks noChangeAspect="1"/>
           </p:cNvPicPr>
           <p:nvPr/>
         </p:nvPicPr>
         <p:blipFill>
-          <a:blip r:embed="rId1"/>
+          <a:blip r:embed="rId2"/>
           <a:stretch>
             <a:fillRect/>
           </a:stretch>
@@ -9848,13 +9621,20 @@
             <a:prstDash val="solid"/>
           </a:ln>
           <a:effectLst>
-            <a:outerShdw sx="100000" sy="100000" kx="0" ky="0" algn="bl" rotWithShape="0" blurRad="88900" dist="38100" dir="5400000">
+            <a:outerShdw blurRad="88900" dist="38100" dir="5400000" algn="bl" rotWithShape="0">
               <a:srgbClr val="000000">
                 <a:alpha val="10000"/>
               </a:srgbClr>
             </a:outerShdw>
           </a:effectLst>
         </p:spPr>
+        <p:txBody>
+          <a:bodyPr/>
+          <a:lstStyle/>
+          <a:p>
+            <a:endParaRPr lang="en-US"/>
+          </a:p>
+        </p:txBody>
       </p:sp>
       <p:sp>
         <p:nvSpPr>
@@ -9875,17 +9655,24 @@
           </a:solidFill>
           <a:ln/>
         </p:spPr>
+        <p:txBody>
+          <a:bodyPr/>
+          <a:lstStyle/>
+          <a:p>
+            <a:endParaRPr lang="en-US"/>
+          </a:p>
+        </p:txBody>
       </p:sp>
       <p:pic>
         <p:nvPicPr>
-          <p:cNvPr id="7" name="Image 1" descr="preencoded.png">    </p:cNvPr>
+          <p:cNvPr id="7" name="Image 1" descr="preencoded.png"/>
           <p:cNvPicPr>
             <a:picLocks noChangeAspect="1"/>
           </p:cNvPicPr>
           <p:nvPr/>
         </p:nvPicPr>
         <p:blipFill>
-          <a:blip r:embed="rId2"/>
+          <a:blip r:embed="rId3"/>
           <a:stretch>
             <a:fillRect/>
           </a:stretch>
@@ -9921,7 +9708,7 @@
           <a:bodyPr wrap="square" lIns="0" tIns="0" rIns="0" bIns="0" rtlCol="0" anchor="ctr"/>
           <a:lstStyle/>
           <a:p>
-            <a:pPr algn="ctr" indent="0" marL="0">
+            <a:pPr marL="0" indent="0" algn="ctr">
               <a:buNone/>
             </a:pPr>
             <a:r>
@@ -9960,7 +9747,7 @@
           <a:bodyPr wrap="square" lIns="0" tIns="0" rIns="0" bIns="0" rtlCol="0" anchor="ctr"/>
           <a:lstStyle/>
           <a:p>
-            <a:pPr algn="ctr" indent="0" marL="0">
+            <a:pPr marL="0" indent="0" algn="ctr">
               <a:buNone/>
             </a:pPr>
             <a:r>
@@ -9999,7 +9786,7 @@
           <a:bodyPr wrap="square" lIns="0" tIns="0" rIns="0" bIns="0" rtlCol="0" anchor="ctr"/>
           <a:lstStyle/>
           <a:p>
-            <a:pPr algn="ctr" indent="0" marL="0">
+            <a:pPr marL="0" indent="0" algn="ctr">
               <a:buNone/>
             </a:pPr>
             <a:r>
@@ -10043,13 +9830,20 @@
             <a:prstDash val="solid"/>
           </a:ln>
           <a:effectLst>
-            <a:outerShdw sx="100000" sy="100000" kx="0" ky="0" algn="bl" rotWithShape="0" blurRad="88900" dist="38100" dir="5400000">
+            <a:outerShdw blurRad="88900" dist="38100" dir="5400000" algn="bl" rotWithShape="0">
               <a:srgbClr val="000000">
                 <a:alpha val="10000"/>
               </a:srgbClr>
             </a:outerShdw>
           </a:effectLst>
         </p:spPr>
+        <p:txBody>
+          <a:bodyPr/>
+          <a:lstStyle/>
+          <a:p>
+            <a:endParaRPr lang="en-US"/>
+          </a:p>
+        </p:txBody>
       </p:sp>
       <p:sp>
         <p:nvSpPr>
@@ -10070,17 +9864,24 @@
           </a:solidFill>
           <a:ln/>
         </p:spPr>
+        <p:txBody>
+          <a:bodyPr/>
+          <a:lstStyle/>
+          <a:p>
+            <a:endParaRPr lang="en-US"/>
+          </a:p>
+        </p:txBody>
       </p:sp>
       <p:pic>
         <p:nvPicPr>
-          <p:cNvPr id="13" name="Image 2" descr="preencoded.png">    </p:cNvPr>
+          <p:cNvPr id="13" name="Image 2" descr="preencoded.png"/>
           <p:cNvPicPr>
             <a:picLocks noChangeAspect="1"/>
           </p:cNvPicPr>
           <p:nvPr/>
         </p:nvPicPr>
         <p:blipFill>
-          <a:blip r:embed="rId3"/>
+          <a:blip r:embed="rId4"/>
           <a:stretch>
             <a:fillRect/>
           </a:stretch>
@@ -10116,7 +9917,7 @@
           <a:bodyPr wrap="square" lIns="0" tIns="0" rIns="0" bIns="0" rtlCol="0" anchor="ctr"/>
           <a:lstStyle/>
           <a:p>
-            <a:pPr algn="ctr" indent="0" marL="0">
+            <a:pPr marL="0" indent="0" algn="ctr">
               <a:buNone/>
             </a:pPr>
             <a:r>
@@ -10155,7 +9956,7 @@
           <a:bodyPr wrap="square" lIns="0" tIns="0" rIns="0" bIns="0" rtlCol="0" anchor="ctr"/>
           <a:lstStyle/>
           <a:p>
-            <a:pPr algn="ctr" indent="0" marL="0">
+            <a:pPr marL="0" indent="0" algn="ctr">
               <a:buNone/>
             </a:pPr>
             <a:r>
@@ -10194,7 +9995,7 @@
           <a:bodyPr wrap="square" lIns="0" tIns="0" rIns="0" bIns="0" rtlCol="0" anchor="ctr"/>
           <a:lstStyle/>
           <a:p>
-            <a:pPr algn="ctr" indent="0" marL="0">
+            <a:pPr marL="0" indent="0" algn="ctr">
               <a:buNone/>
             </a:pPr>
             <a:r>
@@ -10238,13 +10039,20 @@
             <a:prstDash val="solid"/>
           </a:ln>
           <a:effectLst>
-            <a:outerShdw sx="100000" sy="100000" kx="0" ky="0" algn="bl" rotWithShape="0" blurRad="88900" dist="38100" dir="5400000">
+            <a:outerShdw blurRad="88900" dist="38100" dir="5400000" algn="bl" rotWithShape="0">
               <a:srgbClr val="000000">
                 <a:alpha val="10000"/>
               </a:srgbClr>
             </a:outerShdw>
           </a:effectLst>
         </p:spPr>
+        <p:txBody>
+          <a:bodyPr/>
+          <a:lstStyle/>
+          <a:p>
+            <a:endParaRPr lang="en-US"/>
+          </a:p>
+        </p:txBody>
       </p:sp>
       <p:sp>
         <p:nvSpPr>
@@ -10265,17 +10073,24 @@
           </a:solidFill>
           <a:ln/>
         </p:spPr>
+        <p:txBody>
+          <a:bodyPr/>
+          <a:lstStyle/>
+          <a:p>
+            <a:endParaRPr lang="en-US"/>
+          </a:p>
+        </p:txBody>
       </p:sp>
       <p:pic>
         <p:nvPicPr>
-          <p:cNvPr id="19" name="Image 3" descr="preencoded.png">    </p:cNvPr>
+          <p:cNvPr id="19" name="Image 3" descr="preencoded.png"/>
           <p:cNvPicPr>
             <a:picLocks noChangeAspect="1"/>
           </p:cNvPicPr>
           <p:nvPr/>
         </p:nvPicPr>
         <p:blipFill>
-          <a:blip r:embed="rId4"/>
+          <a:blip r:embed="rId5"/>
           <a:stretch>
             <a:fillRect/>
           </a:stretch>
@@ -10311,7 +10126,7 @@
           <a:bodyPr wrap="square" lIns="0" tIns="0" rIns="0" bIns="0" rtlCol="0" anchor="ctr"/>
           <a:lstStyle/>
           <a:p>
-            <a:pPr algn="ctr" indent="0" marL="0">
+            <a:pPr marL="0" indent="0" algn="ctr">
               <a:buNone/>
             </a:pPr>
             <a:r>
@@ -10350,7 +10165,7 @@
           <a:bodyPr wrap="square" lIns="0" tIns="0" rIns="0" bIns="0" rtlCol="0" anchor="ctr"/>
           <a:lstStyle/>
           <a:p>
-            <a:pPr algn="ctr" indent="0" marL="0">
+            <a:pPr marL="0" indent="0" algn="ctr">
               <a:buNone/>
             </a:pPr>
             <a:r>
@@ -10389,7 +10204,7 @@
           <a:bodyPr wrap="square" lIns="0" tIns="0" rIns="0" bIns="0" rtlCol="0" anchor="ctr"/>
           <a:lstStyle/>
           <a:p>
-            <a:pPr algn="ctr" indent="0" marL="0">
+            <a:pPr marL="0" indent="0" algn="ctr">
               <a:buNone/>
             </a:pPr>
             <a:r>
@@ -10433,13 +10248,20 @@
             <a:prstDash val="solid"/>
           </a:ln>
           <a:effectLst>
-            <a:outerShdw sx="100000" sy="100000" kx="0" ky="0" algn="bl" rotWithShape="0" blurRad="88900" dist="38100" dir="5400000">
+            <a:outerShdw blurRad="88900" dist="38100" dir="5400000" algn="bl" rotWithShape="0">
               <a:srgbClr val="000000">
                 <a:alpha val="10000"/>
               </a:srgbClr>
             </a:outerShdw>
           </a:effectLst>
         </p:spPr>
+        <p:txBody>
+          <a:bodyPr/>
+          <a:lstStyle/>
+          <a:p>
+            <a:endParaRPr lang="en-US"/>
+          </a:p>
+        </p:txBody>
       </p:sp>
       <p:sp>
         <p:nvSpPr>
@@ -10460,17 +10282,24 @@
           </a:solidFill>
           <a:ln/>
         </p:spPr>
+        <p:txBody>
+          <a:bodyPr/>
+          <a:lstStyle/>
+          <a:p>
+            <a:endParaRPr lang="en-US"/>
+          </a:p>
+        </p:txBody>
       </p:sp>
       <p:pic>
         <p:nvPicPr>
-          <p:cNvPr id="25" name="Image 4" descr="preencoded.png">    </p:cNvPr>
+          <p:cNvPr id="25" name="Image 4" descr="preencoded.png"/>
           <p:cNvPicPr>
             <a:picLocks noChangeAspect="1"/>
           </p:cNvPicPr>
           <p:nvPr/>
         </p:nvPicPr>
         <p:blipFill>
-          <a:blip r:embed="rId5"/>
+          <a:blip r:embed="rId6"/>
           <a:stretch>
             <a:fillRect/>
           </a:stretch>
@@ -10506,7 +10335,7 @@
           <a:bodyPr wrap="square" lIns="0" tIns="0" rIns="0" bIns="0" rtlCol="0" anchor="ctr"/>
           <a:lstStyle/>
           <a:p>
-            <a:pPr algn="ctr" indent="0" marL="0">
+            <a:pPr marL="0" indent="0" algn="ctr">
               <a:buNone/>
             </a:pPr>
             <a:r>
@@ -10545,7 +10374,7 @@
           <a:bodyPr wrap="square" lIns="0" tIns="0" rIns="0" bIns="0" rtlCol="0" anchor="ctr"/>
           <a:lstStyle/>
           <a:p>
-            <a:pPr algn="ctr" indent="0" marL="0">
+            <a:pPr marL="0" indent="0" algn="ctr">
               <a:buNone/>
             </a:pPr>
             <a:r>
@@ -10584,6 +10413,13 @@
           </a:solidFill>
           <a:ln/>
         </p:spPr>
+        <p:txBody>
+          <a:bodyPr/>
+          <a:lstStyle/>
+          <a:p>
+            <a:endParaRPr lang="en-US"/>
+          </a:p>
+        </p:txBody>
       </p:sp>
       <p:sp>
         <p:nvSpPr>
@@ -10606,7 +10442,7 @@
           <a:bodyPr wrap="square" lIns="0" tIns="0" rIns="0" bIns="0" rtlCol="0" anchor="ctr"/>
           <a:lstStyle/>
           <a:p>
-            <a:pPr indent="0" marL="0">
+            <a:pPr marL="0" indent="0">
               <a:buNone/>
             </a:pPr>
             <a:r>
@@ -10620,9 +10456,6 @@
               </a:rPr>
               <a:t>Fix the source, </a:t>
             </a:r>
-            <a:pPr indent="0" marL="0">
-              <a:buNone/>
-            </a:pPr>
             <a:r>
               <a:rPr lang="en-US" sz="1350" dirty="0">
                 <a:solidFill>
@@ -10659,6 +10492,13 @@
           </a:solidFill>
           <a:ln/>
         </p:spPr>
+        <p:txBody>
+          <a:bodyPr/>
+          <a:lstStyle/>
+          <a:p>
+            <a:endParaRPr lang="en-US"/>
+          </a:p>
+        </p:txBody>
       </p:sp>
       <p:sp>
         <p:nvSpPr>
@@ -10681,7 +10521,7 @@
           <a:bodyPr wrap="square" lIns="0" tIns="0" rIns="0" bIns="0" rtlCol="0" anchor="ctr"/>
           <a:lstStyle/>
           <a:p>
-            <a:pPr indent="0" marL="0">
+            <a:pPr marL="0" indent="0">
               <a:buNone/>
             </a:pPr>
             <a:r>
@@ -10695,9 +10535,6 @@
               </a:rPr>
               <a:t>Reproduce </a:t>
             </a:r>
-            <a:pPr indent="0" marL="0">
-              <a:buNone/>
-            </a:pPr>
             <a:r>
               <a:rPr lang="en-US" sz="1350" dirty="0">
                 <a:solidFill>
@@ -10734,7 +10571,7 @@
           <a:bodyPr wrap="square" rtlCol="0" anchor="ctr"/>
           <a:lstStyle/>
           <a:p>
-            <a:pPr indent="0" marL="0">
+            <a:pPr marL="0" indent="0">
               <a:buNone/>
             </a:pPr>
             <a:r>
@@ -10773,7 +10610,7 @@
           <a:bodyPr wrap="square" rtlCol="0" anchor="ctr"/>
           <a:lstStyle/>
           <a:p>
-            <a:pPr algn="r" indent="0" marL="0">
+            <a:pPr marL="0" indent="0" algn="r">
               <a:buNone/>
             </a:pPr>
             <a:r>
@@ -10788,45 +10625,6 @@
               <a:t>Section 4  ·  7/14</a:t>
             </a:r>
             <a:endParaRPr lang="en-US" sz="900" dirty="0"/>
-          </a:p>
-        </p:txBody>
-      </p:sp>
-      <p:sp>
-        <p:nvSpPr>
-          <p:cNvPr id="34" name="Text 27"/>
-          <p:cNvSpPr/>
-          <p:nvPr/>
-        </p:nvSpPr>
-        <p:spPr>
-          <a:xfrm>
-            <a:off x="548640" y="4462272"/>
-            <a:ext cx="8046720" cy="274320"/>
-          </a:xfrm>
-          <a:prstGeom prst="rect">
-            <a:avLst/>
-          </a:prstGeom>
-          <a:noFill/>
-          <a:ln/>
-        </p:spPr>
-        <p:txBody>
-          <a:bodyPr wrap="square" lIns="0" tIns="0" rIns="0" bIns="0" rtlCol="0" anchor="ctr"/>
-          <a:lstStyle/>
-          <a:p>
-            <a:pPr indent="0" marL="0">
-              <a:buNone/>
-            </a:pPr>
-            <a:r>
-              <a:rPr lang="en-US" sz="1000" i="1" dirty="0">
-                <a:solidFill>
-                  <a:srgbClr val="615C52"/>
-                </a:solidFill>
-                <a:latin typeface="Inter" pitchFamily="34" charset="0"/>
-                <a:ea typeface="Inter" pitchFamily="34" charset="-122"/>
-                <a:cs typeface="Inter" pitchFamily="34" charset="-120"/>
-              </a:rPr>
-              <a:t>▸ Grounding again — read the code first, reproduce, then fix the real cause.</a:t>
-            </a:r>
-            <a:endParaRPr lang="en-US" sz="1000" dirty="0"/>
           </a:p>
         </p:txBody>
       </p:sp>
@@ -10846,6 +10644,7 @@
         <a:solidFill>
           <a:srgbClr val="F0EEE6"/>
         </a:solidFill>
+        <a:effectLst/>
       </p:bgPr>
     </p:bg>
     <p:spTree>
@@ -10883,11 +10682,11 @@
           <a:bodyPr wrap="square" lIns="0" tIns="0" rIns="0" bIns="0" rtlCol="0" anchor="ctr"/>
           <a:lstStyle/>
           <a:p>
-            <a:pPr indent="0" marL="0">
-              <a:buNone/>
-            </a:pPr>
-            <a:r>
-              <a:rPr lang="en-US" sz="1100" b="1" spc="200" kern="0" dirty="0">
+            <a:pPr marL="0" indent="0">
+              <a:buNone/>
+            </a:pPr>
+            <a:r>
+              <a:rPr lang="en-US" sz="1100" b="1" kern="0" spc="200" dirty="0">
                 <a:solidFill>
                   <a:srgbClr val="D97757"/>
                 </a:solidFill>
@@ -10922,7 +10721,7 @@
           <a:bodyPr wrap="square" lIns="0" tIns="0" rIns="0" bIns="0" rtlCol="0" anchor="ctr"/>
           <a:lstStyle/>
           <a:p>
-            <a:pPr indent="0" marL="0">
+            <a:pPr marL="0" indent="0">
               <a:buNone/>
             </a:pPr>
             <a:r>
@@ -10942,80 +10741,7 @@
       </p:sp>
       <p:pic>
         <p:nvPicPr>
-          <p:cNvPr id="4" name="Image 0" descr="preencoded.png">    </p:cNvPr>
-          <p:cNvPicPr>
-            <a:picLocks noChangeAspect="1"/>
-          </p:cNvPicPr>
-          <p:nvPr/>
-        </p:nvPicPr>
-        <p:blipFill>
-          <a:blip r:embed="rId1"/>
-          <a:stretch>
-            <a:fillRect/>
-          </a:stretch>
-        </p:blipFill>
-        <p:spPr>
-          <a:xfrm>
-            <a:off x="8321040" y="411480"/>
-            <a:ext cx="347472" cy="292608"/>
-          </a:xfrm>
-          <a:prstGeom prst="rect">
-            <a:avLst/>
-          </a:prstGeom>
-        </p:spPr>
-      </p:pic>
-      <p:sp>
-        <p:nvSpPr>
-          <p:cNvPr id="5" name="Shape 2"/>
-          <p:cNvSpPr/>
-          <p:nvPr/>
-        </p:nvSpPr>
-        <p:spPr>
-          <a:xfrm>
-            <a:off x="548640" y="1554480"/>
-            <a:ext cx="8046720" cy="1188720"/>
-          </a:xfrm>
-          <a:prstGeom prst="roundRect">
-            <a:avLst>
-              <a:gd name="adj" fmla="val 9231"/>
-            </a:avLst>
-          </a:prstGeom>
-          <a:solidFill>
-            <a:srgbClr val="F4E4DC"/>
-          </a:solidFill>
-          <a:ln/>
-          <a:effectLst>
-            <a:outerShdw sx="100000" sy="100000" kx="0" ky="0" algn="bl" rotWithShape="0" blurRad="88900" dist="38100" dir="5400000">
-              <a:srgbClr val="000000">
-                <a:alpha val="10000"/>
-              </a:srgbClr>
-            </a:outerShdw>
-          </a:effectLst>
-        </p:spPr>
-      </p:sp>
-      <p:sp>
-        <p:nvSpPr>
-          <p:cNvPr id="6" name="Shape 3"/>
-          <p:cNvSpPr/>
-          <p:nvPr/>
-        </p:nvSpPr>
-        <p:spPr>
-          <a:xfrm>
-            <a:off x="868680" y="1901952"/>
-            <a:ext cx="502920" cy="502920"/>
-          </a:xfrm>
-          <a:prstGeom prst="ellipse">
-            <a:avLst/>
-          </a:prstGeom>
-          <a:solidFill>
-            <a:srgbClr val="D97757"/>
-          </a:solidFill>
-          <a:ln/>
-        </p:spPr>
-      </p:sp>
-      <p:pic>
-        <p:nvPicPr>
-          <p:cNvPr id="7" name="Image 1" descr="preencoded.png">    </p:cNvPr>
+          <p:cNvPr id="4" name="Image 0" descr="preencoded.png"/>
           <p:cNvPicPr>
             <a:picLocks noChangeAspect="1"/>
           </p:cNvPicPr>
@@ -11029,6 +10755,93 @@
         </p:blipFill>
         <p:spPr>
           <a:xfrm>
+            <a:off x="8321040" y="411480"/>
+            <a:ext cx="347472" cy="292608"/>
+          </a:xfrm>
+          <a:prstGeom prst="rect">
+            <a:avLst/>
+          </a:prstGeom>
+        </p:spPr>
+      </p:pic>
+      <p:sp>
+        <p:nvSpPr>
+          <p:cNvPr id="5" name="Shape 2"/>
+          <p:cNvSpPr/>
+          <p:nvPr/>
+        </p:nvSpPr>
+        <p:spPr>
+          <a:xfrm>
+            <a:off x="548640" y="1554480"/>
+            <a:ext cx="8046720" cy="1188720"/>
+          </a:xfrm>
+          <a:prstGeom prst="roundRect">
+            <a:avLst>
+              <a:gd name="adj" fmla="val 9231"/>
+            </a:avLst>
+          </a:prstGeom>
+          <a:solidFill>
+            <a:srgbClr val="F4E4DC"/>
+          </a:solidFill>
+          <a:ln/>
+          <a:effectLst>
+            <a:outerShdw blurRad="88900" dist="38100" dir="5400000" algn="bl" rotWithShape="0">
+              <a:srgbClr val="000000">
+                <a:alpha val="10000"/>
+              </a:srgbClr>
+            </a:outerShdw>
+          </a:effectLst>
+        </p:spPr>
+        <p:txBody>
+          <a:bodyPr/>
+          <a:lstStyle/>
+          <a:p>
+            <a:endParaRPr lang="en-US"/>
+          </a:p>
+        </p:txBody>
+      </p:sp>
+      <p:sp>
+        <p:nvSpPr>
+          <p:cNvPr id="6" name="Shape 3"/>
+          <p:cNvSpPr/>
+          <p:nvPr/>
+        </p:nvSpPr>
+        <p:spPr>
+          <a:xfrm>
+            <a:off x="868680" y="1901952"/>
+            <a:ext cx="502920" cy="502920"/>
+          </a:xfrm>
+          <a:prstGeom prst="ellipse">
+            <a:avLst/>
+          </a:prstGeom>
+          <a:solidFill>
+            <a:srgbClr val="D97757"/>
+          </a:solidFill>
+          <a:ln/>
+        </p:spPr>
+        <p:txBody>
+          <a:bodyPr/>
+          <a:lstStyle/>
+          <a:p>
+            <a:endParaRPr lang="en-US"/>
+          </a:p>
+        </p:txBody>
+      </p:sp>
+      <p:pic>
+        <p:nvPicPr>
+          <p:cNvPr id="7" name="Image 1" descr="preencoded.png"/>
+          <p:cNvPicPr>
+            <a:picLocks noChangeAspect="1"/>
+          </p:cNvPicPr>
+          <p:nvPr/>
+        </p:nvPicPr>
+        <p:blipFill>
+          <a:blip r:embed="rId3"/>
+          <a:stretch>
+            <a:fillRect/>
+          </a:stretch>
+        </p:blipFill>
+        <p:spPr>
+          <a:xfrm>
             <a:off x="999439" y="2032711"/>
             <a:ext cx="241402" cy="241402"/>
           </a:xfrm>
@@ -11058,7 +10871,7 @@
           <a:bodyPr wrap="square" lIns="0" tIns="0" rIns="0" bIns="0" rtlCol="0" anchor="ctr"/>
           <a:lstStyle/>
           <a:p>
-            <a:pPr indent="0" marL="0">
+            <a:pPr marL="0" indent="0">
               <a:buNone/>
             </a:pPr>
             <a:r>
@@ -11072,9 +10885,6 @@
               </a:rPr>
               <a:t>The PostToolUse build / test hook </a:t>
             </a:r>
-            <a:pPr indent="0" marL="0">
-              <a:buNone/>
-            </a:pPr>
             <a:r>
               <a:rPr lang="en-US" sz="1800" dirty="0">
                 <a:solidFill>
@@ -11116,13 +10926,20 @@
             <a:prstDash val="solid"/>
           </a:ln>
           <a:effectLst>
-            <a:outerShdw sx="100000" sy="100000" kx="0" ky="0" algn="bl" rotWithShape="0" blurRad="88900" dist="38100" dir="5400000">
+            <a:outerShdw blurRad="88900" dist="38100" dir="5400000" algn="bl" rotWithShape="0">
               <a:srgbClr val="000000">
                 <a:alpha val="10000"/>
               </a:srgbClr>
             </a:outerShdw>
           </a:effectLst>
         </p:spPr>
+        <p:txBody>
+          <a:bodyPr/>
+          <a:lstStyle/>
+          <a:p>
+            <a:endParaRPr lang="en-US"/>
+          </a:p>
+        </p:txBody>
       </p:sp>
       <p:sp>
         <p:nvSpPr>
@@ -11143,17 +10960,24 @@
           </a:solidFill>
           <a:ln/>
         </p:spPr>
+        <p:txBody>
+          <a:bodyPr/>
+          <a:lstStyle/>
+          <a:p>
+            <a:endParaRPr lang="en-US"/>
+          </a:p>
+        </p:txBody>
       </p:sp>
       <p:pic>
         <p:nvPicPr>
-          <p:cNvPr id="11" name="Image 2" descr="preencoded.png">    </p:cNvPr>
+          <p:cNvPr id="11" name="Image 2" descr="preencoded.png"/>
           <p:cNvPicPr>
             <a:picLocks noChangeAspect="1"/>
           </p:cNvPicPr>
           <p:nvPr/>
         </p:nvPicPr>
         <p:blipFill>
-          <a:blip r:embed="rId3"/>
+          <a:blip r:embed="rId4"/>
           <a:stretch>
             <a:fillRect/>
           </a:stretch>
@@ -11189,7 +11013,7 @@
           <a:bodyPr wrap="square" lIns="0" tIns="0" rIns="0" bIns="0" rtlCol="0" anchor="ctr"/>
           <a:lstStyle/>
           <a:p>
-            <a:pPr indent="0" marL="0">
+            <a:pPr marL="0" indent="0">
               <a:buNone/>
             </a:pPr>
             <a:r>
@@ -11228,7 +11052,7 @@
           <a:bodyPr wrap="square" lIns="0" tIns="0" rIns="0" bIns="0" rtlCol="0" anchor="ctr"/>
           <a:lstStyle/>
           <a:p>
-            <a:pPr algn="ctr" indent="0" marL="0">
+            <a:pPr marL="0" indent="0" algn="ctr">
               <a:buNone/>
             </a:pPr>
             <a:r>
@@ -11272,13 +11096,20 @@
             <a:prstDash val="solid"/>
           </a:ln>
           <a:effectLst>
-            <a:outerShdw sx="100000" sy="100000" kx="0" ky="0" algn="bl" rotWithShape="0" blurRad="88900" dist="38100" dir="5400000">
+            <a:outerShdw blurRad="88900" dist="38100" dir="5400000" algn="bl" rotWithShape="0">
               <a:srgbClr val="000000">
                 <a:alpha val="10000"/>
               </a:srgbClr>
             </a:outerShdw>
           </a:effectLst>
         </p:spPr>
+        <p:txBody>
+          <a:bodyPr/>
+          <a:lstStyle/>
+          <a:p>
+            <a:endParaRPr lang="en-US"/>
+          </a:p>
+        </p:txBody>
       </p:sp>
       <p:sp>
         <p:nvSpPr>
@@ -11299,17 +11130,24 @@
           </a:solidFill>
           <a:ln/>
         </p:spPr>
+        <p:txBody>
+          <a:bodyPr/>
+          <a:lstStyle/>
+          <a:p>
+            <a:endParaRPr lang="en-US"/>
+          </a:p>
+        </p:txBody>
       </p:sp>
       <p:pic>
         <p:nvPicPr>
-          <p:cNvPr id="16" name="Image 3" descr="preencoded.png">    </p:cNvPr>
+          <p:cNvPr id="16" name="Image 3" descr="preencoded.png"/>
           <p:cNvPicPr>
             <a:picLocks noChangeAspect="1"/>
           </p:cNvPicPr>
           <p:nvPr/>
         </p:nvPicPr>
         <p:blipFill>
-          <a:blip r:embed="rId4"/>
+          <a:blip r:embed="rId3"/>
           <a:stretch>
             <a:fillRect/>
           </a:stretch>
@@ -11345,7 +11183,7 @@
           <a:bodyPr wrap="square" lIns="0" tIns="0" rIns="0" bIns="0" rtlCol="0" anchor="ctr"/>
           <a:lstStyle/>
           <a:p>
-            <a:pPr indent="0" marL="0">
+            <a:pPr marL="0" indent="0">
               <a:buNone/>
             </a:pPr>
             <a:r>
@@ -11384,7 +11222,7 @@
           <a:bodyPr wrap="square" lIns="0" tIns="0" rIns="0" bIns="0" rtlCol="0" anchor="ctr"/>
           <a:lstStyle/>
           <a:p>
-            <a:pPr algn="ctr" indent="0" marL="0">
+            <a:pPr marL="0" indent="0" algn="ctr">
               <a:buNone/>
             </a:pPr>
             <a:r>
@@ -11428,13 +11266,20 @@
             <a:prstDash val="solid"/>
           </a:ln>
           <a:effectLst>
-            <a:outerShdw sx="100000" sy="100000" kx="0" ky="0" algn="bl" rotWithShape="0" blurRad="88900" dist="38100" dir="5400000">
+            <a:outerShdw blurRad="88900" dist="38100" dir="5400000" algn="bl" rotWithShape="0">
               <a:srgbClr val="000000">
                 <a:alpha val="10000"/>
               </a:srgbClr>
             </a:outerShdw>
           </a:effectLst>
         </p:spPr>
+        <p:txBody>
+          <a:bodyPr/>
+          <a:lstStyle/>
+          <a:p>
+            <a:endParaRPr lang="en-US"/>
+          </a:p>
+        </p:txBody>
       </p:sp>
       <p:sp>
         <p:nvSpPr>
@@ -11455,10 +11300,17 @@
           </a:solidFill>
           <a:ln/>
         </p:spPr>
+        <p:txBody>
+          <a:bodyPr/>
+          <a:lstStyle/>
+          <a:p>
+            <a:endParaRPr lang="en-US"/>
+          </a:p>
+        </p:txBody>
       </p:sp>
       <p:pic>
         <p:nvPicPr>
-          <p:cNvPr id="21" name="Image 4" descr="preencoded.png">    </p:cNvPr>
+          <p:cNvPr id="21" name="Image 4" descr="preencoded.png"/>
           <p:cNvPicPr>
             <a:picLocks noChangeAspect="1"/>
           </p:cNvPicPr>
@@ -11501,7 +11353,7 @@
           <a:bodyPr wrap="square" lIns="0" tIns="0" rIns="0" bIns="0" rtlCol="0" anchor="ctr"/>
           <a:lstStyle/>
           <a:p>
-            <a:pPr indent="0" marL="0">
+            <a:pPr marL="0" indent="0">
               <a:buNone/>
             </a:pPr>
             <a:r>
@@ -11540,7 +11392,7 @@
           <a:bodyPr wrap="square" lIns="0" tIns="0" rIns="0" bIns="0" rtlCol="0" anchor="ctr"/>
           <a:lstStyle/>
           <a:p>
-            <a:pPr algn="ctr" indent="0" marL="0">
+            <a:pPr marL="0" indent="0" algn="ctr">
               <a:buNone/>
             </a:pPr>
             <a:r>
@@ -11584,13 +11436,20 @@
             <a:prstDash val="solid"/>
           </a:ln>
           <a:effectLst>
-            <a:outerShdw sx="100000" sy="100000" kx="0" ky="0" algn="bl" rotWithShape="0" blurRad="88900" dist="38100" dir="5400000">
+            <a:outerShdw blurRad="88900" dist="38100" dir="5400000" algn="bl" rotWithShape="0">
               <a:srgbClr val="000000">
                 <a:alpha val="10000"/>
               </a:srgbClr>
             </a:outerShdw>
           </a:effectLst>
         </p:spPr>
+        <p:txBody>
+          <a:bodyPr/>
+          <a:lstStyle/>
+          <a:p>
+            <a:endParaRPr lang="en-US"/>
+          </a:p>
+        </p:txBody>
       </p:sp>
       <p:sp>
         <p:nvSpPr>
@@ -11611,10 +11470,17 @@
           </a:solidFill>
           <a:ln/>
         </p:spPr>
+        <p:txBody>
+          <a:bodyPr/>
+          <a:lstStyle/>
+          <a:p>
+            <a:endParaRPr lang="en-US"/>
+          </a:p>
+        </p:txBody>
       </p:sp>
       <p:pic>
         <p:nvPicPr>
-          <p:cNvPr id="26" name="Image 5" descr="preencoded.png">    </p:cNvPr>
+          <p:cNvPr id="26" name="Image 5" descr="preencoded.png"/>
           <p:cNvPicPr>
             <a:picLocks noChangeAspect="1"/>
           </p:cNvPicPr>
@@ -11657,7 +11523,7 @@
           <a:bodyPr wrap="square" lIns="0" tIns="0" rIns="0" bIns="0" rtlCol="0" anchor="ctr"/>
           <a:lstStyle/>
           <a:p>
-            <a:pPr indent="0" marL="0">
+            <a:pPr marL="0" indent="0">
               <a:buNone/>
             </a:pPr>
             <a:r>
@@ -11696,7 +11562,7 @@
           <a:bodyPr wrap="square" rtlCol="0" anchor="ctr"/>
           <a:lstStyle/>
           <a:p>
-            <a:pPr indent="0" marL="0">
+            <a:pPr marL="0" indent="0">
               <a:buNone/>
             </a:pPr>
             <a:r>
@@ -11735,7 +11601,7 @@
           <a:bodyPr wrap="square" rtlCol="0" anchor="ctr"/>
           <a:lstStyle/>
           <a:p>
-            <a:pPr algn="r" indent="0" marL="0">
+            <a:pPr marL="0" indent="0" algn="r">
               <a:buNone/>
             </a:pPr>
             <a:r>
@@ -11750,45 +11616,6 @@
               <a:t>Section 4  ·  8/14</a:t>
             </a:r>
             <a:endParaRPr lang="en-US" sz="900" dirty="0"/>
-          </a:p>
-        </p:txBody>
-      </p:sp>
-      <p:sp>
-        <p:nvSpPr>
-          <p:cNvPr id="30" name="Text 22"/>
-          <p:cNvSpPr/>
-          <p:nvPr/>
-        </p:nvSpPr>
-        <p:spPr>
-          <a:xfrm>
-            <a:off x="548640" y="4462272"/>
-            <a:ext cx="8046720" cy="274320"/>
-          </a:xfrm>
-          <a:prstGeom prst="rect">
-            <a:avLst/>
-          </a:prstGeom>
-          <a:noFill/>
-          <a:ln/>
-        </p:spPr>
-        <p:txBody>
-          <a:bodyPr wrap="square" lIns="0" tIns="0" rIns="0" bIns="0" rtlCol="0" anchor="ctr"/>
-          <a:lstStyle/>
-          <a:p>
-            <a:pPr indent="0" marL="0">
-              <a:buNone/>
-            </a:pPr>
-            <a:r>
-              <a:rPr lang="en-US" sz="1000" i="1" dirty="0">
-                <a:solidFill>
-                  <a:srgbClr val="615C52"/>
-                </a:solidFill>
-                <a:latin typeface="Inter" pitchFamily="34" charset="0"/>
-                <a:ea typeface="Inter" pitchFamily="34" charset="-122"/>
-                <a:cs typeface="Inter" pitchFamily="34" charset="-120"/>
-              </a:rPr>
-              <a:t>▸ The hook closes the loop: failures arrive on their own, fixes begin immediately.</a:t>
-            </a:r>
-            <a:endParaRPr lang="en-US" sz="1000" dirty="0"/>
           </a:p>
         </p:txBody>
       </p:sp>
@@ -11808,6 +11635,7 @@
         <a:solidFill>
           <a:srgbClr val="F0EEE6"/>
         </a:solidFill>
+        <a:effectLst/>
       </p:bgPr>
     </p:bg>
     <p:spTree>
@@ -11845,11 +11673,11 @@
           <a:bodyPr wrap="square" lIns="0" tIns="0" rIns="0" bIns="0" rtlCol="0" anchor="ctr"/>
           <a:lstStyle/>
           <a:p>
-            <a:pPr indent="0" marL="0">
-              <a:buNone/>
-            </a:pPr>
-            <a:r>
-              <a:rPr lang="en-US" sz="1100" b="1" spc="200" kern="0" dirty="0">
+            <a:pPr marL="0" indent="0">
+              <a:buNone/>
+            </a:pPr>
+            <a:r>
+              <a:rPr lang="en-US" sz="1100" b="1" kern="0" spc="200" dirty="0">
                 <a:solidFill>
                   <a:srgbClr val="D97757"/>
                 </a:solidFill>
@@ -11884,7 +11712,7 @@
           <a:bodyPr wrap="square" lIns="0" tIns="0" rIns="0" bIns="0" rtlCol="0" anchor="ctr"/>
           <a:lstStyle/>
           <a:p>
-            <a:pPr indent="0" marL="0">
+            <a:pPr marL="0" indent="0">
               <a:buNone/>
             </a:pPr>
             <a:r>
@@ -11904,14 +11732,14 @@
       </p:sp>
       <p:pic>
         <p:nvPicPr>
-          <p:cNvPr id="4" name="Image 0" descr="preencoded.png">    </p:cNvPr>
+          <p:cNvPr id="4" name="Image 0" descr="preencoded.png"/>
           <p:cNvPicPr>
             <a:picLocks noChangeAspect="1"/>
           </p:cNvPicPr>
           <p:nvPr/>
         </p:nvPicPr>
         <p:blipFill>
-          <a:blip r:embed="rId1"/>
+          <a:blip r:embed="rId2"/>
           <a:stretch>
             <a:fillRect/>
           </a:stretch>
@@ -11952,6 +11780,13 @@
             <a:prstDash val="solid"/>
           </a:ln>
         </p:spPr>
+        <p:txBody>
+          <a:bodyPr/>
+          <a:lstStyle/>
+          <a:p>
+            <a:endParaRPr lang="en-US"/>
+          </a:p>
+        </p:txBody>
       </p:sp>
       <p:sp>
         <p:nvSpPr>
@@ -11972,17 +11807,24 @@
           </a:solidFill>
           <a:ln/>
         </p:spPr>
+        <p:txBody>
+          <a:bodyPr/>
+          <a:lstStyle/>
+          <a:p>
+            <a:endParaRPr lang="en-US"/>
+          </a:p>
+        </p:txBody>
       </p:sp>
       <p:pic>
         <p:nvPicPr>
-          <p:cNvPr id="7" name="Image 1" descr="preencoded.png">    </p:cNvPr>
+          <p:cNvPr id="7" name="Image 1" descr="preencoded.png"/>
           <p:cNvPicPr>
             <a:picLocks noChangeAspect="1"/>
           </p:cNvPicPr>
           <p:nvPr/>
         </p:nvPicPr>
         <p:blipFill>
-          <a:blip r:embed="rId2"/>
+          <a:blip r:embed="rId3"/>
           <a:stretch>
             <a:fillRect/>
           </a:stretch>
@@ -12018,7 +11860,7 @@
           <a:bodyPr wrap="square" lIns="0" tIns="0" rIns="0" bIns="0" rtlCol="0" anchor="ctr"/>
           <a:lstStyle/>
           <a:p>
-            <a:pPr indent="0" marL="0">
+            <a:pPr marL="0" indent="0">
               <a:buNone/>
             </a:pPr>
             <a:r>
@@ -12062,6 +11904,13 @@
             <a:prstDash val="solid"/>
           </a:ln>
         </p:spPr>
+        <p:txBody>
+          <a:bodyPr/>
+          <a:lstStyle/>
+          <a:p>
+            <a:endParaRPr lang="en-US"/>
+          </a:p>
+        </p:txBody>
       </p:sp>
       <p:sp>
         <p:nvSpPr>
@@ -12082,10 +11931,17 @@
           </a:solidFill>
           <a:ln/>
         </p:spPr>
+        <p:txBody>
+          <a:bodyPr/>
+          <a:lstStyle/>
+          <a:p>
+            <a:endParaRPr lang="en-US"/>
+          </a:p>
+        </p:txBody>
       </p:sp>
       <p:pic>
         <p:nvPicPr>
-          <p:cNvPr id="11" name="Image 2" descr="preencoded.png">    </p:cNvPr>
+          <p:cNvPr id="11" name="Image 2" descr="preencoded.png"/>
           <p:cNvPicPr>
             <a:picLocks noChangeAspect="1"/>
           </p:cNvPicPr>
@@ -12128,7 +11984,7 @@
           <a:bodyPr wrap="square" lIns="0" tIns="0" rIns="0" bIns="0" rtlCol="0" anchor="ctr"/>
           <a:lstStyle/>
           <a:p>
-            <a:pPr indent="0" marL="0">
+            <a:pPr marL="0" indent="0">
               <a:buNone/>
             </a:pPr>
             <a:r>
@@ -12172,6 +12028,13 @@
             <a:prstDash val="solid"/>
           </a:ln>
         </p:spPr>
+        <p:txBody>
+          <a:bodyPr/>
+          <a:lstStyle/>
+          <a:p>
+            <a:endParaRPr lang="en-US"/>
+          </a:p>
+        </p:txBody>
       </p:sp>
       <p:sp>
         <p:nvSpPr>
@@ -12192,17 +12055,24 @@
           </a:solidFill>
           <a:ln/>
         </p:spPr>
+        <p:txBody>
+          <a:bodyPr/>
+          <a:lstStyle/>
+          <a:p>
+            <a:endParaRPr lang="en-US"/>
+          </a:p>
+        </p:txBody>
       </p:sp>
       <p:pic>
         <p:nvPicPr>
-          <p:cNvPr id="15" name="Image 3" descr="preencoded.png">    </p:cNvPr>
+          <p:cNvPr id="15" name="Image 3" descr="preencoded.png"/>
           <p:cNvPicPr>
             <a:picLocks noChangeAspect="1"/>
           </p:cNvPicPr>
           <p:nvPr/>
         </p:nvPicPr>
         <p:blipFill>
-          <a:blip r:embed="rId4"/>
+          <a:blip r:embed="rId3"/>
           <a:stretch>
             <a:fillRect/>
           </a:stretch>
@@ -12238,7 +12108,7 @@
           <a:bodyPr wrap="square" lIns="0" tIns="0" rIns="0" bIns="0" rtlCol="0" anchor="ctr"/>
           <a:lstStyle/>
           <a:p>
-            <a:pPr indent="0" marL="0">
+            <a:pPr marL="0" indent="0">
               <a:buNone/>
             </a:pPr>
             <a:r>
@@ -12282,6 +12152,13 @@
             <a:prstDash val="solid"/>
           </a:ln>
         </p:spPr>
+        <p:txBody>
+          <a:bodyPr/>
+          <a:lstStyle/>
+          <a:p>
+            <a:endParaRPr lang="en-US"/>
+          </a:p>
+        </p:txBody>
       </p:sp>
       <p:sp>
         <p:nvSpPr>
@@ -12302,17 +12179,24 @@
           </a:solidFill>
           <a:ln/>
         </p:spPr>
+        <p:txBody>
+          <a:bodyPr/>
+          <a:lstStyle/>
+          <a:p>
+            <a:endParaRPr lang="en-US"/>
+          </a:p>
+        </p:txBody>
       </p:sp>
       <p:pic>
         <p:nvPicPr>
-          <p:cNvPr id="19" name="Image 4" descr="preencoded.png">    </p:cNvPr>
+          <p:cNvPr id="19" name="Image 4" descr="preencoded.png"/>
           <p:cNvPicPr>
             <a:picLocks noChangeAspect="1"/>
           </p:cNvPicPr>
           <p:nvPr/>
         </p:nvPicPr>
         <p:blipFill>
-          <a:blip r:embed="rId5"/>
+          <a:blip r:embed="rId3"/>
           <a:stretch>
             <a:fillRect/>
           </a:stretch>
@@ -12348,7 +12232,7 @@
           <a:bodyPr wrap="square" lIns="0" tIns="0" rIns="0" bIns="0" rtlCol="0" anchor="ctr"/>
           <a:lstStyle/>
           <a:p>
-            <a:pPr indent="0" marL="0">
+            <a:pPr marL="0" indent="0">
               <a:buNone/>
             </a:pPr>
             <a:r>
@@ -12392,6 +12276,13 @@
             <a:prstDash val="solid"/>
           </a:ln>
         </p:spPr>
+        <p:txBody>
+          <a:bodyPr/>
+          <a:lstStyle/>
+          <a:p>
+            <a:endParaRPr lang="en-US"/>
+          </a:p>
+        </p:txBody>
       </p:sp>
       <p:sp>
         <p:nvSpPr>
@@ -12412,17 +12303,24 @@
           </a:solidFill>
           <a:ln/>
         </p:spPr>
+        <p:txBody>
+          <a:bodyPr/>
+          <a:lstStyle/>
+          <a:p>
+            <a:endParaRPr lang="en-US"/>
+          </a:p>
+        </p:txBody>
       </p:sp>
       <p:pic>
         <p:nvPicPr>
-          <p:cNvPr id="23" name="Image 5" descr="preencoded.png">    </p:cNvPr>
+          <p:cNvPr id="23" name="Image 5" descr="preencoded.png"/>
           <p:cNvPicPr>
             <a:picLocks noChangeAspect="1"/>
           </p:cNvPicPr>
           <p:nvPr/>
         </p:nvPicPr>
         <p:blipFill>
-          <a:blip r:embed="rId6"/>
+          <a:blip r:embed="rId3"/>
           <a:stretch>
             <a:fillRect/>
           </a:stretch>
@@ -12458,7 +12356,7 @@
           <a:bodyPr wrap="square" lIns="0" tIns="0" rIns="0" bIns="0" rtlCol="0" anchor="ctr"/>
           <a:lstStyle/>
           <a:p>
-            <a:pPr indent="0" marL="0">
+            <a:pPr marL="0" indent="0">
               <a:buNone/>
             </a:pPr>
             <a:r>
@@ -12502,6 +12400,13 @@
             <a:prstDash val="solid"/>
           </a:ln>
         </p:spPr>
+        <p:txBody>
+          <a:bodyPr/>
+          <a:lstStyle/>
+          <a:p>
+            <a:endParaRPr lang="en-US"/>
+          </a:p>
+        </p:txBody>
       </p:sp>
       <p:sp>
         <p:nvSpPr>
@@ -12522,17 +12427,24 @@
           </a:solidFill>
           <a:ln/>
         </p:spPr>
+        <p:txBody>
+          <a:bodyPr/>
+          <a:lstStyle/>
+          <a:p>
+            <a:endParaRPr lang="en-US"/>
+          </a:p>
+        </p:txBody>
       </p:sp>
       <p:pic>
         <p:nvPicPr>
-          <p:cNvPr id="27" name="Image 6" descr="preencoded.png">    </p:cNvPr>
+          <p:cNvPr id="27" name="Image 6" descr="preencoded.png"/>
           <p:cNvPicPr>
             <a:picLocks noChangeAspect="1"/>
           </p:cNvPicPr>
           <p:nvPr/>
         </p:nvPicPr>
         <p:blipFill>
-          <a:blip r:embed="rId7"/>
+          <a:blip r:embed="rId3"/>
           <a:stretch>
             <a:fillRect/>
           </a:stretch>
@@ -12568,7 +12480,7 @@
           <a:bodyPr wrap="square" lIns="0" tIns="0" rIns="0" bIns="0" rtlCol="0" anchor="ctr"/>
           <a:lstStyle/>
           <a:p>
-            <a:pPr indent="0" marL="0">
+            <a:pPr marL="0" indent="0">
               <a:buNone/>
             </a:pPr>
             <a:r>
@@ -12607,6 +12519,13 @@
           </a:solidFill>
           <a:ln/>
         </p:spPr>
+        <p:txBody>
+          <a:bodyPr/>
+          <a:lstStyle/>
+          <a:p>
+            <a:endParaRPr lang="en-US"/>
+          </a:p>
+        </p:txBody>
       </p:sp>
       <p:sp>
         <p:nvSpPr>
@@ -12629,7 +12548,7 @@
           <a:bodyPr wrap="square" lIns="0" tIns="0" rIns="0" bIns="0" rtlCol="0" anchor="ctr"/>
           <a:lstStyle/>
           <a:p>
-            <a:pPr indent="0" marL="0">
+            <a:pPr marL="0" indent="0">
               <a:buNone/>
             </a:pPr>
             <a:r>
@@ -12643,9 +12562,6 @@
               </a:rPr>
               <a:t>Catch them as </a:t>
             </a:r>
-            <a:pPr indent="0" marL="0">
-              <a:buNone/>
-            </a:pPr>
             <a:r>
               <a:rPr lang="en-US" sz="1350" b="1" dirty="0">
                 <a:solidFill>
@@ -12657,9 +12573,6 @@
               </a:rPr>
               <a:t>/code-review checks </a:t>
             </a:r>
-            <a:pPr indent="0" marL="0">
-              <a:buNone/>
-            </a:pPr>
             <a:r>
               <a:rPr lang="en-US" sz="1350" dirty="0">
                 <a:solidFill>
@@ -12696,7 +12609,7 @@
           <a:bodyPr wrap="square" rtlCol="0" anchor="ctr"/>
           <a:lstStyle/>
           <a:p>
-            <a:pPr indent="0" marL="0">
+            <a:pPr marL="0" indent="0">
               <a:buNone/>
             </a:pPr>
             <a:r>
@@ -12735,7 +12648,7 @@
           <a:bodyPr wrap="square" rtlCol="0" anchor="ctr"/>
           <a:lstStyle/>
           <a:p>
-            <a:pPr algn="r" indent="0" marL="0">
+            <a:pPr marL="0" indent="0" algn="r">
               <a:buNone/>
             </a:pPr>
             <a:r>
@@ -12750,45 +12663,6 @@
               <a:t>Section 4  ·  9/14</a:t>
             </a:r>
             <a:endParaRPr lang="en-US" sz="900" dirty="0"/>
-          </a:p>
-        </p:txBody>
-      </p:sp>
-      <p:sp>
-        <p:nvSpPr>
-          <p:cNvPr id="33" name="Text 24"/>
-          <p:cNvSpPr/>
-          <p:nvPr/>
-        </p:nvSpPr>
-        <p:spPr>
-          <a:xfrm>
-            <a:off x="548640" y="4462272"/>
-            <a:ext cx="8046720" cy="274320"/>
-          </a:xfrm>
-          <a:prstGeom prst="rect">
-            <a:avLst/>
-          </a:prstGeom>
-          <a:noFill/>
-          <a:ln/>
-        </p:spPr>
-        <p:txBody>
-          <a:bodyPr wrap="square" lIns="0" tIns="0" rIns="0" bIns="0" rtlCol="0" anchor="ctr"/>
-          <a:lstStyle/>
-          <a:p>
-            <a:pPr indent="0" marL="0">
-              <a:buNone/>
-            </a:pPr>
-            <a:r>
-              <a:rPr lang="en-US" sz="1000" i="1" dirty="0">
-                <a:solidFill>
-                  <a:srgbClr val="615C52"/>
-                </a:solidFill>
-                <a:latin typeface="Inter" pitchFamily="34" charset="0"/>
-                <a:ea typeface="Inter" pitchFamily="34" charset="-122"/>
-                <a:cs typeface="Inter" pitchFamily="34" charset="-120"/>
-              </a:rPr>
-              <a:t>▸ These six are predictable — so make them mechanical review and hook checks.</a:t>
-            </a:r>
-            <a:endParaRPr lang="en-US" sz="1000" dirty="0"/>
           </a:p>
         </p:txBody>
       </p:sp>

--- a/decks/Day 1/Section4-AI-in-the-SDLC.pptx
+++ b/decks/Day 1/Section4-AI-in-the-SDLC.pptx
@@ -648,45 +648,6 @@
           </a:p>
         </p:txBody>
       </p:sp>
-      <p:sp>
-        <p:nvSpPr>
-          <p:cNvPr id="8" name="Text 5"/>
-          <p:cNvSpPr/>
-          <p:nvPr/>
-        </p:nvSpPr>
-        <p:spPr>
-          <a:xfrm>
-            <a:off x="640080" y="3200400"/>
-            <a:ext cx="7315200" cy="365760"/>
-          </a:xfrm>
-          <a:prstGeom prst="rect">
-            <a:avLst/>
-          </a:prstGeom>
-          <a:noFill/>
-          <a:ln/>
-        </p:spPr>
-        <p:txBody>
-          <a:bodyPr wrap="square" lIns="0" tIns="0" rIns="0" bIns="0" rtlCol="0" anchor="ctr"/>
-          <a:lstStyle/>
-          <a:p>
-            <a:pPr marL="0" indent="0">
-              <a:buNone/>
-            </a:pPr>
-            <a:r>
-              <a:rPr lang="en-US" sz="1700" dirty="0">
-                <a:solidFill>
-                  <a:srgbClr val="615C52"/>
-                </a:solidFill>
-                <a:latin typeface="Inter" pitchFamily="34" charset="0"/>
-                <a:ea typeface="Inter" pitchFamily="34" charset="-122"/>
-                <a:cs typeface="Inter" pitchFamily="34" charset="-120"/>
-              </a:rPr>
-              <a:t>90 min  ·  30 lecture / demo  +  60 lab</a:t>
-            </a:r>
-            <a:endParaRPr lang="en-US" sz="1700" dirty="0"/>
-          </a:p>
-        </p:txBody>
-      </p:sp>
     </p:spTree>
   </p:cSld>
   <p:clrMapOvr>
